--- a/Diode-Sentinel.pptx
+++ b/Diode-Sentinel.pptx
@@ -6261,322 +6261,35 @@
               </a:defRPr>
             </a:pPr>
             <a:r>
-              <a:t>observability.py · 21 rows · each cites the feature, the PS class, the status, the reason</a:t>
-            </a:r>
-          </a:p>
-        </p:txBody>
-      </p:sp>
-      <p:graphicFrame>
-        <p:nvGraphicFramePr>
-          <p:cNvPr id="4" name="Table 3"/>
-          <p:cNvGraphicFramePr>
-            <a:graphicFrameLocks noGrp="1"/>
-          </p:cNvGraphicFramePr>
+              <a:t>core/observability.py · 21 rows · each cites the feature, the PS class, the status, the reason</a:t>
+            </a:r>
+          </a:p>
+        </p:txBody>
+      </p:sp>
+      <p:pic>
+        <p:nvPicPr>
+          <p:cNvPr id="4" name="Picture 3" descr="contract.png"/>
+          <p:cNvPicPr>
+            <a:picLocks noChangeAspect="1"/>
+          </p:cNvPicPr>
           <p:nvPr/>
-        </p:nvGraphicFramePr>
-        <p:xfrm>
-          <a:off x="502920" y="1417320"/>
-          <a:ext cx="6949438" cy="1243584"/>
-        </p:xfrm>
-        <a:graphic>
-          <a:graphicData uri="http://schemas.openxmlformats.org/drawingml/2006/table">
-            <a:tbl>
-              <a:tblPr firstRow="1" bandRow="1">
-                <a:tableStyleId>{5C22544A-7EE6-4342-B048-85BDC9FD1C3A}</a:tableStyleId>
-              </a:tblPr>
-              <a:tblGrid>
-                <a:gridCol w="1588443"/>
-                <a:gridCol w="794221"/>
-                <a:gridCol w="4566774"/>
-              </a:tblGrid>
-              <a:tr h="310896">
-                <a:tc>
-                  <a:txBody>
-                    <a:bodyPr/>
-                    <a:lstStyle/>
-                    <a:p>
-                      <a:pPr>
-                        <a:defRPr sz="1400" b="1">
-                          <a:solidFill>
-                            <a:srgbClr val="58A6FF"/>
-                          </a:solidFill>
-                        </a:defRPr>
-                      </a:pPr>
-                      <a:r>
-                        <a:t>Status</a:t>
-                      </a:r>
-                    </a:p>
-                  </a:txBody>
-                  <a:tcPr marL="73152" marR="54864" marT="18288" marB="18288" anchor="ctr">
-                    <a:solidFill>
-                      <a:srgbClr val="1C222B"/>
-                    </a:solidFill>
-                  </a:tcPr>
-                </a:tc>
-                <a:tc>
-                  <a:txBody>
-                    <a:bodyPr/>
-                    <a:lstStyle/>
-                    <a:p>
-                      <a:pPr>
-                        <a:defRPr sz="1400" b="1">
-                          <a:solidFill>
-                            <a:srgbClr val="58A6FF"/>
-                          </a:solidFill>
-                        </a:defRPr>
-                      </a:pPr>
-                      <a:r>
-                        <a:t>Count</a:t>
-                      </a:r>
-                    </a:p>
-                  </a:txBody>
-                  <a:tcPr marL="73152" marR="54864" marT="18288" marB="18288" anchor="ctr">
-                    <a:solidFill>
-                      <a:srgbClr val="1C222B"/>
-                    </a:solidFill>
-                  </a:tcPr>
-                </a:tc>
-                <a:tc>
-                  <a:txBody>
-                    <a:bodyPr/>
-                    <a:lstStyle/>
-                    <a:p>
-                      <a:pPr>
-                        <a:defRPr sz="1400" b="1">
-                          <a:solidFill>
-                            <a:srgbClr val="58A6FF"/>
-                          </a:solidFill>
-                        </a:defRPr>
-                      </a:pPr>
-                      <a:r>
-                        <a:t>Meaning</a:t>
-                      </a:r>
-                    </a:p>
-                  </a:txBody>
-                  <a:tcPr marL="73152" marR="54864" marT="18288" marB="18288" anchor="ctr">
-                    <a:solidFill>
-                      <a:srgbClr val="1C222B"/>
-                    </a:solidFill>
-                  </a:tcPr>
-                </a:tc>
-              </a:tr>
-              <a:tr h="310896">
-                <a:tc>
-                  <a:txBody>
-                    <a:bodyPr/>
-                    <a:lstStyle/>
-                    <a:p>
-                      <a:pPr>
-                        <a:defRPr sz="1400" b="0">
-                          <a:solidFill>
-                            <a:srgbClr val="E6EDF3"/>
-                          </a:solidFill>
-                        </a:defRPr>
-                      </a:pPr>
-                      <a:r>
-                        <a:t>OBSERVABLE</a:t>
-                      </a:r>
-                    </a:p>
-                  </a:txBody>
-                  <a:tcPr marL="73152" marR="54864" marT="18288" marB="18288" anchor="ctr">
-                    <a:solidFill>
-                      <a:srgbClr val="161B22"/>
-                    </a:solidFill>
-                  </a:tcPr>
-                </a:tc>
-                <a:tc>
-                  <a:txBody>
-                    <a:bodyPr/>
-                    <a:lstStyle/>
-                    <a:p>
-                      <a:pPr>
-                        <a:defRPr sz="1400" b="0">
-                          <a:solidFill>
-                            <a:srgbClr val="E6EDF3"/>
-                          </a:solidFill>
-                        </a:defRPr>
-                      </a:pPr>
-                      <a:r>
-                        <a:t>15</a:t>
-                      </a:r>
-                    </a:p>
-                  </a:txBody>
-                  <a:tcPr marL="73152" marR="54864" marT="18288" marB="18288" anchor="ctr">
-                    <a:solidFill>
-                      <a:srgbClr val="161B22"/>
-                    </a:solidFill>
-                  </a:tcPr>
-                </a:tc>
-                <a:tc>
-                  <a:txBody>
-                    <a:bodyPr/>
-                    <a:lstStyle/>
-                    <a:p>
-                      <a:pPr>
-                        <a:defRPr sz="1400" b="0">
-                          <a:solidFill>
-                            <a:srgbClr val="E6EDF3"/>
-                          </a:solidFill>
-                        </a:defRPr>
-                      </a:pPr>
-                      <a:r>
-                        <a:t>computed from the feed; row cites the consuming function</a:t>
-                      </a:r>
-                    </a:p>
-                  </a:txBody>
-                  <a:tcPr marL="73152" marR="54864" marT="18288" marB="18288" anchor="ctr">
-                    <a:solidFill>
-                      <a:srgbClr val="161B22"/>
-                    </a:solidFill>
-                  </a:tcPr>
-                </a:tc>
-              </a:tr>
-              <a:tr h="310896">
-                <a:tc>
-                  <a:txBody>
-                    <a:bodyPr/>
-                    <a:lstStyle/>
-                    <a:p>
-                      <a:pPr>
-                        <a:defRPr sz="1400" b="0">
-                          <a:solidFill>
-                            <a:srgbClr val="E6EDF3"/>
-                          </a:solidFill>
-                        </a:defRPr>
-                      </a:pPr>
-                      <a:r>
-                        <a:t>IMPOSSIBLE</a:t>
-                      </a:r>
-                    </a:p>
-                  </a:txBody>
-                  <a:tcPr marL="73152" marR="54864" marT="18288" marB="18288" anchor="ctr">
-                    <a:solidFill>
-                      <a:srgbClr val="161B22"/>
-                    </a:solidFill>
-                  </a:tcPr>
-                </a:tc>
-                <a:tc>
-                  <a:txBody>
-                    <a:bodyPr/>
-                    <a:lstStyle/>
-                    <a:p>
-                      <a:pPr>
-                        <a:defRPr sz="1400" b="0">
-                          <a:solidFill>
-                            <a:srgbClr val="E6EDF3"/>
-                          </a:solidFill>
-                        </a:defRPr>
-                      </a:pPr>
-                      <a:r>
-                        <a:t>5</a:t>
-                      </a:r>
-                    </a:p>
-                  </a:txBody>
-                  <a:tcPr marL="73152" marR="54864" marT="18288" marB="18288" anchor="ctr">
-                    <a:solidFill>
-                      <a:srgbClr val="161B22"/>
-                    </a:solidFill>
-                  </a:tcPr>
-                </a:tc>
-                <a:tc>
-                  <a:txBody>
-                    <a:bodyPr/>
-                    <a:lstStyle/>
-                    <a:p>
-                      <a:pPr>
-                        <a:defRPr sz="1400" b="0">
-                          <a:solidFill>
-                            <a:srgbClr val="E6EDF3"/>
-                          </a:solidFill>
-                        </a:defRPr>
-                      </a:pPr>
-                      <a:r>
-                        <a:t>information-theoretically absent; row states the physical reason</a:t>
-                      </a:r>
-                    </a:p>
-                  </a:txBody>
-                  <a:tcPr marL="73152" marR="54864" marT="18288" marB="18288" anchor="ctr">
-                    <a:solidFill>
-                      <a:srgbClr val="161B22"/>
-                    </a:solidFill>
-                  </a:tcPr>
-                </a:tc>
-              </a:tr>
-              <a:tr h="310896">
-                <a:tc>
-                  <a:txBody>
-                    <a:bodyPr/>
-                    <a:lstStyle/>
-                    <a:p>
-                      <a:pPr>
-                        <a:defRPr sz="1400" b="0">
-                          <a:solidFill>
-                            <a:srgbClr val="E6EDF3"/>
-                          </a:solidFill>
-                        </a:defRPr>
-                      </a:pPr>
-                      <a:r>
-                        <a:t>SUBSTITUTED</a:t>
-                      </a:r>
-                    </a:p>
-                  </a:txBody>
-                  <a:tcPr marL="73152" marR="54864" marT="18288" marB="18288" anchor="ctr">
-                    <a:solidFill>
-                      <a:srgbClr val="161B22"/>
-                    </a:solidFill>
-                  </a:tcPr>
-                </a:tc>
-                <a:tc>
-                  <a:txBody>
-                    <a:bodyPr/>
-                    <a:lstStyle/>
-                    <a:p>
-                      <a:pPr>
-                        <a:defRPr sz="1400" b="0">
-                          <a:solidFill>
-                            <a:srgbClr val="E6EDF3"/>
-                          </a:solidFill>
-                        </a:defRPr>
-                      </a:pPr>
-                      <a:r>
-                        <a:t>1</a:t>
-                      </a:r>
-                    </a:p>
-                  </a:txBody>
-                  <a:tcPr marL="73152" marR="54864" marT="18288" marB="18288" anchor="ctr">
-                    <a:solidFill>
-                      <a:srgbClr val="161B22"/>
-                    </a:solidFill>
-                  </a:tcPr>
-                </a:tc>
-                <a:tc>
-                  <a:txBody>
-                    <a:bodyPr/>
-                    <a:lstStyle/>
-                    <a:p>
-                      <a:pPr>
-                        <a:defRPr sz="1400" b="0">
-                          <a:solidFill>
-                            <a:srgbClr val="E6EDF3"/>
-                          </a:solidFill>
-                        </a:defRPr>
-                      </a:pPr>
-                      <a:r>
-                        <a:t>requested signal is impossible; a one-way proxy replaces it</a:t>
-                      </a:r>
-                    </a:p>
-                  </a:txBody>
-                  <a:tcPr marL="73152" marR="54864" marT="18288" marB="18288" anchor="ctr">
-                    <a:solidFill>
-                      <a:srgbClr val="161B22"/>
-                    </a:solidFill>
-                  </a:tcPr>
-                </a:tc>
-              </a:tr>
-            </a:tbl>
-          </a:graphicData>
-        </a:graphic>
-      </p:graphicFrame>
+        </p:nvPicPr>
+        <p:blipFill>
+          <a:blip r:embed="rId2"/>
+          <a:stretch>
+            <a:fillRect/>
+          </a:stretch>
+        </p:blipFill>
+        <p:spPr>
+          <a:xfrm>
+            <a:off x="411480" y="1078992"/>
+            <a:ext cx="7040880" cy="3960495"/>
+          </a:xfrm>
+          <a:prstGeom prst="rect">
+            <a:avLst/>
+          </a:prstGeom>
+        </p:spPr>
+      </p:pic>
       <p:sp>
         <p:nvSpPr>
           <p:cNvPr id="5" name="TextBox 4"/>
@@ -6585,8 +6298,8 @@
         </p:nvSpPr>
         <p:spPr>
           <a:xfrm>
-            <a:off x="7726679" y="1371600"/>
-            <a:ext cx="4" cy="5166360"/>
+            <a:off x="7726679" y="1234440"/>
+            <a:ext cx="4" cy="5303520"/>
           </a:xfrm>
           <a:prstGeom prst="rect">
             <a:avLst/>
@@ -6640,7 +6353,7 @@
               </a:defRPr>
             </a:pPr>
             <a:r>
-              <a:t>test_contract.py scans detector sources for forbidden bidirectional tokens — ja3s, server_hello, rcode, nxdomain, ttl, rtt, bytes_in, in_out_ratio — and FAILS THE BUILD on a hit.</a:t>
+              <a:t>tests/test_contract.py scans detector sources for forbidden bidirectional tokens — ja3s, server_hello, rcode, nxdomain, ttl, rtt, bytes_in, in_out_ratio — and FAILS THE BUILD on a hit.</a:t>
             </a:r>
           </a:p>
           <a:p>
@@ -6671,6 +6384,21 @@
             </a:pPr>
             <a:r>
               <a:t>The one SUBSTITUTED row: UDP reflection is defined by response size, so we substitute per-source UDP fan-out cardinality.</a:t>
+            </a:r>
+          </a:p>
+          <a:p>
+            <a:pPr>
+              <a:spcAft>
+                <a:spcPts val="600"/>
+              </a:spcAft>
+              <a:defRPr sz="1400">
+                <a:solidFill>
+                  <a:srgbClr val="E6EDF3"/>
+                </a:solidFill>
+              </a:defRPr>
+            </a:pPr>
+            <a:r>
+              <a:t>The five IMPOSSIBLE rows are named with the physical reason each is absent — and the substitute we use instead.</a:t>
             </a:r>
           </a:p>
         </p:txBody>

--- a/Diode-Sentinel.pptx
+++ b/Diode-Sentinel.pptx
@@ -5909,7 +5909,7 @@
               </a:defRPr>
             </a:pPr>
             <a:r>
-              <a:t>323 checks across ten suites, all green · 6/6 threat classes · ~50k pkt/s single-core pure Python · built with no C extension, no GPU, and nothing that requires a reply.</a:t>
+              <a:t>336 checks across ten suites, all green · 6/6 threat classes · ~50k pkt/s single-core pure Python · built with no C extension, no GPU, and nothing that requires a reply.</a:t>
             </a:r>
           </a:p>
         </p:txBody>

--- a/Diode-Sentinel.pptx
+++ b/Diode-Sentinel.pptx
@@ -22,6 +22,9 @@
     <p:sldId id="270" r:id="rId21"/>
     <p:sldId id="271" r:id="rId22"/>
     <p:sldId id="272" r:id="rId23"/>
+    <p:sldId id="273" r:id="rId24"/>
+    <p:sldId id="274" r:id="rId25"/>
+    <p:sldId id="275" r:id="rId26"/>
   </p:sldIdLst>
   <p:sldSz cx="12191695" cy="6858000" type="screen4x3"/>
   <p:notesSz cx="6858000" cy="9144000"/>
@@ -3317,21 +3320,146 @@
               </a:defRPr>
             </a:pPr>
             <a:r>
-              <a:t>Coverage and false positives — the measured answer, not the headline you want</a:t>
-            </a:r>
-          </a:p>
-        </p:txBody>
-      </p:sp>
-      <p:sp>
-        <p:nvSpPr>
-          <p:cNvPr id="4" name="TextBox 3"/>
+              <a:t>DEMO 03 · Filter the queue to the selected source</a:t>
+            </a:r>
+          </a:p>
+          <a:p>
+            <a:pPr>
+              <a:defRPr sz="1400">
+                <a:solidFill>
+                  <a:srgbClr val="9DA5B0"/>
+                </a:solidFill>
+              </a:defRPr>
+            </a:pPr>
+            <a:r>
+              <a:t>An analyst can narrow the evidence and clear the filter to restore full scope</a:t>
+            </a:r>
+          </a:p>
+        </p:txBody>
+      </p:sp>
+      <p:pic>
+        <p:nvPicPr>
+          <p:cNvPr id="4" name="Picture 3" descr="source-pivot-demo.png"/>
+          <p:cNvPicPr>
+            <a:picLocks noChangeAspect="1"/>
+          </p:cNvPicPr>
+          <p:nvPr/>
+        </p:nvPicPr>
+        <p:blipFill>
+          <a:blip r:embed="rId2"/>
+          <a:stretch>
+            <a:fillRect/>
+          </a:stretch>
+        </p:blipFill>
+        <p:spPr>
+          <a:xfrm>
+            <a:off x="502920" y="1298448"/>
+            <a:ext cx="7406640" cy="5143500"/>
+          </a:xfrm>
+          <a:prstGeom prst="rect">
+            <a:avLst/>
+          </a:prstGeom>
+        </p:spPr>
+      </p:pic>
+      <p:sp>
+        <p:nvSpPr>
+          <p:cNvPr id="5" name="Rounded Rectangle 4"/>
+          <p:cNvSpPr/>
+          <p:nvPr/>
+        </p:nvSpPr>
+        <p:spPr>
+          <a:xfrm>
+            <a:off x="8138160" y="1417320"/>
+            <a:ext cx="3520440" cy="1371600"/>
+          </a:xfrm>
+          <a:prstGeom prst="roundRect">
+            <a:avLst/>
+          </a:prstGeom>
+          <a:solidFill>
+            <a:srgbClr val="161B22"/>
+          </a:solidFill>
+          <a:ln>
+            <a:solidFill>
+              <a:srgbClr val="303844"/>
+            </a:solidFill>
+          </a:ln>
+          <a:effectLst/>
+        </p:spPr>
+        <p:style>
+          <a:lnRef idx="1">
+            <a:schemeClr val="accent1"/>
+          </a:lnRef>
+          <a:fillRef idx="3">
+            <a:schemeClr val="accent1"/>
+          </a:fillRef>
+          <a:effectRef idx="2">
+            <a:schemeClr val="accent1"/>
+          </a:effectRef>
+          <a:fontRef idx="minor">
+            <a:schemeClr val="lt1"/>
+          </a:fontRef>
+        </p:style>
+        <p:txBody>
+          <a:bodyPr rtlCol="0" anchor="ctr"/>
+          <a:lstStyle/>
+          <a:p>
+            <a:pPr algn="ctr"/>
+          </a:p>
+        </p:txBody>
+      </p:sp>
+      <p:sp>
+        <p:nvSpPr>
+          <p:cNvPr id="6" name="Rectangle 5"/>
+          <p:cNvSpPr/>
+          <p:nvPr/>
+        </p:nvSpPr>
+        <p:spPr>
+          <a:xfrm>
+            <a:off x="8138160" y="1417320"/>
+            <a:ext cx="50292" cy="1371600"/>
+          </a:xfrm>
+          <a:prstGeom prst="rect">
+            <a:avLst/>
+          </a:prstGeom>
+          <a:solidFill>
+            <a:srgbClr val="58A6FF"/>
+          </a:solidFill>
+          <a:ln>
+            <a:noFill/>
+          </a:ln>
+        </p:spPr>
+        <p:style>
+          <a:lnRef idx="1">
+            <a:schemeClr val="accent1"/>
+          </a:lnRef>
+          <a:fillRef idx="3">
+            <a:schemeClr val="accent1"/>
+          </a:fillRef>
+          <a:effectRef idx="2">
+            <a:schemeClr val="accent1"/>
+          </a:effectRef>
+          <a:fontRef idx="minor">
+            <a:schemeClr val="lt1"/>
+          </a:fontRef>
+        </p:style>
+        <p:txBody>
+          <a:bodyPr rtlCol="0" anchor="ctr"/>
+          <a:lstStyle/>
+          <a:p>
+            <a:pPr algn="ctr"/>
+          </a:p>
+        </p:txBody>
+      </p:sp>
+      <p:sp>
+        <p:nvSpPr>
+          <p:cNvPr id="7" name="TextBox 6"/>
           <p:cNvSpPr txBox="1"/>
           <p:nvPr/>
         </p:nvSpPr>
         <p:spPr>
           <a:xfrm>
-            <a:off x="502920" y="1188720"/>
-            <a:ext cx="11185855" cy="5349240"/>
+            <a:off x="8321040" y="1508760"/>
+            <a:ext cx="3200400" cy="1225296"/>
           </a:xfrm>
           <a:prstGeom prst="rect">
             <a:avLst/>
@@ -3339,128 +3467,358 @@
           <a:noFill/>
         </p:spPr>
         <p:txBody>
-          <a:bodyPr wrap="square">
+          <a:bodyPr wrap="square" lIns="0" rIns="0" tIns="0" bIns="0">
             <a:spAutoFit/>
           </a:bodyPr>
           <a:lstStyle/>
           <a:p>
             <a:pPr>
               <a:spcAft>
-                <a:spcPts val="600"/>
+                <a:spcPts val="400"/>
               </a:spcAft>
-              <a:defRPr sz="1400">
+              <a:defRPr sz="900" b="1">
+                <a:solidFill>
+                  <a:srgbClr val="58A6FF"/>
+                </a:solidFill>
+              </a:defRPr>
+            </a:pPr>
+            <a:r>
+              <a:t>SELECTED ENTITY</a:t>
+            </a:r>
+          </a:p>
+          <a:p>
+            <a:pPr>
+              <a:spcAft>
+                <a:spcPts val="300"/>
+              </a:spcAft>
+              <a:defRPr sz="1700" b="1">
                 <a:solidFill>
                   <a:srgbClr val="E6EDF3"/>
                 </a:solidFill>
               </a:defRPr>
             </a:pPr>
             <a:r>
-              <a:t>6/6 PS threat classes covered. The rules tier emits 12 distinct threat classes (13 with the ML tier): 46 alerts on the default capture (68 with ML), plus 20 benign periodic events suppressed by the allowlist.</a:t>
-            </a:r>
-          </a:p>
+              <a:t>Source 10.0.0.7</a:t>
+            </a:r>
+          </a:p>
+          <a:p>
+            <a:pPr>
+              <a:defRPr sz="1100">
+                <a:solidFill>
+                  <a:srgbClr val="9DA5B0"/>
+                </a:solidFill>
+              </a:defRPr>
+            </a:pPr>
+            <a:r>
+              <a:t>The queue narrows to records matching this observed source. The count reflects the captured moment.</a:t>
+            </a:r>
+          </a:p>
+        </p:txBody>
+      </p:sp>
+      <p:sp>
+        <p:nvSpPr>
+          <p:cNvPr id="8" name="Rounded Rectangle 7"/>
+          <p:cNvSpPr/>
+          <p:nvPr/>
+        </p:nvSpPr>
+        <p:spPr>
+          <a:xfrm>
+            <a:off x="8138160" y="3108960"/>
+            <a:ext cx="3520440" cy="1371600"/>
+          </a:xfrm>
+          <a:prstGeom prst="roundRect">
+            <a:avLst/>
+          </a:prstGeom>
+          <a:solidFill>
+            <a:srgbClr val="161B22"/>
+          </a:solidFill>
+          <a:ln>
+            <a:solidFill>
+              <a:srgbClr val="303844"/>
+            </a:solidFill>
+          </a:ln>
+          <a:effectLst/>
+        </p:spPr>
+        <p:style>
+          <a:lnRef idx="1">
+            <a:schemeClr val="accent1"/>
+          </a:lnRef>
+          <a:fillRef idx="3">
+            <a:schemeClr val="accent1"/>
+          </a:fillRef>
+          <a:effectRef idx="2">
+            <a:schemeClr val="accent1"/>
+          </a:effectRef>
+          <a:fontRef idx="minor">
+            <a:schemeClr val="lt1"/>
+          </a:fontRef>
+        </p:style>
+        <p:txBody>
+          <a:bodyPr rtlCol="0" anchor="ctr"/>
+          <a:lstStyle/>
+          <a:p>
+            <a:pPr algn="ctr"/>
+          </a:p>
+        </p:txBody>
+      </p:sp>
+      <p:sp>
+        <p:nvSpPr>
+          <p:cNvPr id="9" name="Rectangle 8"/>
+          <p:cNvSpPr/>
+          <p:nvPr/>
+        </p:nvSpPr>
+        <p:spPr>
+          <a:xfrm>
+            <a:off x="8138160" y="3108960"/>
+            <a:ext cx="50292" cy="1371600"/>
+          </a:xfrm>
+          <a:prstGeom prst="rect">
+            <a:avLst/>
+          </a:prstGeom>
+          <a:solidFill>
+            <a:srgbClr val="3FB950"/>
+          </a:solidFill>
+          <a:ln>
+            <a:noFill/>
+          </a:ln>
+        </p:spPr>
+        <p:style>
+          <a:lnRef idx="1">
+            <a:schemeClr val="accent1"/>
+          </a:lnRef>
+          <a:fillRef idx="3">
+            <a:schemeClr val="accent1"/>
+          </a:fillRef>
+          <a:effectRef idx="2">
+            <a:schemeClr val="accent1"/>
+          </a:effectRef>
+          <a:fontRef idx="minor">
+            <a:schemeClr val="lt1"/>
+          </a:fontRef>
+        </p:style>
+        <p:txBody>
+          <a:bodyPr rtlCol="0" anchor="ctr"/>
+          <a:lstStyle/>
+          <a:p>
+            <a:pPr algn="ctr"/>
+          </a:p>
+        </p:txBody>
+      </p:sp>
+      <p:sp>
+        <p:nvSpPr>
+          <p:cNvPr id="10" name="TextBox 9"/>
+          <p:cNvSpPr txBox="1"/>
+          <p:nvPr/>
+        </p:nvSpPr>
+        <p:spPr>
+          <a:xfrm>
+            <a:off x="8321040" y="3200400"/>
+            <a:ext cx="3200400" cy="1225296"/>
+          </a:xfrm>
+          <a:prstGeom prst="rect">
+            <a:avLst/>
+          </a:prstGeom>
+          <a:noFill/>
+        </p:spPr>
+        <p:txBody>
+          <a:bodyPr wrap="square" lIns="0" rIns="0" tIns="0" bIns="0">
+            <a:spAutoFit/>
+          </a:bodyPr>
+          <a:lstStyle/>
           <a:p>
             <a:pPr>
               <a:spcAft>
-                <a:spcPts val="600"/>
+                <a:spcPts val="400"/>
               </a:spcAft>
-              <a:defRPr sz="1400">
+              <a:defRPr sz="900" b="1">
                 <a:solidFill>
                   <a:srgbClr val="3FB950"/>
                 </a:solidFill>
               </a:defRPr>
             </a:pPr>
             <a:r>
-              <a:t>On the default capture all 46 rules-tier alerts land on hosts the generator designates as attackers — zero FPs.</a:t>
+              <a:t>REVIEW IN CONTEXT</a:t>
             </a:r>
           </a:p>
           <a:p>
             <a:pPr>
               <a:spcAft>
-                <a:spcPts val="600"/>
+                <a:spcPts val="300"/>
               </a:spcAft>
-              <a:defRPr sz="1400">
+              <a:defRPr sz="1700" b="1">
+                <a:solidFill>
+                  <a:srgbClr val="E6EDF3"/>
+                </a:solidFill>
+              </a:defRPr>
+            </a:pPr>
+            <a:r>
+              <a:t>Compare signals over time</a:t>
+            </a:r>
+          </a:p>
+          <a:p>
+            <a:pPr>
+              <a:defRPr sz="1100">
+                <a:solidFill>
+                  <a:srgbClr val="9DA5B0"/>
+                </a:solidFill>
+              </a:defRPr>
+            </a:pPr>
+            <a:r>
+              <a:t>Check the host’s other observed destinations and alert sequence; clear the filter to return to all records.</a:t>
+            </a:r>
+          </a:p>
+        </p:txBody>
+      </p:sp>
+      <p:sp>
+        <p:nvSpPr>
+          <p:cNvPr id="11" name="Rounded Rectangle 10"/>
+          <p:cNvSpPr/>
+          <p:nvPr/>
+        </p:nvSpPr>
+        <p:spPr>
+          <a:xfrm>
+            <a:off x="8138160" y="4800600"/>
+            <a:ext cx="3520440" cy="1371600"/>
+          </a:xfrm>
+          <a:prstGeom prst="roundRect">
+            <a:avLst/>
+          </a:prstGeom>
+          <a:solidFill>
+            <a:srgbClr val="161B22"/>
+          </a:solidFill>
+          <a:ln>
+            <a:solidFill>
+              <a:srgbClr val="303844"/>
+            </a:solidFill>
+          </a:ln>
+          <a:effectLst/>
+        </p:spPr>
+        <p:style>
+          <a:lnRef idx="1">
+            <a:schemeClr val="accent1"/>
+          </a:lnRef>
+          <a:fillRef idx="3">
+            <a:schemeClr val="accent1"/>
+          </a:fillRef>
+          <a:effectRef idx="2">
+            <a:schemeClr val="accent1"/>
+          </a:effectRef>
+          <a:fontRef idx="minor">
+            <a:schemeClr val="lt1"/>
+          </a:fontRef>
+        </p:style>
+        <p:txBody>
+          <a:bodyPr rtlCol="0" anchor="ctr"/>
+          <a:lstStyle/>
+          <a:p>
+            <a:pPr algn="ctr"/>
+          </a:p>
+        </p:txBody>
+      </p:sp>
+      <p:sp>
+        <p:nvSpPr>
+          <p:cNvPr id="12" name="Rectangle 11"/>
+          <p:cNvSpPr/>
+          <p:nvPr/>
+        </p:nvSpPr>
+        <p:spPr>
+          <a:xfrm>
+            <a:off x="8138160" y="4800600"/>
+            <a:ext cx="50292" cy="1371600"/>
+          </a:xfrm>
+          <a:prstGeom prst="rect">
+            <a:avLst/>
+          </a:prstGeom>
+          <a:solidFill>
+            <a:srgbClr val="D29922"/>
+          </a:solidFill>
+          <a:ln>
+            <a:noFill/>
+          </a:ln>
+        </p:spPr>
+        <p:style>
+          <a:lnRef idx="1">
+            <a:schemeClr val="accent1"/>
+          </a:lnRef>
+          <a:fillRef idx="3">
+            <a:schemeClr val="accent1"/>
+          </a:fillRef>
+          <a:effectRef idx="2">
+            <a:schemeClr val="accent1"/>
+          </a:effectRef>
+          <a:fontRef idx="minor">
+            <a:schemeClr val="lt1"/>
+          </a:fontRef>
+        </p:style>
+        <p:txBody>
+          <a:bodyPr rtlCol="0" anchor="ctr"/>
+          <a:lstStyle/>
+          <a:p>
+            <a:pPr algn="ctr"/>
+          </a:p>
+        </p:txBody>
+      </p:sp>
+      <p:sp>
+        <p:nvSpPr>
+          <p:cNvPr id="13" name="TextBox 12"/>
+          <p:cNvSpPr txBox="1"/>
+          <p:nvPr/>
+        </p:nvSpPr>
+        <p:spPr>
+          <a:xfrm>
+            <a:off x="8321040" y="4892040"/>
+            <a:ext cx="3200400" cy="1225296"/>
+          </a:xfrm>
+          <a:prstGeom prst="rect">
+            <a:avLst/>
+          </a:prstGeom>
+          <a:noFill/>
+        </p:spPr>
+        <p:txBody>
+          <a:bodyPr wrap="square" lIns="0" rIns="0" tIns="0" bIns="0">
+            <a:spAutoFit/>
+          </a:bodyPr>
+          <a:lstStyle/>
+          <a:p>
+            <a:pPr>
+              <a:spcAft>
+                <a:spcPts val="400"/>
+              </a:spcAft>
+              <a:defRPr sz="900" b="1">
                 <a:solidFill>
                   <a:srgbClr val="D29922"/>
                 </a:solidFill>
               </a:defRPr>
             </a:pPr>
             <a:r>
-              <a:t>But we built a deliberate FP-pressure variant (MESSY=1) that injects benign patterns a real network has: first-time cloud backups, low-jitter IoT telemetry, CDN-style long subdomain labels.</a:t>
-            </a:r>
-          </a:p>
-          <a:p>
-            <a:pPr lvl="1">
+              <a:t>INTERPRET CAREFULLY</a:t>
+            </a:r>
+          </a:p>
+          <a:p>
+            <a:pPr>
               <a:spcAft>
-                <a:spcPts val="600"/>
+                <a:spcPts val="300"/>
               </a:spcAft>
-              <a:defRPr sz="1200">
+              <a:defRPr sz="1700" b="1">
                 <a:solidFill>
                   <a:srgbClr val="E6EDF3"/>
                 </a:solidFill>
               </a:defRPr>
             </a:pPr>
             <a:r>
-              <a:t>On it the rules tier emits ONE TRUE CRITICAL FP — data_exfiltration at 0.95 on the benign backup host — because “large sustained upload to a never-before-seen destination” is exactly what a backup is.</a:t>
-            </a:r>
-          </a:p>
-          <a:p>
-            <a:pPr lvl="1">
-              <a:spcAft>
-                <a:spcPts val="600"/>
-              </a:spcAft>
-              <a:defRPr sz="1200">
-                <a:solidFill>
-                  <a:srgbClr val="D29922"/>
-                </a:solidFill>
-              </a:defRPr>
-            </a:pPr>
-            <a:r>
-              <a:t>That is the honest cost of a one-way exfil detector that cannot ask “was that authorised?”. Never say “zero false positives” without the FP-pressure qualifier.</a:t>
-            </a:r>
-          </a:p>
-          <a:p>
-            <a:pPr>
-              <a:spcAft>
-                <a:spcPts val="600"/>
-              </a:spcAft>
-              <a:defRPr sz="1400">
+              <a:t>A pivot is not a verdict</a:t>
+            </a:r>
+          </a:p>
+          <a:p>
+            <a:pPr>
+              <a:defRPr sz="1100">
                 <a:solidFill>
                   <a:srgbClr val="9DA5B0"/>
                 </a:solidFill>
               </a:defRPr>
             </a:pPr>
             <a:r>
-              <a:t>The allowlist count is not a result either: ALLOWLIST is operator-curated against the same telemetry IPs the generator emits, so “zero FPs after allowlisting” is partly circular.</a:t>
-            </a:r>
-          </a:p>
-          <a:p>
-            <a:pPr>
-              <a:spcAft>
-                <a:spcPts val="600"/>
-              </a:spcAft>
-              <a:defRPr sz="1400">
-                <a:solidFill>
-                  <a:srgbClr val="D29922"/>
-                </a:solidFill>
-              </a:defRPr>
-            </a:pPr>
-            <a:r>
-              <a:t>The ML tier breaks under the same pressure: 74 ml_flow_suspicious alerts at confidence 1.0, almost all on benign hosts. This is the measured reason the rules tier stays primary and the ML tier is quorum-gated.</a:t>
-            </a:r>
-          </a:p>
-          <a:p>
-            <a:pPr>
-              <a:spcAft>
-                <a:spcPts val="600"/>
-              </a:spcAft>
-              <a:defRPr sz="1400">
-                <a:solidFill>
-                  <a:srgbClr val="E6EDF3"/>
-                </a:solidFill>
-              </a:defRPr>
-            </a:pPr>
-            <a:r>
-              <a:t>Maturity signal worth quoting: per-flow ML on bare SYN packets produced 3,021 alerts; excluding bare SYNs at the tier boundary brought it to 20, all on true attack hosts.</a:t>
+              <a:t>Source association helps triage; it does not establish compromise or intent.</a:t>
             </a:r>
           </a:p>
         </p:txBody>
@@ -3542,7 +3900,7 @@
               </a:defRPr>
             </a:pPr>
             <a:r>
-              <a:t>The models — measured, including the negative results</a:t>
+              <a:t>Class (a) — three answers to have ready before a judge notices</a:t>
             </a:r>
           </a:p>
           <a:p>
@@ -3554,21 +3912,110 @@
               </a:defRPr>
             </a:pPr>
             <a:r>
-              <a:t>Temporal split, no leakage: t &lt; 500 s train / t ≥ 500 s test</a:t>
-            </a:r>
-          </a:p>
-        </p:txBody>
-      </p:sp>
-      <p:sp>
-        <p:nvSpPr>
-          <p:cNvPr id="4" name="TextBox 3"/>
+              <a:t>Volumetric / protocol DDoS from flow-level rate and source-IP entropy</a:t>
+            </a:r>
+          </a:p>
+        </p:txBody>
+      </p:sp>
+      <p:sp>
+        <p:nvSpPr>
+          <p:cNvPr id="4" name="Rounded Rectangle 3"/>
+          <p:cNvSpPr/>
+          <p:nvPr/>
+        </p:nvSpPr>
+        <p:spPr>
+          <a:xfrm>
+            <a:off x="640080" y="1417320"/>
+            <a:ext cx="5349240" cy="1572768"/>
+          </a:xfrm>
+          <a:prstGeom prst="roundRect">
+            <a:avLst/>
+          </a:prstGeom>
+          <a:solidFill>
+            <a:srgbClr val="161B22"/>
+          </a:solidFill>
+          <a:ln>
+            <a:solidFill>
+              <a:srgbClr val="303844"/>
+            </a:solidFill>
+          </a:ln>
+          <a:effectLst/>
+        </p:spPr>
+        <p:style>
+          <a:lnRef idx="1">
+            <a:schemeClr val="accent1"/>
+          </a:lnRef>
+          <a:fillRef idx="3">
+            <a:schemeClr val="accent1"/>
+          </a:fillRef>
+          <a:effectRef idx="2">
+            <a:schemeClr val="accent1"/>
+          </a:effectRef>
+          <a:fontRef idx="minor">
+            <a:schemeClr val="lt1"/>
+          </a:fontRef>
+        </p:style>
+        <p:txBody>
+          <a:bodyPr rtlCol="0" anchor="ctr"/>
+          <a:lstStyle/>
+          <a:p>
+            <a:pPr algn="ctr"/>
+          </a:p>
+        </p:txBody>
+      </p:sp>
+      <p:sp>
+        <p:nvSpPr>
+          <p:cNvPr id="5" name="Rectangle 4"/>
+          <p:cNvSpPr/>
+          <p:nvPr/>
+        </p:nvSpPr>
+        <p:spPr>
+          <a:xfrm>
+            <a:off x="640080" y="1417320"/>
+            <a:ext cx="50292" cy="1572768"/>
+          </a:xfrm>
+          <a:prstGeom prst="rect">
+            <a:avLst/>
+          </a:prstGeom>
+          <a:solidFill>
+            <a:srgbClr val="58A6FF"/>
+          </a:solidFill>
+          <a:ln>
+            <a:noFill/>
+          </a:ln>
+        </p:spPr>
+        <p:style>
+          <a:lnRef idx="1">
+            <a:schemeClr val="accent1"/>
+          </a:lnRef>
+          <a:fillRef idx="3">
+            <a:schemeClr val="accent1"/>
+          </a:fillRef>
+          <a:effectRef idx="2">
+            <a:schemeClr val="accent1"/>
+          </a:effectRef>
+          <a:fontRef idx="minor">
+            <a:schemeClr val="lt1"/>
+          </a:fontRef>
+        </p:style>
+        <p:txBody>
+          <a:bodyPr rtlCol="0" anchor="ctr"/>
+          <a:lstStyle/>
+          <a:p>
+            <a:pPr algn="ctr"/>
+          </a:p>
+        </p:txBody>
+      </p:sp>
+      <p:sp>
+        <p:nvSpPr>
+          <p:cNvPr id="6" name="TextBox 5"/>
           <p:cNvSpPr txBox="1"/>
           <p:nvPr/>
         </p:nvSpPr>
         <p:spPr>
           <a:xfrm>
-            <a:off x="502920" y="1188720"/>
-            <a:ext cx="11185855" cy="5349240"/>
+            <a:off x="822959" y="1508760"/>
+            <a:ext cx="5029200" cy="1426464"/>
           </a:xfrm>
           <a:prstGeom prst="rect">
             <a:avLst/>
@@ -3576,98 +4023,593 @@
           <a:noFill/>
         </p:spPr>
         <p:txBody>
-          <a:bodyPr wrap="square">
+          <a:bodyPr wrap="square" lIns="0" rIns="0" tIns="0" bIns="0">
             <a:spAutoFit/>
           </a:bodyPr>
           <a:lstStyle/>
           <a:p>
             <a:pPr>
               <a:spcAft>
-                <a:spcPts val="600"/>
+                <a:spcPts val="400"/>
               </a:spcAft>
-              <a:defRPr sz="1450">
+              <a:defRPr sz="900" b="1">
+                <a:solidFill>
+                  <a:srgbClr val="58A6FF"/>
+                </a:solidFill>
+              </a:defRPr>
+            </a:pPr>
+            <a:r>
+              <a:t>TCP / MIXED TRAFFIC</a:t>
+            </a:r>
+          </a:p>
+          <a:p>
+            <a:pPr>
+              <a:spcAft>
+                <a:spcPts val="300"/>
+              </a:spcAft>
+              <a:defRPr sz="1700" b="1">
                 <a:solidFill>
                   <a:srgbClr val="E6EDF3"/>
                 </a:solidFill>
               </a:defRPr>
             </a:pPr>
             <a:r>
-              <a:t>Flow model (LightGBM): benign recall 100% at 0 FP; malicious recall 85.7%, with the 10 misses documented as generator label noise — the model is right, the generator-derived labels are wrong on benign DNS from an attack host.</a:t>
-            </a:r>
-          </a:p>
+              <a:t>Spoofed-source volume</a:t>
+            </a:r>
+          </a:p>
+          <a:p>
+            <a:pPr>
+              <a:defRPr sz="1100">
+                <a:solidFill>
+                  <a:srgbClr val="9DA5B0"/>
+                </a:solidFill>
+              </a:defRPr>
+            </a:pPr>
+            <a:r>
+              <a:t>≥500 distinct sources selects `ddos_volumetric_spoofed`; SYN ratio stays in the evidence. On the reference capture it is about 0.93.</a:t>
+            </a:r>
+          </a:p>
+        </p:txBody>
+      </p:sp>
+      <p:sp>
+        <p:nvSpPr>
+          <p:cNvPr id="7" name="Rounded Rectangle 6"/>
+          <p:cNvSpPr/>
+          <p:nvPr/>
+        </p:nvSpPr>
+        <p:spPr>
+          <a:xfrm>
+            <a:off x="6217920" y="1417320"/>
+            <a:ext cx="5349240" cy="1572768"/>
+          </a:xfrm>
+          <a:prstGeom prst="roundRect">
+            <a:avLst/>
+          </a:prstGeom>
+          <a:solidFill>
+            <a:srgbClr val="161B22"/>
+          </a:solidFill>
+          <a:ln>
+            <a:solidFill>
+              <a:srgbClr val="303844"/>
+            </a:solidFill>
+          </a:ln>
+          <a:effectLst/>
+        </p:spPr>
+        <p:style>
+          <a:lnRef idx="1">
+            <a:schemeClr val="accent1"/>
+          </a:lnRef>
+          <a:fillRef idx="3">
+            <a:schemeClr val="accent1"/>
+          </a:fillRef>
+          <a:effectRef idx="2">
+            <a:schemeClr val="accent1"/>
+          </a:effectRef>
+          <a:fontRef idx="minor">
+            <a:schemeClr val="lt1"/>
+          </a:fontRef>
+        </p:style>
+        <p:txBody>
+          <a:bodyPr rtlCol="0" anchor="ctr"/>
+          <a:lstStyle/>
+          <a:p>
+            <a:pPr algn="ctr"/>
+          </a:p>
+        </p:txBody>
+      </p:sp>
+      <p:sp>
+        <p:nvSpPr>
+          <p:cNvPr id="8" name="Rectangle 7"/>
+          <p:cNvSpPr/>
+          <p:nvPr/>
+        </p:nvSpPr>
+        <p:spPr>
+          <a:xfrm>
+            <a:off x="6217920" y="1417320"/>
+            <a:ext cx="50292" cy="1572768"/>
+          </a:xfrm>
+          <a:prstGeom prst="rect">
+            <a:avLst/>
+          </a:prstGeom>
+          <a:solidFill>
+            <a:srgbClr val="3FB950"/>
+          </a:solidFill>
+          <a:ln>
+            <a:noFill/>
+          </a:ln>
+        </p:spPr>
+        <p:style>
+          <a:lnRef idx="1">
+            <a:schemeClr val="accent1"/>
+          </a:lnRef>
+          <a:fillRef idx="3">
+            <a:schemeClr val="accent1"/>
+          </a:fillRef>
+          <a:effectRef idx="2">
+            <a:schemeClr val="accent1"/>
+          </a:effectRef>
+          <a:fontRef idx="minor">
+            <a:schemeClr val="lt1"/>
+          </a:fontRef>
+        </p:style>
+        <p:txBody>
+          <a:bodyPr rtlCol="0" anchor="ctr"/>
+          <a:lstStyle/>
+          <a:p>
+            <a:pPr algn="ctr"/>
+          </a:p>
+        </p:txBody>
+      </p:sp>
+      <p:sp>
+        <p:nvSpPr>
+          <p:cNvPr id="9" name="TextBox 8"/>
+          <p:cNvSpPr txBox="1"/>
+          <p:nvPr/>
+        </p:nvSpPr>
+        <p:spPr>
+          <a:xfrm>
+            <a:off x="6400800" y="1508760"/>
+            <a:ext cx="5029200" cy="1426464"/>
+          </a:xfrm>
+          <a:prstGeom prst="rect">
+            <a:avLst/>
+          </a:prstGeom>
+          <a:noFill/>
+        </p:spPr>
+        <p:txBody>
+          <a:bodyPr wrap="square" lIns="0" rIns="0" tIns="0" bIns="0">
+            <a:spAutoFit/>
+          </a:bodyPr>
+          <a:lstStyle/>
           <a:p>
             <a:pPr>
               <a:spcAft>
-                <a:spcPts val="600"/>
+                <a:spcPts val="400"/>
               </a:spcAft>
-              <a:defRPr sz="1450">
-                <a:solidFill>
-                  <a:srgbClr val="58A6FF"/>
-                </a:solidFill>
-              </a:defRPr>
-            </a:pPr>
-            <a:r>
-              <a:t>Category 5–7 (models567/eval.json) — four of six work:</a:t>
-            </a:r>
-          </a:p>
-          <a:p>
-            <a:pPr lvl="1">
+              <a:defRPr sz="900" b="1">
+                <a:solidFill>
+                  <a:srgbClr val="3FB950"/>
+                </a:solidFill>
+              </a:defRPr>
+            </a:pPr>
+            <a:r>
+              <a:t>UDP · ONE SOURCE</a:t>
+            </a:r>
+          </a:p>
+          <a:p>
+            <a:pPr>
               <a:spcAft>
-                <a:spcPts val="600"/>
+                <a:spcPts val="300"/>
               </a:spcAft>
-              <a:defRPr sz="1250">
-                <a:solidFill>
-                  <a:srgbClr val="3FB950"/>
-                </a:solidFill>
-              </a:defRPr>
-            </a:pPr>
-            <a:r>
-              <a:t>encrypted_xgb, sequence_cnn, scan_rf and exfil_xgb all reach recall 1.000 at 0 benign FP on the temporal holdout (t ≥ 390 s).</a:t>
-            </a:r>
-          </a:p>
-          <a:p>
-            <a:pPr lvl="1">
+              <a:defRPr sz="1700" b="1">
+                <a:solidFill>
+                  <a:srgbClr val="E6EDF3"/>
+                </a:solidFill>
+              </a:defRPr>
+            </a:pPr>
+            <a:r>
+              <a:t>Fan-out across endpoints</a:t>
+            </a:r>
+          </a:p>
+          <a:p>
+            <a:pPr>
+              <a:defRPr sz="1100">
+                <a:solidFill>
+                  <a:srgbClr val="9DA5B0"/>
+                </a:solidFill>
+              </a:defRPr>
+            </a:pPr>
+            <a:r>
+              <a:t>≥100 datagrams and ≥20 destination IP/port endpoints in one 10 s window.</a:t>
+            </a:r>
+          </a:p>
+        </p:txBody>
+      </p:sp>
+      <p:sp>
+        <p:nvSpPr>
+          <p:cNvPr id="10" name="Rounded Rectangle 9"/>
+          <p:cNvSpPr/>
+          <p:nvPr/>
+        </p:nvSpPr>
+        <p:spPr>
+          <a:xfrm>
+            <a:off x="640080" y="3310128"/>
+            <a:ext cx="5349240" cy="1572768"/>
+          </a:xfrm>
+          <a:prstGeom prst="roundRect">
+            <a:avLst/>
+          </a:prstGeom>
+          <a:solidFill>
+            <a:srgbClr val="161B22"/>
+          </a:solidFill>
+          <a:ln>
+            <a:solidFill>
+              <a:srgbClr val="303844"/>
+            </a:solidFill>
+          </a:ln>
+          <a:effectLst/>
+        </p:spPr>
+        <p:style>
+          <a:lnRef idx="1">
+            <a:schemeClr val="accent1"/>
+          </a:lnRef>
+          <a:fillRef idx="3">
+            <a:schemeClr val="accent1"/>
+          </a:fillRef>
+          <a:effectRef idx="2">
+            <a:schemeClr val="accent1"/>
+          </a:effectRef>
+          <a:fontRef idx="minor">
+            <a:schemeClr val="lt1"/>
+          </a:fontRef>
+        </p:style>
+        <p:txBody>
+          <a:bodyPr rtlCol="0" anchor="ctr"/>
+          <a:lstStyle/>
+          <a:p>
+            <a:pPr algn="ctr"/>
+          </a:p>
+        </p:txBody>
+      </p:sp>
+      <p:sp>
+        <p:nvSpPr>
+          <p:cNvPr id="11" name="Rectangle 10"/>
+          <p:cNvSpPr/>
+          <p:nvPr/>
+        </p:nvSpPr>
+        <p:spPr>
+          <a:xfrm>
+            <a:off x="640080" y="3310128"/>
+            <a:ext cx="50292" cy="1572768"/>
+          </a:xfrm>
+          <a:prstGeom prst="rect">
+            <a:avLst/>
+          </a:prstGeom>
+          <a:solidFill>
+            <a:srgbClr val="D29922"/>
+          </a:solidFill>
+          <a:ln>
+            <a:noFill/>
+          </a:ln>
+        </p:spPr>
+        <p:style>
+          <a:lnRef idx="1">
+            <a:schemeClr val="accent1"/>
+          </a:lnRef>
+          <a:fillRef idx="3">
+            <a:schemeClr val="accent1"/>
+          </a:fillRef>
+          <a:effectRef idx="2">
+            <a:schemeClr val="accent1"/>
+          </a:effectRef>
+          <a:fontRef idx="minor">
+            <a:schemeClr val="lt1"/>
+          </a:fontRef>
+        </p:style>
+        <p:txBody>
+          <a:bodyPr rtlCol="0" anchor="ctr"/>
+          <a:lstStyle/>
+          <a:p>
+            <a:pPr algn="ctr"/>
+          </a:p>
+        </p:txBody>
+      </p:sp>
+      <p:sp>
+        <p:nvSpPr>
+          <p:cNvPr id="12" name="TextBox 11"/>
+          <p:cNvSpPr txBox="1"/>
+          <p:nvPr/>
+        </p:nvSpPr>
+        <p:spPr>
+          <a:xfrm>
+            <a:off x="822959" y="3401568"/>
+            <a:ext cx="5029200" cy="1426464"/>
+          </a:xfrm>
+          <a:prstGeom prst="rect">
+            <a:avLst/>
+          </a:prstGeom>
+          <a:noFill/>
+        </p:spPr>
+        <p:txBody>
+          <a:bodyPr wrap="square" lIns="0" rIns="0" tIns="0" bIns="0">
+            <a:spAutoFit/>
+          </a:bodyPr>
+          <a:lstStyle/>
+          <a:p>
+            <a:pPr>
               <a:spcAft>
-                <a:spcPts val="600"/>
+                <a:spcPts val="400"/>
               </a:spcAft>
-              <a:defRPr sz="1250">
+              <a:defRPr sz="900" b="1">
                 <a:solidFill>
                   <a:srgbClr val="D29922"/>
                 </a:solidFill>
               </a:defRPr>
             </a:pPr>
             <a:r>
-              <a:t>The other two are the IsolationForest pair, and they are a MEASURED NEGATIVE RESULT, not a tuning issue: they detect every malicious row, but only at thresholds that also fire on 2–6% of benign windows.</a:t>
-            </a:r>
-          </a:p>
-          <a:p>
-            <a:pPr lvl="1">
+              <a:t>UDP · MANY SOURCES</a:t>
+            </a:r>
+          </a:p>
+          <a:p>
+            <a:pPr>
               <a:spcAft>
-                <a:spcPts val="600"/>
+                <a:spcPts val="300"/>
               </a:spcAft>
-              <a:defRPr sz="1250">
+              <a:defRPr sz="1700" b="1">
                 <a:solidFill>
                   <a:srgbClr val="E6EDF3"/>
                 </a:solidFill>
               </a:defRPr>
             </a:pPr>
             <a:r>
-              <a:t>No operating point is both sensitive and quiet, so the selector ships the quiet point and reports recall 0.000 rather than hiding a noisy one.</a:t>
-            </a:r>
-          </a:p>
+              <a:t>Shared-target burst</a:t>
+            </a:r>
+          </a:p>
+          <a:p>
+            <a:pPr>
+              <a:defRPr sz="1100">
+                <a:solidFill>
+                  <a:srgbClr val="9DA5B0"/>
+                </a:solidFill>
+              </a:defRPr>
+            </a:pPr>
+            <a:r>
+              <a:t>≥1,000 datagrams from ≥50 visible source IPs to one endpoint in the window.</a:t>
+            </a:r>
+          </a:p>
+        </p:txBody>
+      </p:sp>
+      <p:sp>
+        <p:nvSpPr>
+          <p:cNvPr id="13" name="Rounded Rectangle 12"/>
+          <p:cNvSpPr/>
+          <p:nvPr/>
+        </p:nvSpPr>
+        <p:spPr>
+          <a:xfrm>
+            <a:off x="6217920" y="3310128"/>
+            <a:ext cx="5349240" cy="1572768"/>
+          </a:xfrm>
+          <a:prstGeom prst="roundRect">
+            <a:avLst/>
+          </a:prstGeom>
+          <a:solidFill>
+            <a:srgbClr val="161B22"/>
+          </a:solidFill>
+          <a:ln>
+            <a:solidFill>
+              <a:srgbClr val="303844"/>
+            </a:solidFill>
+          </a:ln>
+          <a:effectLst/>
+        </p:spPr>
+        <p:style>
+          <a:lnRef idx="1">
+            <a:schemeClr val="accent1"/>
+          </a:lnRef>
+          <a:fillRef idx="3">
+            <a:schemeClr val="accent1"/>
+          </a:fillRef>
+          <a:effectRef idx="2">
+            <a:schemeClr val="accent1"/>
+          </a:effectRef>
+          <a:fontRef idx="minor">
+            <a:schemeClr val="lt1"/>
+          </a:fontRef>
+        </p:style>
+        <p:txBody>
+          <a:bodyPr rtlCol="0" anchor="ctr"/>
+          <a:lstStyle/>
+          <a:p>
+            <a:pPr algn="ctr"/>
+          </a:p>
+        </p:txBody>
+      </p:sp>
+      <p:sp>
+        <p:nvSpPr>
+          <p:cNvPr id="14" name="Rectangle 13"/>
+          <p:cNvSpPr/>
+          <p:nvPr/>
+        </p:nvSpPr>
+        <p:spPr>
+          <a:xfrm>
+            <a:off x="6217920" y="3310128"/>
+            <a:ext cx="50292" cy="1572768"/>
+          </a:xfrm>
+          <a:prstGeom prst="rect">
+            <a:avLst/>
+          </a:prstGeom>
+          <a:solidFill>
+            <a:srgbClr val="9DA5B0"/>
+          </a:solidFill>
+          <a:ln>
+            <a:noFill/>
+          </a:ln>
+        </p:spPr>
+        <p:style>
+          <a:lnRef idx="1">
+            <a:schemeClr val="accent1"/>
+          </a:lnRef>
+          <a:fillRef idx="3">
+            <a:schemeClr val="accent1"/>
+          </a:fillRef>
+          <a:effectRef idx="2">
+            <a:schemeClr val="accent1"/>
+          </a:effectRef>
+          <a:fontRef idx="minor">
+            <a:schemeClr val="lt1"/>
+          </a:fontRef>
+        </p:style>
+        <p:txBody>
+          <a:bodyPr rtlCol="0" anchor="ctr"/>
+          <a:lstStyle/>
+          <a:p>
+            <a:pPr algn="ctr"/>
+          </a:p>
+        </p:txBody>
+      </p:sp>
+      <p:sp>
+        <p:nvSpPr>
+          <p:cNvPr id="15" name="TextBox 14"/>
+          <p:cNvSpPr txBox="1"/>
+          <p:nvPr/>
+        </p:nvSpPr>
+        <p:spPr>
+          <a:xfrm>
+            <a:off x="6400800" y="3401568"/>
+            <a:ext cx="5029200" cy="1426464"/>
+          </a:xfrm>
+          <a:prstGeom prst="rect">
+            <a:avLst/>
+          </a:prstGeom>
+          <a:noFill/>
+        </p:spPr>
+        <p:txBody>
+          <a:bodyPr wrap="square" lIns="0" rIns="0" tIns="0" bIns="0">
+            <a:spAutoFit/>
+          </a:bodyPr>
+          <a:lstStyle/>
           <a:p>
             <a:pPr>
               <a:spcAft>
-                <a:spcPts val="600"/>
+                <a:spcPts val="400"/>
               </a:spcAft>
-              <a:defRPr sz="1450">
+              <a:defRPr sz="900" b="1">
+                <a:solidFill>
+                  <a:srgbClr val="9DA5B0"/>
+                </a:solidFill>
+              </a:defRPr>
+            </a:pPr>
+            <a:r>
+              <a:t>WHY NOT CALL IT AMPLIFICATION?</a:t>
+            </a:r>
+          </a:p>
+          <a:p>
+            <a:pPr>
+              <a:spcAft>
+                <a:spcPts val="300"/>
+              </a:spcAft>
+              <a:defRPr sz="1700" b="1">
                 <a:solidFill>
                   <a:srgbClr val="E6EDF3"/>
                 </a:solidFill>
               </a:defRPr>
             </a:pPr>
             <a:r>
-              <a:t>The more interesting half: scan_rf and exfil_xgb used to read 0.000 too, and that was not a model failure — the split placed every malicious scan and exfil row in training, so the holdout had nothing to score. Once attack bursts landed on both sides of the split, the same architectures scored perfectly. “Unmeasurable” and “broken” are different claims.</a:t>
+              <a:t>Replies never cross the diode</a:t>
+            </a:r>
+          </a:p>
+          <a:p>
+            <a:pPr>
+              <a:defRPr sz="1100">
+                <a:solidFill>
+                  <a:srgbClr val="9DA5B0"/>
+                </a:solidFill>
+              </a:defRPr>
+            </a:pPr>
+            <a:r>
+              <a:t>Packet rates, endpoints and trigger thresholds are observed. Response size is missing; these prototype thresholds need capture calibration.</a:t>
+            </a:r>
+          </a:p>
+        </p:txBody>
+      </p:sp>
+      <p:sp>
+        <p:nvSpPr>
+          <p:cNvPr id="16" name="Rounded Rectangle 15"/>
+          <p:cNvSpPr/>
+          <p:nvPr/>
+        </p:nvSpPr>
+        <p:spPr>
+          <a:xfrm>
+            <a:off x="1051560" y="5349240"/>
+            <a:ext cx="10058400" cy="640080"/>
+          </a:xfrm>
+          <a:prstGeom prst="roundRect">
+            <a:avLst/>
+          </a:prstGeom>
+          <a:solidFill>
+            <a:srgbClr val="141A24"/>
+          </a:solidFill>
+          <a:ln>
+            <a:solidFill>
+              <a:srgbClr val="303844"/>
+            </a:solidFill>
+          </a:ln>
+          <a:effectLst/>
+        </p:spPr>
+        <p:style>
+          <a:lnRef idx="1">
+            <a:schemeClr val="accent1"/>
+          </a:lnRef>
+          <a:fillRef idx="3">
+            <a:schemeClr val="accent1"/>
+          </a:fillRef>
+          <a:effectRef idx="2">
+            <a:schemeClr val="accent1"/>
+          </a:effectRef>
+          <a:fontRef idx="minor">
+            <a:schemeClr val="lt1"/>
+          </a:fontRef>
+        </p:style>
+        <p:txBody>
+          <a:bodyPr rtlCol="0" anchor="ctr"/>
+          <a:lstStyle/>
+          <a:p>
+            <a:pPr algn="ctr"/>
+          </a:p>
+        </p:txBody>
+      </p:sp>
+      <p:sp>
+        <p:nvSpPr>
+          <p:cNvPr id="17" name="TextBox 16"/>
+          <p:cNvSpPr txBox="1"/>
+          <p:nvPr/>
+        </p:nvSpPr>
+        <p:spPr>
+          <a:xfrm>
+            <a:off x="1280160" y="5468112"/>
+            <a:ext cx="9601200" cy="384048"/>
+          </a:xfrm>
+          <a:prstGeom prst="rect">
+            <a:avLst/>
+          </a:prstGeom>
+          <a:noFill/>
+        </p:spPr>
+        <p:txBody>
+          <a:bodyPr wrap="none">
+            <a:spAutoFit/>
+          </a:bodyPr>
+          <a:lstStyle/>
+          <a:p>
+            <a:pPr algn="ctr">
+              <a:defRPr sz="1400">
+                <a:solidFill>
+                  <a:srgbClr val="9DA5B0"/>
+                </a:solidFill>
+              </a:defRPr>
+            </a:pPr>
+            <a:r>
+              <a:t>Source cardinality drives the spoofed-source decision; Shannon entropy is recorded as supporting evidence.</a:t>
             </a:r>
           </a:p>
         </p:txBody>
@@ -3681,6 +4623,1026 @@
 </file>
 
 <file path=ppt/slides/slide12.xml><?xml version="1.0" encoding="utf-8"?>
+<p:sld xmlns:a="http://schemas.openxmlformats.org/drawingml/2006/main" xmlns:p="http://schemas.openxmlformats.org/presentationml/2006/main" xmlns:r="http://schemas.openxmlformats.org/officeDocument/2006/relationships">
+  <p:cSld>
+    <p:spTree>
+      <p:nvGrpSpPr>
+        <p:cNvPr id="1" name=""/>
+        <p:cNvGrpSpPr/>
+        <p:nvPr/>
+      </p:nvGrpSpPr>
+      <p:grpSpPr/>
+      <p:sp>
+        <p:nvSpPr>
+          <p:cNvPr id="2" name="TextBox 1"/>
+          <p:cNvSpPr txBox="1"/>
+          <p:nvPr/>
+        </p:nvSpPr>
+        <p:spPr>
+          <a:xfrm>
+            <a:off x="0" y="0"/>
+            <a:ext cx="12191695" cy="6858000"/>
+          </a:xfrm>
+          <a:prstGeom prst="rect">
+            <a:avLst/>
+          </a:prstGeom>
+          <a:solidFill>
+            <a:srgbClr val="0D1117"/>
+          </a:solidFill>
+          <a:ln>
+            <a:noFill/>
+          </a:ln>
+        </p:spPr>
+        <p:txBody>
+          <a:bodyPr wrap="none">
+            <a:spAutoFit/>
+          </a:bodyPr>
+          <a:lstStyle/>
+          <a:p/>
+        </p:txBody>
+      </p:sp>
+      <p:sp>
+        <p:nvSpPr>
+          <p:cNvPr id="3" name="TextBox 2"/>
+          <p:cNvSpPr txBox="1"/>
+          <p:nvPr/>
+        </p:nvSpPr>
+        <p:spPr>
+          <a:xfrm>
+            <a:off x="502920" y="256032"/>
+            <a:ext cx="11185855" cy="685800"/>
+          </a:xfrm>
+          <a:prstGeom prst="rect">
+            <a:avLst/>
+          </a:prstGeom>
+          <a:noFill/>
+        </p:spPr>
+        <p:txBody>
+          <a:bodyPr wrap="square">
+            <a:spAutoFit/>
+          </a:bodyPr>
+          <a:lstStyle/>
+          <a:p>
+            <a:pPr>
+              <a:defRPr sz="3000" b="1">
+                <a:solidFill>
+                  <a:srgbClr val="E6EDF3"/>
+                </a:solidFill>
+              </a:defRPr>
+            </a:pPr>
+            <a:r>
+              <a:t>Throughput — stated and demonstrated, as the statement requires</a:t>
+            </a:r>
+          </a:p>
+          <a:p>
+            <a:pPr>
+              <a:defRPr sz="1400">
+                <a:solidFill>
+                  <a:srgbClr val="9DA5B0"/>
+                </a:solidFill>
+              </a:defRPr>
+            </a:pPr>
+            <a:r>
+              <a:t>Pure Python, one CPU core, no C extension, no GPU</a:t>
+            </a:r>
+          </a:p>
+        </p:txBody>
+      </p:sp>
+      <p:graphicFrame>
+        <p:nvGraphicFramePr>
+          <p:cNvPr id="4" name="Table 3"/>
+          <p:cNvGraphicFramePr>
+            <a:graphicFrameLocks noGrp="1"/>
+          </p:cNvGraphicFramePr>
+          <p:nvPr/>
+        </p:nvGraphicFramePr>
+        <p:xfrm>
+          <a:off x="502920" y="1371600"/>
+          <a:ext cx="11155678" cy="932688"/>
+        </p:xfrm>
+        <a:graphic>
+          <a:graphicData uri="http://schemas.openxmlformats.org/drawingml/2006/table">
+            <a:tbl>
+              <a:tblPr firstRow="1" bandRow="1">
+                <a:tableStyleId>{5C22544A-7EE6-4342-B048-85BDC9FD1C3A}</a:tableStyleId>
+              </a:tblPr>
+              <a:tblGrid>
+                <a:gridCol w="3305386"/>
+                <a:gridCol w="2685626"/>
+                <a:gridCol w="2479040"/>
+                <a:gridCol w="2685626"/>
+              </a:tblGrid>
+              <a:tr h="310896">
+                <a:tc>
+                  <a:txBody>
+                    <a:bodyPr/>
+                    <a:lstStyle/>
+                    <a:p>
+                      <a:pPr>
+                        <a:defRPr sz="1400" b="1">
+                          <a:solidFill>
+                            <a:srgbClr val="58A6FF"/>
+                          </a:solidFill>
+                        </a:defRPr>
+                      </a:pPr>
+                      <a:r>
+                        <a:t>Mode</a:t>
+                      </a:r>
+                    </a:p>
+                  </a:txBody>
+                  <a:tcPr marL="73152" marR="54864" marT="18288" marB="18288" anchor="ctr">
+                    <a:solidFill>
+                      <a:srgbClr val="1C222B"/>
+                    </a:solidFill>
+                  </a:tcPr>
+                </a:tc>
+                <a:tc>
+                  <a:txBody>
+                    <a:bodyPr/>
+                    <a:lstStyle/>
+                    <a:p>
+                      <a:pPr>
+                        <a:defRPr sz="1400" b="1">
+                          <a:solidFill>
+                            <a:srgbClr val="58A6FF"/>
+                          </a:solidFill>
+                        </a:defRPr>
+                      </a:pPr>
+                      <a:r>
+                        <a:t>Packets/s</a:t>
+                      </a:r>
+                    </a:p>
+                  </a:txBody>
+                  <a:tcPr marL="73152" marR="54864" marT="18288" marB="18288" anchor="ctr">
+                    <a:solidFill>
+                      <a:srgbClr val="1C222B"/>
+                    </a:solidFill>
+                  </a:tcPr>
+                </a:tc>
+                <a:tc>
+                  <a:txBody>
+                    <a:bodyPr/>
+                    <a:lstStyle/>
+                    <a:p>
+                      <a:pPr>
+                        <a:defRPr sz="1400" b="1">
+                          <a:solidFill>
+                            <a:srgbClr val="58A6FF"/>
+                          </a:solidFill>
+                        </a:defRPr>
+                      </a:pPr>
+                      <a:r>
+                        <a:t>Sustained rate</a:t>
+                      </a:r>
+                    </a:p>
+                  </a:txBody>
+                  <a:tcPr marL="73152" marR="54864" marT="18288" marB="18288" anchor="ctr">
+                    <a:solidFill>
+                      <a:srgbClr val="1C222B"/>
+                    </a:solidFill>
+                  </a:tcPr>
+                </a:tc>
+                <a:tc>
+                  <a:txBody>
+                    <a:bodyPr/>
+                    <a:lstStyle/>
+                    <a:p>
+                      <a:pPr>
+                        <a:defRPr sz="1400" b="1">
+                          <a:solidFill>
+                            <a:srgbClr val="58A6FF"/>
+                          </a:solidFill>
+                        </a:defRPr>
+                      </a:pPr>
+                      <a:r>
+                        <a:t>Flows/s</a:t>
+                      </a:r>
+                    </a:p>
+                  </a:txBody>
+                  <a:tcPr marL="73152" marR="54864" marT="18288" marB="18288" anchor="ctr">
+                    <a:solidFill>
+                      <a:srgbClr val="1C222B"/>
+                    </a:solidFill>
+                  </a:tcPr>
+                </a:tc>
+              </a:tr>
+              <a:tr h="310896">
+                <a:tc>
+                  <a:txBody>
+                    <a:bodyPr/>
+                    <a:lstStyle/>
+                    <a:p>
+                      <a:pPr>
+                        <a:defRPr sz="1400" b="0">
+                          <a:solidFill>
+                            <a:srgbClr val="E6EDF3"/>
+                          </a:solidFill>
+                        </a:defRPr>
+                      </a:pPr>
+                      <a:r>
+                        <a:t>Rules only (dpkt)</a:t>
+                      </a:r>
+                    </a:p>
+                  </a:txBody>
+                  <a:tcPr marL="73152" marR="54864" marT="18288" marB="18288" anchor="ctr">
+                    <a:solidFill>
+                      <a:srgbClr val="161B22"/>
+                    </a:solidFill>
+                  </a:tcPr>
+                </a:tc>
+                <a:tc>
+                  <a:txBody>
+                    <a:bodyPr/>
+                    <a:lstStyle/>
+                    <a:p>
+                      <a:pPr>
+                        <a:defRPr sz="1400" b="0">
+                          <a:solidFill>
+                            <a:srgbClr val="E6EDF3"/>
+                          </a:solidFill>
+                        </a:defRPr>
+                      </a:pPr>
+                      <a:r>
+                        <a:t>≈ 48,600 – 50,400</a:t>
+                      </a:r>
+                    </a:p>
+                  </a:txBody>
+                  <a:tcPr marL="73152" marR="54864" marT="18288" marB="18288" anchor="ctr">
+                    <a:solidFill>
+                      <a:srgbClr val="161B22"/>
+                    </a:solidFill>
+                  </a:tcPr>
+                </a:tc>
+                <a:tc>
+                  <a:txBody>
+                    <a:bodyPr/>
+                    <a:lstStyle/>
+                    <a:p>
+                      <a:pPr>
+                        <a:defRPr sz="1400" b="0">
+                          <a:solidFill>
+                            <a:srgbClr val="E6EDF3"/>
+                          </a:solidFill>
+                        </a:defRPr>
+                      </a:pPr>
+                      <a:r>
+                        <a:t>≈ 240 Mbps</a:t>
+                      </a:r>
+                    </a:p>
+                  </a:txBody>
+                  <a:tcPr marL="73152" marR="54864" marT="18288" marB="18288" anchor="ctr">
+                    <a:solidFill>
+                      <a:srgbClr val="161B22"/>
+                    </a:solidFill>
+                  </a:tcPr>
+                </a:tc>
+                <a:tc>
+                  <a:txBody>
+                    <a:bodyPr/>
+                    <a:lstStyle/>
+                    <a:p>
+                      <a:pPr>
+                        <a:defRPr sz="1400" b="0">
+                          <a:solidFill>
+                            <a:srgbClr val="E6EDF3"/>
+                          </a:solidFill>
+                        </a:defRPr>
+                      </a:pPr>
+                      <a:r>
+                        <a:t>≈ 19,200 – 20,300</a:t>
+                      </a:r>
+                    </a:p>
+                  </a:txBody>
+                  <a:tcPr marL="73152" marR="54864" marT="18288" marB="18288" anchor="ctr">
+                    <a:solidFill>
+                      <a:srgbClr val="161B22"/>
+                    </a:solidFill>
+                  </a:tcPr>
+                </a:tc>
+              </a:tr>
+              <a:tr h="310896">
+                <a:tc>
+                  <a:txBody>
+                    <a:bodyPr/>
+                    <a:lstStyle/>
+                    <a:p>
+                      <a:pPr>
+                        <a:defRPr sz="1400" b="0">
+                          <a:solidFill>
+                            <a:srgbClr val="E6EDF3"/>
+                          </a:solidFill>
+                        </a:defRPr>
+                      </a:pPr>
+                      <a:r>
+                        <a:t>With ML tier (LightGBM)</a:t>
+                      </a:r>
+                    </a:p>
+                  </a:txBody>
+                  <a:tcPr marL="73152" marR="54864" marT="18288" marB="18288" anchor="ctr">
+                    <a:solidFill>
+                      <a:srgbClr val="161B22"/>
+                    </a:solidFill>
+                  </a:tcPr>
+                </a:tc>
+                <a:tc>
+                  <a:txBody>
+                    <a:bodyPr/>
+                    <a:lstStyle/>
+                    <a:p>
+                      <a:pPr>
+                        <a:defRPr sz="1400" b="0">
+                          <a:solidFill>
+                            <a:srgbClr val="E6EDF3"/>
+                          </a:solidFill>
+                        </a:defRPr>
+                      </a:pPr>
+                      <a:r>
+                        <a:t>≈ 24,000 – 31,000</a:t>
+                      </a:r>
+                    </a:p>
+                  </a:txBody>
+                  <a:tcPr marL="73152" marR="54864" marT="18288" marB="18288" anchor="ctr">
+                    <a:solidFill>
+                      <a:srgbClr val="161B22"/>
+                    </a:solidFill>
+                  </a:tcPr>
+                </a:tc>
+                <a:tc>
+                  <a:txBody>
+                    <a:bodyPr/>
+                    <a:lstStyle/>
+                    <a:p>
+                      <a:pPr>
+                        <a:defRPr sz="1400" b="0">
+                          <a:solidFill>
+                            <a:srgbClr val="E6EDF3"/>
+                          </a:solidFill>
+                        </a:defRPr>
+                      </a:pPr>
+                      <a:r>
+                        <a:t>≈ 120 – 155 Mbps</a:t>
+                      </a:r>
+                    </a:p>
+                  </a:txBody>
+                  <a:tcPr marL="73152" marR="54864" marT="18288" marB="18288" anchor="ctr">
+                    <a:solidFill>
+                      <a:srgbClr val="161B22"/>
+                    </a:solidFill>
+                  </a:tcPr>
+                </a:tc>
+                <a:tc>
+                  <a:txBody>
+                    <a:bodyPr/>
+                    <a:lstStyle/>
+                    <a:p>
+                      <a:pPr>
+                        <a:defRPr sz="1400" b="0">
+                          <a:solidFill>
+                            <a:srgbClr val="E6EDF3"/>
+                          </a:solidFill>
+                        </a:defRPr>
+                      </a:pPr>
+                      <a:r>
+                        <a:t>≈ 9,700 – 11,800</a:t>
+                      </a:r>
+                    </a:p>
+                  </a:txBody>
+                  <a:tcPr marL="73152" marR="54864" marT="18288" marB="18288" anchor="ctr">
+                    <a:solidFill>
+                      <a:srgbClr val="161B22"/>
+                    </a:solidFill>
+                  </a:tcPr>
+                </a:tc>
+              </a:tr>
+            </a:tbl>
+          </a:graphicData>
+        </a:graphic>
+      </p:graphicFrame>
+      <p:sp>
+        <p:nvSpPr>
+          <p:cNvPr id="5" name="TextBox 4"/>
+          <p:cNvSpPr txBox="1"/>
+          <p:nvPr/>
+        </p:nvSpPr>
+        <p:spPr>
+          <a:xfrm>
+            <a:off x="502920" y="2926080"/>
+            <a:ext cx="11185855" cy="3611880"/>
+          </a:xfrm>
+          <a:prstGeom prst="rect">
+            <a:avLst/>
+          </a:prstGeom>
+          <a:noFill/>
+        </p:spPr>
+        <p:txBody>
+          <a:bodyPr wrap="square">
+            <a:spAutoFit/>
+          </a:bodyPr>
+          <a:lstStyle/>
+          <a:p>
+            <a:pPr>
+              <a:spcAft>
+                <a:spcPts val="600"/>
+              </a:spcAft>
+              <a:defRPr sz="1500">
+                <a:solidFill>
+                  <a:srgbClr val="E6EDF3"/>
+                </a:solidFill>
+              </a:defRPr>
+            </a:pPr>
+            <a:r>
+              <a:t>This capture: 14,049 packets, 8,622,217 bytes, 598.8 s, mean packet 613.7 B, 5,225 distinct flows (4,617 SYN-only, 720 DNS, 7,107 TLS).</a:t>
+            </a:r>
+          </a:p>
+          <a:p>
+            <a:pPr>
+              <a:spcAft>
+                <a:spcPts val="600"/>
+              </a:spcAft>
+              <a:defRPr sz="1500">
+                <a:solidFill>
+                  <a:srgbClr val="9DA5B0"/>
+                </a:solidFill>
+              </a:defRPr>
+            </a:pPr>
+            <a:r>
+              <a:t>The ML tier is quoted as a range on purpose: it varies with model warm-up and cache state, so a single false-precision number would not be reproducible.</a:t>
+            </a:r>
+          </a:p>
+          <a:p>
+            <a:pPr>
+              <a:spcAft>
+                <a:spcPts val="600"/>
+              </a:spcAft>
+              <a:defRPr sz="1500">
+                <a:solidFill>
+                  <a:srgbClr val="E6EDF3"/>
+                </a:solidFill>
+              </a:defRPr>
+            </a:pPr>
+            <a:r>
+              <a:t>For a SYN flood the binding number is packets/s, not Mbps — small packets are cheaper per byte. pkt/s is the honest headline; Mbps is the translation the statement asks for, using this capture’s mean packet size.</a:t>
+            </a:r>
+          </a:p>
+        </p:txBody>
+      </p:sp>
+      <p:sp>
+        <p:nvSpPr>
+          <p:cNvPr id="6" name="Rounded Rectangle 5"/>
+          <p:cNvSpPr/>
+          <p:nvPr/>
+        </p:nvSpPr>
+        <p:spPr>
+          <a:xfrm>
+            <a:off x="502920" y="5486400"/>
+            <a:ext cx="11185855" cy="868680"/>
+          </a:xfrm>
+          <a:prstGeom prst="roundRect">
+            <a:avLst/>
+          </a:prstGeom>
+          <a:solidFill>
+            <a:srgbClr val="1A160E"/>
+          </a:solidFill>
+          <a:ln>
+            <a:solidFill>
+              <a:srgbClr val="303844"/>
+            </a:solidFill>
+          </a:ln>
+          <a:effectLst/>
+        </p:spPr>
+        <p:style>
+          <a:lnRef idx="1">
+            <a:schemeClr val="accent1"/>
+          </a:lnRef>
+          <a:fillRef idx="3">
+            <a:schemeClr val="accent1"/>
+          </a:fillRef>
+          <a:effectRef idx="2">
+            <a:schemeClr val="accent1"/>
+          </a:effectRef>
+          <a:fontRef idx="minor">
+            <a:schemeClr val="lt1"/>
+          </a:fontRef>
+        </p:style>
+        <p:txBody>
+          <a:bodyPr rtlCol="0" anchor="ctr"/>
+          <a:lstStyle/>
+          <a:p>
+            <a:pPr algn="ctr"/>
+          </a:p>
+        </p:txBody>
+      </p:sp>
+      <p:sp>
+        <p:nvSpPr>
+          <p:cNvPr id="7" name="TextBox 6"/>
+          <p:cNvSpPr txBox="1"/>
+          <p:nvPr/>
+        </p:nvSpPr>
+        <p:spPr>
+          <a:xfrm>
+            <a:off x="685800" y="5577840"/>
+            <a:ext cx="10820095" cy="685800"/>
+          </a:xfrm>
+          <a:prstGeom prst="rect">
+            <a:avLst/>
+          </a:prstGeom>
+          <a:noFill/>
+        </p:spPr>
+        <p:txBody>
+          <a:bodyPr wrap="square">
+            <a:spAutoFit/>
+          </a:bodyPr>
+          <a:lstStyle/>
+          <a:p>
+            <a:pPr>
+              <a:defRPr sz="1500" i="1">
+                <a:solidFill>
+                  <a:srgbClr val="3FB950"/>
+                </a:solidFill>
+              </a:defRPr>
+            </a:pPr>
+            <a:r>
+              <a:t>“About 50,000 packets per second — roughly 240 Mbps sustained — on a single CPU core, in pure Python with no C extension and no GPU. With the ML tier scoring every closed flow it drops to roughly 24 to 31 thousand.”</a:t>
+            </a:r>
+          </a:p>
+        </p:txBody>
+      </p:sp>
+      <p:sp>
+        <p:nvSpPr>
+          <p:cNvPr id="8" name="TextBox 7"/>
+          <p:cNvSpPr txBox="1"/>
+          <p:nvPr/>
+        </p:nvSpPr>
+        <p:spPr>
+          <a:xfrm>
+            <a:off x="502920" y="6400800"/>
+            <a:ext cx="11185855" cy="365760"/>
+          </a:xfrm>
+          <a:prstGeom prst="rect">
+            <a:avLst/>
+          </a:prstGeom>
+          <a:noFill/>
+        </p:spPr>
+        <p:txBody>
+          <a:bodyPr wrap="none">
+            <a:spAutoFit/>
+          </a:bodyPr>
+          <a:lstStyle/>
+          <a:p>
+            <a:pPr>
+              <a:defRPr sz="1100">
+                <a:solidFill>
+                  <a:srgbClr val="D29922"/>
+                </a:solidFill>
+              </a:defRPr>
+            </a:pPr>
+            <a:r>
+              <a:t>Do not lead with the real-time factor: the capture is sparse (≈ 23 pkt/s ≈ 0.11 Mbps), so “~2,000× real-time” is one measurement restated. Quote it only as a repeatability claim.</a:t>
+            </a:r>
+          </a:p>
+        </p:txBody>
+      </p:sp>
+    </p:spTree>
+  </p:cSld>
+  <p:clrMapOvr>
+    <a:masterClrMapping/>
+  </p:clrMapOvr>
+</p:sld>
+</file>
+
+<file path=ppt/slides/slide13.xml><?xml version="1.0" encoding="utf-8"?>
+<p:sld xmlns:a="http://schemas.openxmlformats.org/drawingml/2006/main" xmlns:p="http://schemas.openxmlformats.org/presentationml/2006/main" xmlns:r="http://schemas.openxmlformats.org/officeDocument/2006/relationships">
+  <p:cSld>
+    <p:spTree>
+      <p:nvGrpSpPr>
+        <p:cNvPr id="1" name=""/>
+        <p:cNvGrpSpPr/>
+        <p:nvPr/>
+      </p:nvGrpSpPr>
+      <p:grpSpPr/>
+      <p:sp>
+        <p:nvSpPr>
+          <p:cNvPr id="2" name="TextBox 1"/>
+          <p:cNvSpPr txBox="1"/>
+          <p:nvPr/>
+        </p:nvSpPr>
+        <p:spPr>
+          <a:xfrm>
+            <a:off x="0" y="0"/>
+            <a:ext cx="12191695" cy="6858000"/>
+          </a:xfrm>
+          <a:prstGeom prst="rect">
+            <a:avLst/>
+          </a:prstGeom>
+          <a:solidFill>
+            <a:srgbClr val="0D1117"/>
+          </a:solidFill>
+          <a:ln>
+            <a:noFill/>
+          </a:ln>
+        </p:spPr>
+        <p:txBody>
+          <a:bodyPr wrap="none">
+            <a:spAutoFit/>
+          </a:bodyPr>
+          <a:lstStyle/>
+          <a:p/>
+        </p:txBody>
+      </p:sp>
+      <p:sp>
+        <p:nvSpPr>
+          <p:cNvPr id="3" name="TextBox 2"/>
+          <p:cNvSpPr txBox="1"/>
+          <p:nvPr/>
+        </p:nvSpPr>
+        <p:spPr>
+          <a:xfrm>
+            <a:off x="502920" y="256032"/>
+            <a:ext cx="11185855" cy="685800"/>
+          </a:xfrm>
+          <a:prstGeom prst="rect">
+            <a:avLst/>
+          </a:prstGeom>
+          <a:noFill/>
+        </p:spPr>
+        <p:txBody>
+          <a:bodyPr wrap="square">
+            <a:spAutoFit/>
+          </a:bodyPr>
+          <a:lstStyle/>
+          <a:p>
+            <a:pPr>
+              <a:defRPr sz="3000" b="1">
+                <a:solidFill>
+                  <a:srgbClr val="E6EDF3"/>
+                </a:solidFill>
+              </a:defRPr>
+            </a:pPr>
+            <a:r>
+              <a:t>Coverage and false positives — the measured answer, not the headline you want</a:t>
+            </a:r>
+          </a:p>
+        </p:txBody>
+      </p:sp>
+      <p:sp>
+        <p:nvSpPr>
+          <p:cNvPr id="4" name="TextBox 3"/>
+          <p:cNvSpPr txBox="1"/>
+          <p:nvPr/>
+        </p:nvSpPr>
+        <p:spPr>
+          <a:xfrm>
+            <a:off x="502920" y="1188720"/>
+            <a:ext cx="11185855" cy="5349240"/>
+          </a:xfrm>
+          <a:prstGeom prst="rect">
+            <a:avLst/>
+          </a:prstGeom>
+          <a:noFill/>
+        </p:spPr>
+        <p:txBody>
+          <a:bodyPr wrap="square">
+            <a:spAutoFit/>
+          </a:bodyPr>
+          <a:lstStyle/>
+          <a:p>
+            <a:pPr>
+              <a:spcAft>
+                <a:spcPts val="600"/>
+              </a:spcAft>
+              <a:defRPr sz="1400">
+                <a:solidFill>
+                  <a:srgbClr val="E6EDF3"/>
+                </a:solidFill>
+              </a:defRPr>
+            </a:pPr>
+            <a:r>
+              <a:t>6/6 PS threat classes covered. The rules tier emits 12 distinct threat classes (13 with the ML tier): historical recorded capture 46/68; current archived capture 45/67, plus 20 benign periodic events suppressed by the allowlist.</a:t>
+            </a:r>
+          </a:p>
+          <a:p>
+            <a:pPr>
+              <a:spcAft>
+                <a:spcPts val="600"/>
+              </a:spcAft>
+              <a:defRPr sz="1400">
+                <a:solidFill>
+                  <a:srgbClr val="3FB950"/>
+                </a:solidFill>
+              </a:defRPr>
+            </a:pPr>
+            <a:r>
+              <a:t>On the historical default capture all 46 rules-tier alerts land on hosts the generator designates as attackers — zero FPs.</a:t>
+            </a:r>
+          </a:p>
+          <a:p>
+            <a:pPr>
+              <a:spcAft>
+                <a:spcPts val="600"/>
+              </a:spcAft>
+              <a:defRPr sz="1400">
+                <a:solidFill>
+                  <a:srgbClr val="D29922"/>
+                </a:solidFill>
+              </a:defRPr>
+            </a:pPr>
+            <a:r>
+              <a:t>But we built a deliberate FP-pressure variant (MESSY=1) that injects benign patterns a real network has: first-time cloud backups, low-jitter IoT telemetry, CDN-style long subdomain labels.</a:t>
+            </a:r>
+          </a:p>
+          <a:p>
+            <a:pPr lvl="1">
+              <a:spcAft>
+                <a:spcPts val="600"/>
+              </a:spcAft>
+              <a:defRPr sz="1200">
+                <a:solidFill>
+                  <a:srgbClr val="E6EDF3"/>
+                </a:solidFill>
+              </a:defRPr>
+            </a:pPr>
+            <a:r>
+              <a:t>On it the rules tier emits ONE TRUE CRITICAL FP — data_exfiltration at 0.95 on the benign backup host — because “large sustained upload to a never-before-seen destination” is exactly what a backup is.</a:t>
+            </a:r>
+          </a:p>
+          <a:p>
+            <a:pPr lvl="1">
+              <a:spcAft>
+                <a:spcPts val="600"/>
+              </a:spcAft>
+              <a:defRPr sz="1200">
+                <a:solidFill>
+                  <a:srgbClr val="D29922"/>
+                </a:solidFill>
+              </a:defRPr>
+            </a:pPr>
+            <a:r>
+              <a:t>Explicit demo operator approval keeps that alert visible at medium / 0.60. Registry is empty by default: this is triage, not improved detection accuracy.</a:t>
+            </a:r>
+          </a:p>
+          <a:p>
+            <a:pPr>
+              <a:spcAft>
+                <a:spcPts val="600"/>
+              </a:spcAft>
+              <a:defRPr sz="1400">
+                <a:solidFill>
+                  <a:srgbClr val="9DA5B0"/>
+                </a:solidFill>
+              </a:defRPr>
+            </a:pPr>
+            <a:r>
+              <a:t>The allowlist count is not a result either: ALLOWLIST is operator-curated against the same telemetry IPs the generator emits, so “zero FPs after allowlisting” is partly circular.</a:t>
+            </a:r>
+          </a:p>
+          <a:p>
+            <a:pPr>
+              <a:spcAft>
+                <a:spcPts val="600"/>
+              </a:spcAft>
+              <a:defRPr sz="1400">
+                <a:solidFill>
+                  <a:srgbClr val="D29922"/>
+                </a:solidFill>
+              </a:defRPr>
+            </a:pPr>
+            <a:r>
+              <a:t>The shipped ML tier under the same pressure: 79 ml_flow_suspicious alerts, 59 on designated benign hosts. This is the measured reason the rules tier stays primary and the ML tier is quorum-gated.</a:t>
+            </a:r>
+          </a:p>
+          <a:p>
+            <a:pPr>
+              <a:spcAft>
+                <a:spcPts val="600"/>
+              </a:spcAft>
+              <a:defRPr sz="1400">
+                <a:solidFill>
+                  <a:srgbClr val="E6EDF3"/>
+                </a:solidFill>
+              </a:defRPr>
+            </a:pPr>
+            <a:r>
+              <a:t>Maturity signal worth quoting: per-flow ML on bare SYN packets produced 3,021 alerts; excluding bare SYNs at the tier boundary brought it to 20, all on true attack hosts.</a:t>
+            </a:r>
+          </a:p>
+        </p:txBody>
+      </p:sp>
+    </p:spTree>
+  </p:cSld>
+  <p:clrMapOvr>
+    <a:masterClrMapping/>
+  </p:clrMapOvr>
+</p:sld>
+</file>
+
+<file path=ppt/slides/slide14.xml><?xml version="1.0" encoding="utf-8"?>
+<p:sld xmlns:a="http://schemas.openxmlformats.org/drawingml/2006/main" xmlns:p="http://schemas.openxmlformats.org/presentationml/2006/main" xmlns:r="http://schemas.openxmlformats.org/officeDocument/2006/relationships">
+  <p:cSld>
+    <p:spTree>
+      <p:nvGrpSpPr>
+        <p:cNvPr id="1" name=""/>
+        <p:cNvGrpSpPr/>
+        <p:nvPr/>
+      </p:nvGrpSpPr>
+      <p:grpSpPr/>
+      <p:sp>
+        <p:nvSpPr>
+          <p:cNvPr id="2" name="TextBox 1"/>
+          <p:cNvSpPr txBox="1"/>
+          <p:nvPr/>
+        </p:nvSpPr>
+        <p:spPr>
+          <a:xfrm>
+            <a:off x="0" y="0"/>
+            <a:ext cx="12191695" cy="6858000"/>
+          </a:xfrm>
+          <a:prstGeom prst="rect">
+            <a:avLst/>
+          </a:prstGeom>
+          <a:solidFill>
+            <a:srgbClr val="0D1117"/>
+          </a:solidFill>
+          <a:ln>
+            <a:noFill/>
+          </a:ln>
+        </p:spPr>
+        <p:txBody>
+          <a:bodyPr wrap="none">
+            <a:spAutoFit/>
+          </a:bodyPr>
+          <a:lstStyle/>
+          <a:p/>
+        </p:txBody>
+      </p:sp>
+      <p:sp>
+        <p:nvSpPr>
+          <p:cNvPr id="3" name="TextBox 2"/>
+          <p:cNvSpPr txBox="1"/>
+          <p:nvPr/>
+        </p:nvSpPr>
+        <p:spPr>
+          <a:xfrm>
+            <a:off x="502920" y="256032"/>
+            <a:ext cx="11185855" cy="685800"/>
+          </a:xfrm>
+          <a:prstGeom prst="rect">
+            <a:avLst/>
+          </a:prstGeom>
+          <a:noFill/>
+        </p:spPr>
+        <p:txBody>
+          <a:bodyPr wrap="square">
+            <a:spAutoFit/>
+          </a:bodyPr>
+          <a:lstStyle/>
+          <a:p>
+            <a:pPr>
+              <a:defRPr sz="3000" b="1">
+                <a:solidFill>
+                  <a:srgbClr val="E6EDF3"/>
+                </a:solidFill>
+              </a:defRPr>
+            </a:pPr>
+            <a:r>
+              <a:t>The models — measured, including the negative results</a:t>
+            </a:r>
+          </a:p>
+          <a:p>
+            <a:pPr>
+              <a:defRPr sz="1400">
+                <a:solidFill>
+                  <a:srgbClr val="9DA5B0"/>
+                </a:solidFill>
+              </a:defRPr>
+            </a:pPr>
+            <a:r>
+              <a:t>Synthetic evaluation; new replay experiment holds out t ≥ 420 s</a:t>
+            </a:r>
+          </a:p>
+        </p:txBody>
+      </p:sp>
+      <p:sp>
+        <p:nvSpPr>
+          <p:cNvPr id="4" name="TextBox 3"/>
+          <p:cNvSpPr txBox="1"/>
+          <p:nvPr/>
+        </p:nvSpPr>
+        <p:spPr>
+          <a:xfrm>
+            <a:off x="502920" y="1188720"/>
+            <a:ext cx="11185855" cy="5349240"/>
+          </a:xfrm>
+          <a:prstGeom prst="rect">
+            <a:avLst/>
+          </a:prstGeom>
+          <a:noFill/>
+        </p:spPr>
+        <p:txBody>
+          <a:bodyPr wrap="square">
+            <a:spAutoFit/>
+          </a:bodyPr>
+          <a:lstStyle/>
+          <a:p>
+            <a:pPr>
+              <a:spcAft>
+                <a:spcPts val="600"/>
+              </a:spcAft>
+              <a:defRPr sz="1450">
+                <a:solidFill>
+                  <a:srgbClr val="E6EDF3"/>
+                </a:solidFill>
+              </a:defRPr>
+            </a:pPr>
+            <a:r>
+              <a:t>Replay experiment: shipped vs new model flags 35/541 vs 2/541 benign flows; both detect 60/75 malicious flows at 0.95. New fit holds out t ≥ 420 s; old model exposure is unverified. Synthetic only; shipped model unchanged.</a:t>
+            </a:r>
+          </a:p>
+          <a:p>
+            <a:pPr>
+              <a:spcAft>
+                <a:spcPts val="600"/>
+              </a:spcAft>
+              <a:defRPr sz="1450">
+                <a:solidFill>
+                  <a:srgbClr val="58A6FF"/>
+                </a:solidFill>
+              </a:defRPr>
+            </a:pPr>
+            <a:r>
+              <a:t>Category 5–7 (models567/eval.json) — four of six work:</a:t>
+            </a:r>
+          </a:p>
+          <a:p>
+            <a:pPr lvl="1">
+              <a:spcAft>
+                <a:spcPts val="600"/>
+              </a:spcAft>
+              <a:defRPr sz="1250">
+                <a:solidFill>
+                  <a:srgbClr val="3FB950"/>
+                </a:solidFill>
+              </a:defRPr>
+            </a:pPr>
+            <a:r>
+              <a:t>encrypted_xgb, sequence_cnn, scan_rf and exfil_xgb all reach recall 1.000 at 0 benign FP on the temporal holdout (t ≥ 390 s).</a:t>
+            </a:r>
+          </a:p>
+          <a:p>
+            <a:pPr lvl="1">
+              <a:spcAft>
+                <a:spcPts val="600"/>
+              </a:spcAft>
+              <a:defRPr sz="1250">
+                <a:solidFill>
+                  <a:srgbClr val="D29922"/>
+                </a:solidFill>
+              </a:defRPr>
+            </a:pPr>
+            <a:r>
+              <a:t>The other two are the IsolationForest pair, and they are a MEASURED NEGATIVE RESULT, not a tuning issue: they detect every malicious row, but only at thresholds that also fire on 2–6% of benign windows.</a:t>
+            </a:r>
+          </a:p>
+          <a:p>
+            <a:pPr lvl="1">
+              <a:spcAft>
+                <a:spcPts val="600"/>
+              </a:spcAft>
+              <a:defRPr sz="1250">
+                <a:solidFill>
+                  <a:srgbClr val="E6EDF3"/>
+                </a:solidFill>
+              </a:defRPr>
+            </a:pPr>
+            <a:r>
+              <a:t>Classifier recall remains 0.000. Serving now attaches raw anomaly scores only to supervised alerts corroborated by a same-window rule; no standalone IF alerts.</a:t>
+            </a:r>
+          </a:p>
+          <a:p>
+            <a:pPr>
+              <a:spcAft>
+                <a:spcPts val="600"/>
+              </a:spcAft>
+              <a:defRPr sz="1450">
+                <a:solidFill>
+                  <a:srgbClr val="E6EDF3"/>
+                </a:solidFill>
+              </a:defRPr>
+            </a:pPr>
+            <a:r>
+              <a:t>The more interesting half: scan_rf and exfil_xgb used to read 0.000 too, and that was not a model failure — the split placed every malicious scan and exfil row in training, so the holdout had nothing to score. Once attack bursts landed on both sides of the split, the same architectures scored perfectly. “Unmeasurable” and “broken” are different claims.</a:t>
+            </a:r>
+          </a:p>
+        </p:txBody>
+      </p:sp>
+    </p:spTree>
+  </p:cSld>
+  <p:clrMapOvr>
+    <a:masterClrMapping/>
+  </p:clrMapOvr>
+</p:sld>
+</file>
+
+<file path=ppt/slides/slide15.xml><?xml version="1.0" encoding="utf-8"?>
 <p:sld xmlns:a="http://schemas.openxmlformats.org/drawingml/2006/main" xmlns:p="http://schemas.openxmlformats.org/presentationml/2006/main" xmlns:r="http://schemas.openxmlformats.org/officeDocument/2006/relationships">
   <p:cSld>
     <p:spTree>
@@ -4249,7 +6211,7 @@
 </p:sld>
 </file>
 
-<file path=ppt/slides/slide13.xml><?xml version="1.0" encoding="utf-8"?>
+<file path=ppt/slides/slide16.xml><?xml version="1.0" encoding="utf-8"?>
 <p:sld xmlns:a="http://schemas.openxmlformats.org/drawingml/2006/main" xmlns:p="http://schemas.openxmlformats.org/presentationml/2006/main" xmlns:r="http://schemas.openxmlformats.org/officeDocument/2006/relationships">
   <p:cSld>
     <p:spTree>
@@ -4486,7 +6448,7 @@
 </p:sld>
 </file>
 
-<file path=ppt/slides/slide14.xml><?xml version="1.0" encoding="utf-8"?>
+<file path=ppt/slides/slide17.xml><?xml version="1.0" encoding="utf-8"?>
 <p:sld xmlns:a="http://schemas.openxmlformats.org/drawingml/2006/main" xmlns:p="http://schemas.openxmlformats.org/presentationml/2006/main" xmlns:r="http://schemas.openxmlformats.org/officeDocument/2006/relationships">
   <p:cSld>
     <p:spTree>
@@ -5277,7 +7239,7 @@
 </p:sld>
 </file>
 
-<file path=ppt/slides/slide15.xml><?xml version="1.0" encoding="utf-8"?>
+<file path=ppt/slides/slide18.xml><?xml version="1.0" encoding="utf-8"?>
 <p:sld xmlns:a="http://schemas.openxmlformats.org/drawingml/2006/main" xmlns:p="http://schemas.openxmlformats.org/presentationml/2006/main" xmlns:r="http://schemas.openxmlformats.org/officeDocument/2006/relationships">
   <p:cSld>
     <p:spTree>
@@ -5396,7 +7358,7 @@
               </a:defRPr>
             </a:pPr>
             <a:r>
-              <a:t>UDP reflection/amplification and Slowloris are not separately modelled. The reflection flood is caught as a volumetric symptom; Slowloris is in the statement’s dataset suggestions, not the scored threat list, and one-way it would be a long-lived half-open-flow pattern we have not built.</a:t>
+              <a:t>UDP has source fan-out and shared-target burst proxies with packet rates, counts and prototype trigger thresholds. They need capture calibration. Response size is unavailable, so reflection/amplification is not inferred. Slowloris is a dataset suggestion, not a scored class; its one-way long-lived flow proxy remains future work.</a:t>
             </a:r>
           </a:p>
           <a:p>
@@ -5426,7 +7388,7 @@
               </a:defRPr>
             </a:pPr>
             <a:r>
-              <a:t>Live capture against a real interface is NOT tested. The dev container has CapBnd: 0. Verified end-to-end instead: a real FIFO reproduces the offline alert stream byte-for-byte, with drop accounting and both privilege-failure paths. The only unexercised piece is the AF_PACKET socket setup itself — we say that first.</a:t>
+              <a:t>The stage demo starts the dashboard before paced synthetic FIFO replay; alerts arrive during replay, and sensor status shows heartbeat, last packet, counts and unknown kernel drops honestly. A physical AF_PACKET interface run remains unverified because this container has CapBnd: 0.</a:t>
             </a:r>
           </a:p>
           <a:p>
@@ -5469,7 +7431,7 @@
 </p:sld>
 </file>
 
-<file path=ppt/slides/slide16.xml><?xml version="1.0" encoding="utf-8"?>
+<file path=ppt/slides/slide19.xml><?xml version="1.0" encoding="utf-8"?>
 <p:sld xmlns:a="http://schemas.openxmlformats.org/drawingml/2006/main" xmlns:p="http://schemas.openxmlformats.org/presentationml/2006/main" xmlns:r="http://schemas.openxmlformats.org/officeDocument/2006/relationships">
   <p:cSld>
     <p:spTree>
@@ -5679,237 +7641,6 @@
             </a:pPr>
             <a:r>
               <a:t>A second, independently trained model on a different input type: the DGA CNN reads the string, the flow model reads tabular statistics. Different data, different failure modes, and the CNN’s win is attributable to a documented bias in the rules rather than to “more ML”.</a:t>
-            </a:r>
-          </a:p>
-        </p:txBody>
-      </p:sp>
-    </p:spTree>
-  </p:cSld>
-  <p:clrMapOvr>
-    <a:masterClrMapping/>
-  </p:clrMapOvr>
-</p:sld>
-</file>
-
-<file path=ppt/slides/slide17.xml><?xml version="1.0" encoding="utf-8"?>
-<p:sld xmlns:a="http://schemas.openxmlformats.org/drawingml/2006/main" xmlns:p="http://schemas.openxmlformats.org/presentationml/2006/main" xmlns:r="http://schemas.openxmlformats.org/officeDocument/2006/relationships">
-  <p:cSld>
-    <p:spTree>
-      <p:nvGrpSpPr>
-        <p:cNvPr id="1" name=""/>
-        <p:cNvGrpSpPr/>
-        <p:nvPr/>
-      </p:nvGrpSpPr>
-      <p:grpSpPr/>
-      <p:sp>
-        <p:nvSpPr>
-          <p:cNvPr id="2" name="TextBox 1"/>
-          <p:cNvSpPr txBox="1"/>
-          <p:nvPr/>
-        </p:nvSpPr>
-        <p:spPr>
-          <a:xfrm>
-            <a:off x="0" y="0"/>
-            <a:ext cx="12191695" cy="6858000"/>
-          </a:xfrm>
-          <a:prstGeom prst="rect">
-            <a:avLst/>
-          </a:prstGeom>
-          <a:solidFill>
-            <a:srgbClr val="0D1117"/>
-          </a:solidFill>
-          <a:ln>
-            <a:noFill/>
-          </a:ln>
-        </p:spPr>
-        <p:txBody>
-          <a:bodyPr wrap="none">
-            <a:spAutoFit/>
-          </a:bodyPr>
-          <a:lstStyle/>
-          <a:p/>
-        </p:txBody>
-      </p:sp>
-      <p:sp>
-        <p:nvSpPr>
-          <p:cNvPr id="3" name="TextBox 2"/>
-          <p:cNvSpPr txBox="1"/>
-          <p:nvPr/>
-        </p:nvSpPr>
-        <p:spPr>
-          <a:xfrm>
-            <a:off x="502920" y="256032"/>
-            <a:ext cx="11185855" cy="685800"/>
-          </a:xfrm>
-          <a:prstGeom prst="rect">
-            <a:avLst/>
-          </a:prstGeom>
-          <a:noFill/>
-        </p:spPr>
-        <p:txBody>
-          <a:bodyPr wrap="square">
-            <a:spAutoFit/>
-          </a:bodyPr>
-          <a:lstStyle/>
-          <a:p>
-            <a:pPr>
-              <a:defRPr sz="3000" b="1">
-                <a:solidFill>
-                  <a:srgbClr val="58A6FF"/>
-                </a:solidFill>
-              </a:defRPr>
-            </a:pPr>
-            <a:r>
-              <a:t>If you only remember three sentences</a:t>
-            </a:r>
-          </a:p>
-        </p:txBody>
-      </p:sp>
-      <p:sp>
-        <p:nvSpPr>
-          <p:cNvPr id="4" name="TextBox 3"/>
-          <p:cNvSpPr txBox="1"/>
-          <p:nvPr/>
-        </p:nvSpPr>
-        <p:spPr>
-          <a:xfrm>
-            <a:off x="502920" y="1463040"/>
-            <a:ext cx="11185855" cy="5074920"/>
-          </a:xfrm>
-          <a:prstGeom prst="rect">
-            <a:avLst/>
-          </a:prstGeom>
-          <a:noFill/>
-        </p:spPr>
-        <p:txBody>
-          <a:bodyPr wrap="square">
-            <a:spAutoFit/>
-          </a:bodyPr>
-          <a:lstStyle/>
-          <a:p>
-            <a:pPr>
-              <a:spcAft>
-                <a:spcPts val="1600"/>
-              </a:spcAft>
-              <a:defRPr sz="1900">
-                <a:solidFill>
-                  <a:srgbClr val="E6EDF3"/>
-                </a:solidFill>
-              </a:defRPr>
-            </a:pPr>
-            <a:r>
-              <a:t>“Five of the features the problem statement requests are impossible under its own first constraint — we enumerated them, substituted one-way signals, and made the constraint enforceable in CI so the code cannot silently reach for a response that never arrives.”</a:t>
-            </a:r>
-          </a:p>
-          <a:p>
-            <a:pPr>
-              <a:spcAft>
-                <a:spcPts val="1600"/>
-              </a:spcAft>
-              <a:defRPr sz="1900">
-                <a:solidFill>
-                  <a:srgbClr val="E6EDF3"/>
-                </a:solidFill>
-              </a:defRPr>
-            </a:pPr>
-            <a:r>
-              <a:t>“The clock closes our windows, not the traffic — that is the difference between bounded latency and an end-of-run report.”</a:t>
-            </a:r>
-          </a:p>
-          <a:p>
-            <a:pPr>
-              <a:spcAft>
-                <a:spcPts val="1600"/>
-              </a:spcAft>
-              <a:defRPr sz="1900">
-                <a:solidFill>
-                  <a:srgbClr val="E6EDF3"/>
-                </a:solidFill>
-              </a:defRPr>
-            </a:pPr>
-            <a:r>
-              <a:t>“We ran it against real malware on IoT-23, not just our own generator: two families detected with no retuning, one honest miss, and one false positive that is structural to one-way monitoring rather than a bug.”</a:t>
-            </a:r>
-          </a:p>
-        </p:txBody>
-      </p:sp>
-      <p:sp>
-        <p:nvSpPr>
-          <p:cNvPr id="5" name="Rounded Rectangle 4"/>
-          <p:cNvSpPr/>
-          <p:nvPr/>
-        </p:nvSpPr>
-        <p:spPr>
-          <a:xfrm>
-            <a:off x="502920" y="5212080"/>
-            <a:ext cx="11185855" cy="914400"/>
-          </a:xfrm>
-          <a:prstGeom prst="roundRect">
-            <a:avLst/>
-          </a:prstGeom>
-          <a:solidFill>
-            <a:srgbClr val="141A24"/>
-          </a:solidFill>
-          <a:ln>
-            <a:solidFill>
-              <a:srgbClr val="303844"/>
-            </a:solidFill>
-          </a:ln>
-          <a:effectLst/>
-        </p:spPr>
-        <p:style>
-          <a:lnRef idx="1">
-            <a:schemeClr val="accent1"/>
-          </a:lnRef>
-          <a:fillRef idx="3">
-            <a:schemeClr val="accent1"/>
-          </a:fillRef>
-          <a:effectRef idx="2">
-            <a:schemeClr val="accent1"/>
-          </a:effectRef>
-          <a:fontRef idx="minor">
-            <a:schemeClr val="lt1"/>
-          </a:fontRef>
-        </p:style>
-        <p:txBody>
-          <a:bodyPr rtlCol="0" anchor="ctr"/>
-          <a:lstStyle/>
-          <a:p>
-            <a:pPr algn="ctr"/>
-          </a:p>
-        </p:txBody>
-      </p:sp>
-      <p:sp>
-        <p:nvSpPr>
-          <p:cNvPr id="6" name="TextBox 5"/>
-          <p:cNvSpPr txBox="1"/>
-          <p:nvPr/>
-        </p:nvSpPr>
-        <p:spPr>
-          <a:xfrm>
-            <a:off x="731520" y="5349240"/>
-            <a:ext cx="10728655" cy="731520"/>
-          </a:xfrm>
-          <a:prstGeom prst="rect">
-            <a:avLst/>
-          </a:prstGeom>
-          <a:noFill/>
-        </p:spPr>
-        <p:txBody>
-          <a:bodyPr wrap="square">
-            <a:spAutoFit/>
-          </a:bodyPr>
-          <a:lstStyle/>
-          <a:p>
-            <a:pPr algn="ctr">
-              <a:defRPr sz="1500">
-                <a:solidFill>
-                  <a:srgbClr val="9DA5B0"/>
-                </a:solidFill>
-              </a:defRPr>
-            </a:pPr>
-            <a:r>
-              <a:t>336 checks across ten suites, all green · 6/6 threat classes · ~50k pkt/s single-core pure Python · built with no C extension, no GPU, and nothing that requires a reply.</a:t>
             </a:r>
           </a:p>
         </p:txBody>
@@ -6091,14 +7822,674 @@
       </p:sp>
       <p:sp>
         <p:nvSpPr>
-          <p:cNvPr id="6" name="TextBox 5"/>
+          <p:cNvPr id="6" name="Rounded Rectangle 5"/>
+          <p:cNvSpPr/>
+          <p:nvPr/>
+        </p:nvSpPr>
+        <p:spPr>
+          <a:xfrm>
+            <a:off x="777240" y="3401568"/>
+            <a:ext cx="2971800" cy="1234440"/>
+          </a:xfrm>
+          <a:prstGeom prst="roundRect">
+            <a:avLst/>
+          </a:prstGeom>
+          <a:solidFill>
+            <a:srgbClr val="161B22"/>
+          </a:solidFill>
+          <a:ln>
+            <a:solidFill>
+              <a:srgbClr val="303844"/>
+            </a:solidFill>
+          </a:ln>
+          <a:effectLst/>
+        </p:spPr>
+        <p:style>
+          <a:lnRef idx="1">
+            <a:schemeClr val="accent1"/>
+          </a:lnRef>
+          <a:fillRef idx="3">
+            <a:schemeClr val="accent1"/>
+          </a:fillRef>
+          <a:effectRef idx="2">
+            <a:schemeClr val="accent1"/>
+          </a:effectRef>
+          <a:fontRef idx="minor">
+            <a:schemeClr val="lt1"/>
+          </a:fontRef>
+        </p:style>
+        <p:txBody>
+          <a:bodyPr rtlCol="0" anchor="ctr"/>
+          <a:lstStyle/>
+          <a:p>
+            <a:pPr algn="ctr"/>
+          </a:p>
+        </p:txBody>
+      </p:sp>
+      <p:sp>
+        <p:nvSpPr>
+          <p:cNvPr id="7" name="Rectangle 6"/>
+          <p:cNvSpPr/>
+          <p:nvPr/>
+        </p:nvSpPr>
+        <p:spPr>
+          <a:xfrm>
+            <a:off x="777240" y="3401568"/>
+            <a:ext cx="50292" cy="1234440"/>
+          </a:xfrm>
+          <a:prstGeom prst="rect">
+            <a:avLst/>
+          </a:prstGeom>
+          <a:solidFill>
+            <a:srgbClr val="3FB950"/>
+          </a:solidFill>
+          <a:ln>
+            <a:noFill/>
+          </a:ln>
+        </p:spPr>
+        <p:style>
+          <a:lnRef idx="1">
+            <a:schemeClr val="accent1"/>
+          </a:lnRef>
+          <a:fillRef idx="3">
+            <a:schemeClr val="accent1"/>
+          </a:fillRef>
+          <a:effectRef idx="2">
+            <a:schemeClr val="accent1"/>
+          </a:effectRef>
+          <a:fontRef idx="minor">
+            <a:schemeClr val="lt1"/>
+          </a:fontRef>
+        </p:style>
+        <p:txBody>
+          <a:bodyPr rtlCol="0" anchor="ctr"/>
+          <a:lstStyle/>
+          <a:p>
+            <a:pPr algn="ctr"/>
+          </a:p>
+        </p:txBody>
+      </p:sp>
+      <p:sp>
+        <p:nvSpPr>
+          <p:cNvPr id="8" name="TextBox 7"/>
           <p:cNvSpPr txBox="1"/>
           <p:nvPr/>
         </p:nvSpPr>
         <p:spPr>
           <a:xfrm>
-            <a:off x="502920" y="3246120"/>
-            <a:ext cx="11185855" cy="3291840"/>
+            <a:off x="960120" y="3493008"/>
+            <a:ext cx="2651760" cy="1088136"/>
+          </a:xfrm>
+          <a:prstGeom prst="rect">
+            <a:avLst/>
+          </a:prstGeom>
+          <a:noFill/>
+        </p:spPr>
+        <p:txBody>
+          <a:bodyPr wrap="square" lIns="0" rIns="0" tIns="0" bIns="0">
+            <a:spAutoFit/>
+          </a:bodyPr>
+          <a:lstStyle/>
+          <a:p>
+            <a:pPr>
+              <a:spcAft>
+                <a:spcPts val="400"/>
+              </a:spcAft>
+              <a:defRPr sz="900" b="1">
+                <a:solidFill>
+                  <a:srgbClr val="3FB950"/>
+                </a:solidFill>
+              </a:defRPr>
+            </a:pPr>
+            <a:r>
+              <a:t>PROTECTED NETWORK</a:t>
+            </a:r>
+          </a:p>
+          <a:p>
+            <a:pPr>
+              <a:spcAft>
+                <a:spcPts val="300"/>
+              </a:spcAft>
+              <a:defRPr sz="1700" b="1">
+                <a:solidFill>
+                  <a:srgbClr val="E6EDF3"/>
+                </a:solidFill>
+              </a:defRPr>
+            </a:pPr>
+            <a:r>
+              <a:t>Transmit side</a:t>
+            </a:r>
+          </a:p>
+          <a:p>
+            <a:pPr>
+              <a:defRPr sz="1100">
+                <a:solidFill>
+                  <a:srgbClr val="9DA5B0"/>
+                </a:solidFill>
+              </a:defRPr>
+            </a:pPr>
+            <a:r>
+              <a:t>One-way traffic leaves the protected zone.</a:t>
+            </a:r>
+          </a:p>
+        </p:txBody>
+      </p:sp>
+      <p:sp>
+        <p:nvSpPr>
+          <p:cNvPr id="9" name="TextBox 8"/>
+          <p:cNvSpPr txBox="1"/>
+          <p:nvPr/>
+        </p:nvSpPr>
+        <p:spPr>
+          <a:xfrm>
+            <a:off x="3950208" y="3776472"/>
+            <a:ext cx="438912" cy="384048"/>
+          </a:xfrm>
+          <a:prstGeom prst="rect">
+            <a:avLst/>
+          </a:prstGeom>
+          <a:noFill/>
+        </p:spPr>
+        <p:txBody>
+          <a:bodyPr wrap="none">
+            <a:spAutoFit/>
+          </a:bodyPr>
+          <a:lstStyle/>
+          <a:p>
+            <a:pPr algn="ctr">
+              <a:defRPr sz="2500" b="1">
+                <a:solidFill>
+                  <a:srgbClr val="58A6FF"/>
+                </a:solidFill>
+              </a:defRPr>
+            </a:pPr>
+            <a:r>
+              <a:t>→</a:t>
+            </a:r>
+          </a:p>
+        </p:txBody>
+      </p:sp>
+      <p:sp>
+        <p:nvSpPr>
+          <p:cNvPr id="10" name="Rounded Rectangle 9"/>
+          <p:cNvSpPr/>
+          <p:nvPr/>
+        </p:nvSpPr>
+        <p:spPr>
+          <a:xfrm>
+            <a:off x="4590288" y="3401568"/>
+            <a:ext cx="2971800" cy="1234440"/>
+          </a:xfrm>
+          <a:prstGeom prst="roundRect">
+            <a:avLst/>
+          </a:prstGeom>
+          <a:solidFill>
+            <a:srgbClr val="161B22"/>
+          </a:solidFill>
+          <a:ln>
+            <a:solidFill>
+              <a:srgbClr val="303844"/>
+            </a:solidFill>
+          </a:ln>
+          <a:effectLst/>
+        </p:spPr>
+        <p:style>
+          <a:lnRef idx="1">
+            <a:schemeClr val="accent1"/>
+          </a:lnRef>
+          <a:fillRef idx="3">
+            <a:schemeClr val="accent1"/>
+          </a:fillRef>
+          <a:effectRef idx="2">
+            <a:schemeClr val="accent1"/>
+          </a:effectRef>
+          <a:fontRef idx="minor">
+            <a:schemeClr val="lt1"/>
+          </a:fontRef>
+        </p:style>
+        <p:txBody>
+          <a:bodyPr rtlCol="0" anchor="ctr"/>
+          <a:lstStyle/>
+          <a:p>
+            <a:pPr algn="ctr"/>
+          </a:p>
+        </p:txBody>
+      </p:sp>
+      <p:sp>
+        <p:nvSpPr>
+          <p:cNvPr id="11" name="Rectangle 10"/>
+          <p:cNvSpPr/>
+          <p:nvPr/>
+        </p:nvSpPr>
+        <p:spPr>
+          <a:xfrm>
+            <a:off x="4590288" y="3401568"/>
+            <a:ext cx="50292" cy="1234440"/>
+          </a:xfrm>
+          <a:prstGeom prst="rect">
+            <a:avLst/>
+          </a:prstGeom>
+          <a:solidFill>
+            <a:srgbClr val="D29922"/>
+          </a:solidFill>
+          <a:ln>
+            <a:noFill/>
+          </a:ln>
+        </p:spPr>
+        <p:style>
+          <a:lnRef idx="1">
+            <a:schemeClr val="accent1"/>
+          </a:lnRef>
+          <a:fillRef idx="3">
+            <a:schemeClr val="accent1"/>
+          </a:fillRef>
+          <a:effectRef idx="2">
+            <a:schemeClr val="accent1"/>
+          </a:effectRef>
+          <a:fontRef idx="minor">
+            <a:schemeClr val="lt1"/>
+          </a:fontRef>
+        </p:style>
+        <p:txBody>
+          <a:bodyPr rtlCol="0" anchor="ctr"/>
+          <a:lstStyle/>
+          <a:p>
+            <a:pPr algn="ctr"/>
+          </a:p>
+        </p:txBody>
+      </p:sp>
+      <p:sp>
+        <p:nvSpPr>
+          <p:cNvPr id="12" name="TextBox 11"/>
+          <p:cNvSpPr txBox="1"/>
+          <p:nvPr/>
+        </p:nvSpPr>
+        <p:spPr>
+          <a:xfrm>
+            <a:off x="4773168" y="3493008"/>
+            <a:ext cx="2651760" cy="1088136"/>
+          </a:xfrm>
+          <a:prstGeom prst="rect">
+            <a:avLst/>
+          </a:prstGeom>
+          <a:noFill/>
+        </p:spPr>
+        <p:txBody>
+          <a:bodyPr wrap="square" lIns="0" rIns="0" tIns="0" bIns="0">
+            <a:spAutoFit/>
+          </a:bodyPr>
+          <a:lstStyle/>
+          <a:p>
+            <a:pPr>
+              <a:spcAft>
+                <a:spcPts val="400"/>
+              </a:spcAft>
+              <a:defRPr sz="900" b="1">
+                <a:solidFill>
+                  <a:srgbClr val="D29922"/>
+                </a:solidFill>
+              </a:defRPr>
+            </a:pPr>
+            <a:r>
+              <a:t>HARDWARE BOUNDARY</a:t>
+            </a:r>
+          </a:p>
+          <a:p>
+            <a:pPr>
+              <a:spcAft>
+                <a:spcPts val="300"/>
+              </a:spcAft>
+              <a:defRPr sz="1700" b="1">
+                <a:solidFill>
+                  <a:srgbClr val="E6EDF3"/>
+                </a:solidFill>
+              </a:defRPr>
+            </a:pPr>
+            <a:r>
+              <a:t>Data diode</a:t>
+            </a:r>
+          </a:p>
+          <a:p>
+            <a:pPr>
+              <a:defRPr sz="1100">
+                <a:solidFill>
+                  <a:srgbClr val="9DA5B0"/>
+                </a:solidFill>
+              </a:defRPr>
+            </a:pPr>
+            <a:r>
+              <a:t>Copies packets across; provides no return path.</a:t>
+            </a:r>
+          </a:p>
+        </p:txBody>
+      </p:sp>
+      <p:sp>
+        <p:nvSpPr>
+          <p:cNvPr id="13" name="TextBox 12"/>
+          <p:cNvSpPr txBox="1"/>
+          <p:nvPr/>
+        </p:nvSpPr>
+        <p:spPr>
+          <a:xfrm>
+            <a:off x="7772400" y="3776472"/>
+            <a:ext cx="438912" cy="384048"/>
+          </a:xfrm>
+          <a:prstGeom prst="rect">
+            <a:avLst/>
+          </a:prstGeom>
+          <a:noFill/>
+        </p:spPr>
+        <p:txBody>
+          <a:bodyPr wrap="none">
+            <a:spAutoFit/>
+          </a:bodyPr>
+          <a:lstStyle/>
+          <a:p>
+            <a:pPr algn="ctr">
+              <a:defRPr sz="2500" b="1">
+                <a:solidFill>
+                  <a:srgbClr val="58A6FF"/>
+                </a:solidFill>
+              </a:defRPr>
+            </a:pPr>
+            <a:r>
+              <a:t>→</a:t>
+            </a:r>
+          </a:p>
+        </p:txBody>
+      </p:sp>
+      <p:sp>
+        <p:nvSpPr>
+          <p:cNvPr id="14" name="Rounded Rectangle 13"/>
+          <p:cNvSpPr/>
+          <p:nvPr/>
+        </p:nvSpPr>
+        <p:spPr>
+          <a:xfrm>
+            <a:off x="8412480" y="3401568"/>
+            <a:ext cx="2971800" cy="1234440"/>
+          </a:xfrm>
+          <a:prstGeom prst="roundRect">
+            <a:avLst/>
+          </a:prstGeom>
+          <a:solidFill>
+            <a:srgbClr val="161B22"/>
+          </a:solidFill>
+          <a:ln>
+            <a:solidFill>
+              <a:srgbClr val="303844"/>
+            </a:solidFill>
+          </a:ln>
+          <a:effectLst/>
+        </p:spPr>
+        <p:style>
+          <a:lnRef idx="1">
+            <a:schemeClr val="accent1"/>
+          </a:lnRef>
+          <a:fillRef idx="3">
+            <a:schemeClr val="accent1"/>
+          </a:fillRef>
+          <a:effectRef idx="2">
+            <a:schemeClr val="accent1"/>
+          </a:effectRef>
+          <a:fontRef idx="minor">
+            <a:schemeClr val="lt1"/>
+          </a:fontRef>
+        </p:style>
+        <p:txBody>
+          <a:bodyPr rtlCol="0" anchor="ctr"/>
+          <a:lstStyle/>
+          <a:p>
+            <a:pPr algn="ctr"/>
+          </a:p>
+        </p:txBody>
+      </p:sp>
+      <p:sp>
+        <p:nvSpPr>
+          <p:cNvPr id="15" name="Rectangle 14"/>
+          <p:cNvSpPr/>
+          <p:nvPr/>
+        </p:nvSpPr>
+        <p:spPr>
+          <a:xfrm>
+            <a:off x="8412480" y="3401568"/>
+            <a:ext cx="50292" cy="1234440"/>
+          </a:xfrm>
+          <a:prstGeom prst="rect">
+            <a:avLst/>
+          </a:prstGeom>
+          <a:solidFill>
+            <a:srgbClr val="58A6FF"/>
+          </a:solidFill>
+          <a:ln>
+            <a:noFill/>
+          </a:ln>
+        </p:spPr>
+        <p:style>
+          <a:lnRef idx="1">
+            <a:schemeClr val="accent1"/>
+          </a:lnRef>
+          <a:fillRef idx="3">
+            <a:schemeClr val="accent1"/>
+          </a:fillRef>
+          <a:effectRef idx="2">
+            <a:schemeClr val="accent1"/>
+          </a:effectRef>
+          <a:fontRef idx="minor">
+            <a:schemeClr val="lt1"/>
+          </a:fontRef>
+        </p:style>
+        <p:txBody>
+          <a:bodyPr rtlCol="0" anchor="ctr"/>
+          <a:lstStyle/>
+          <a:p>
+            <a:pPr algn="ctr"/>
+          </a:p>
+        </p:txBody>
+      </p:sp>
+      <p:sp>
+        <p:nvSpPr>
+          <p:cNvPr id="16" name="TextBox 15"/>
+          <p:cNvSpPr txBox="1"/>
+          <p:nvPr/>
+        </p:nvSpPr>
+        <p:spPr>
+          <a:xfrm>
+            <a:off x="8595359" y="3493008"/>
+            <a:ext cx="2651760" cy="1088136"/>
+          </a:xfrm>
+          <a:prstGeom prst="rect">
+            <a:avLst/>
+          </a:prstGeom>
+          <a:noFill/>
+        </p:spPr>
+        <p:txBody>
+          <a:bodyPr wrap="square" lIns="0" rIns="0" tIns="0" bIns="0">
+            <a:spAutoFit/>
+          </a:bodyPr>
+          <a:lstStyle/>
+          <a:p>
+            <a:pPr>
+              <a:spcAft>
+                <a:spcPts val="400"/>
+              </a:spcAft>
+              <a:defRPr sz="900" b="1">
+                <a:solidFill>
+                  <a:srgbClr val="58A6FF"/>
+                </a:solidFill>
+              </a:defRPr>
+            </a:pPr>
+            <a:r>
+              <a:t>MONITORING ENCLAVE</a:t>
+            </a:r>
+          </a:p>
+          <a:p>
+            <a:pPr>
+              <a:spcAft>
+                <a:spcPts val="300"/>
+              </a:spcAft>
+              <a:defRPr sz="1700" b="1">
+                <a:solidFill>
+                  <a:srgbClr val="E6EDF3"/>
+                </a:solidFill>
+              </a:defRPr>
+            </a:pPr>
+            <a:r>
+              <a:t>Receive side</a:t>
+            </a:r>
+          </a:p>
+          <a:p>
+            <a:pPr>
+              <a:defRPr sz="1100">
+                <a:solidFill>
+                  <a:srgbClr val="9DA5B0"/>
+                </a:solidFill>
+              </a:defRPr>
+            </a:pPr>
+            <a:r>
+              <a:t>Parse, score, and review observed evidence.</a:t>
+            </a:r>
+          </a:p>
+        </p:txBody>
+      </p:sp>
+      <p:sp>
+        <p:nvSpPr>
+          <p:cNvPr id="17" name="Rounded Rectangle 16"/>
+          <p:cNvSpPr/>
+          <p:nvPr/>
+        </p:nvSpPr>
+        <p:spPr>
+          <a:xfrm>
+            <a:off x="1325880" y="4983480"/>
+            <a:ext cx="9555480" cy="612648"/>
+          </a:xfrm>
+          <a:prstGeom prst="roundRect">
+            <a:avLst/>
+          </a:prstGeom>
+          <a:solidFill>
+            <a:srgbClr val="141A24"/>
+          </a:solidFill>
+          <a:ln>
+            <a:solidFill>
+              <a:srgbClr val="303844"/>
+            </a:solidFill>
+          </a:ln>
+          <a:effectLst/>
+        </p:spPr>
+        <p:style>
+          <a:lnRef idx="1">
+            <a:schemeClr val="accent1"/>
+          </a:lnRef>
+          <a:fillRef idx="3">
+            <a:schemeClr val="accent1"/>
+          </a:fillRef>
+          <a:effectRef idx="2">
+            <a:schemeClr val="accent1"/>
+          </a:effectRef>
+          <a:fontRef idx="minor">
+            <a:schemeClr val="lt1"/>
+          </a:fontRef>
+        </p:style>
+        <p:txBody>
+          <a:bodyPr rtlCol="0" anchor="ctr"/>
+          <a:lstStyle/>
+          <a:p>
+            <a:pPr algn="ctr"/>
+          </a:p>
+        </p:txBody>
+      </p:sp>
+      <p:sp>
+        <p:nvSpPr>
+          <p:cNvPr id="18" name="TextBox 17"/>
+          <p:cNvSpPr txBox="1"/>
+          <p:nvPr/>
+        </p:nvSpPr>
+        <p:spPr>
+          <a:xfrm>
+            <a:off x="1554480" y="5102352"/>
+            <a:ext cx="9144000" cy="329184"/>
+          </a:xfrm>
+          <a:prstGeom prst="rect">
+            <a:avLst/>
+          </a:prstGeom>
+          <a:noFill/>
+        </p:spPr>
+        <p:txBody>
+          <a:bodyPr wrap="none">
+            <a:spAutoFit/>
+          </a:bodyPr>
+          <a:lstStyle/>
+          <a:p>
+            <a:pPr algn="ctr">
+              <a:defRPr sz="1600">
+                <a:solidFill>
+                  <a:srgbClr val="9DA5B0"/>
+                </a:solidFill>
+              </a:defRPr>
+            </a:pPr>
+            <a:r>
+              <a:t>No probes   ·   No response-side telemetry   ·   No payload decryption</a:t>
+            </a:r>
+          </a:p>
+        </p:txBody>
+      </p:sp>
+    </p:spTree>
+  </p:cSld>
+  <p:clrMapOvr>
+    <a:masterClrMapping/>
+  </p:clrMapOvr>
+</p:sld>
+</file>
+
+<file path=ppt/slides/slide20.xml><?xml version="1.0" encoding="utf-8"?>
+<p:sld xmlns:a="http://schemas.openxmlformats.org/drawingml/2006/main" xmlns:p="http://schemas.openxmlformats.org/presentationml/2006/main" xmlns:r="http://schemas.openxmlformats.org/officeDocument/2006/relationships">
+  <p:cSld>
+    <p:spTree>
+      <p:nvGrpSpPr>
+        <p:cNvPr id="1" name=""/>
+        <p:cNvGrpSpPr/>
+        <p:nvPr/>
+      </p:nvGrpSpPr>
+      <p:grpSpPr/>
+      <p:sp>
+        <p:nvSpPr>
+          <p:cNvPr id="2" name="TextBox 1"/>
+          <p:cNvSpPr txBox="1"/>
+          <p:nvPr/>
+        </p:nvSpPr>
+        <p:spPr>
+          <a:xfrm>
+            <a:off x="0" y="0"/>
+            <a:ext cx="12191695" cy="6858000"/>
+          </a:xfrm>
+          <a:prstGeom prst="rect">
+            <a:avLst/>
+          </a:prstGeom>
+          <a:solidFill>
+            <a:srgbClr val="0D1117"/>
+          </a:solidFill>
+          <a:ln>
+            <a:noFill/>
+          </a:ln>
+        </p:spPr>
+        <p:txBody>
+          <a:bodyPr wrap="none">
+            <a:spAutoFit/>
+          </a:bodyPr>
+          <a:lstStyle/>
+          <a:p/>
+        </p:txBody>
+      </p:sp>
+      <p:sp>
+        <p:nvSpPr>
+          <p:cNvPr id="3" name="TextBox 2"/>
+          <p:cNvSpPr txBox="1"/>
+          <p:nvPr/>
+        </p:nvSpPr>
+        <p:spPr>
+          <a:xfrm>
+            <a:off x="502920" y="256032"/>
+            <a:ext cx="11185855" cy="685800"/>
           </a:xfrm>
           <a:prstGeom prst="rect">
             <a:avLst/>
@@ -6112,62 +8503,163 @@
           <a:lstStyle/>
           <a:p>
             <a:pPr>
+              <a:defRPr sz="3000" b="1">
+                <a:solidFill>
+                  <a:srgbClr val="58A6FF"/>
+                </a:solidFill>
+              </a:defRPr>
+            </a:pPr>
+            <a:r>
+              <a:t>If you only remember three sentences</a:t>
+            </a:r>
+          </a:p>
+        </p:txBody>
+      </p:sp>
+      <p:sp>
+        <p:nvSpPr>
+          <p:cNvPr id="4" name="TextBox 3"/>
+          <p:cNvSpPr txBox="1"/>
+          <p:nvPr/>
+        </p:nvSpPr>
+        <p:spPr>
+          <a:xfrm>
+            <a:off x="502920" y="1463040"/>
+            <a:ext cx="11185855" cy="5074920"/>
+          </a:xfrm>
+          <a:prstGeom prst="rect">
+            <a:avLst/>
+          </a:prstGeom>
+          <a:noFill/>
+        </p:spPr>
+        <p:txBody>
+          <a:bodyPr wrap="square">
+            <a:spAutoFit/>
+          </a:bodyPr>
+          <a:lstStyle/>
+          <a:p>
+            <a:pPr>
               <a:spcAft>
-                <a:spcPts val="600"/>
+                <a:spcPts val="1600"/>
               </a:spcAft>
-              <a:defRPr sz="1700">
+              <a:defRPr sz="1900">
                 <a:solidFill>
                   <a:srgbClr val="E6EDF3"/>
                 </a:solidFill>
               </a:defRPr>
             </a:pPr>
             <a:r>
-              <a:t>This shifts every question from “does it detect X?” to “did you respect the constraint?” — which is the fight we win.</a:t>
+              <a:t>“Five of the features the problem statement requests are impossible under its own first constraint — we enumerated them, substituted one-way signals, and made the constraint enforceable in CI so the code cannot silently reach for a response that never arrives.”</a:t>
             </a:r>
           </a:p>
           <a:p>
             <a:pPr>
               <a:spcAft>
-                <a:spcPts val="600"/>
+                <a:spcPts val="1600"/>
               </a:spcAft>
-              <a:defRPr sz="1700">
+              <a:defRPr sz="1900">
+                <a:solidFill>
+                  <a:srgbClr val="E6EDF3"/>
+                </a:solidFill>
+              </a:defRPr>
+            </a:pPr>
+            <a:r>
+              <a:t>“The clock closes our windows, not the traffic — that is the difference between bounded latency and an end-of-run report.”</a:t>
+            </a:r>
+          </a:p>
+          <a:p>
+            <a:pPr>
+              <a:spcAft>
+                <a:spcPts val="1600"/>
+              </a:spcAft>
+              <a:defRPr sz="1900">
+                <a:solidFill>
+                  <a:srgbClr val="E6EDF3"/>
+                </a:solidFill>
+              </a:defRPr>
+            </a:pPr>
+            <a:r>
+              <a:t>“We ran it against real malware on IoT-23, not just our own generator: two families detected with no retuning, one honest miss, and one false positive that is structural to one-way monitoring rather than a bug.”</a:t>
+            </a:r>
+          </a:p>
+        </p:txBody>
+      </p:sp>
+      <p:sp>
+        <p:nvSpPr>
+          <p:cNvPr id="5" name="Rounded Rectangle 4"/>
+          <p:cNvSpPr/>
+          <p:nvPr/>
+        </p:nvSpPr>
+        <p:spPr>
+          <a:xfrm>
+            <a:off x="502920" y="5212080"/>
+            <a:ext cx="11185855" cy="914400"/>
+          </a:xfrm>
+          <a:prstGeom prst="roundRect">
+            <a:avLst/>
+          </a:prstGeom>
+          <a:solidFill>
+            <a:srgbClr val="141A24"/>
+          </a:solidFill>
+          <a:ln>
+            <a:solidFill>
+              <a:srgbClr val="303844"/>
+            </a:solidFill>
+          </a:ln>
+          <a:effectLst/>
+        </p:spPr>
+        <p:style>
+          <a:lnRef idx="1">
+            <a:schemeClr val="accent1"/>
+          </a:lnRef>
+          <a:fillRef idx="3">
+            <a:schemeClr val="accent1"/>
+          </a:fillRef>
+          <a:effectRef idx="2">
+            <a:schemeClr val="accent1"/>
+          </a:effectRef>
+          <a:fontRef idx="minor">
+            <a:schemeClr val="lt1"/>
+          </a:fontRef>
+        </p:style>
+        <p:txBody>
+          <a:bodyPr rtlCol="0" anchor="ctr"/>
+          <a:lstStyle/>
+          <a:p>
+            <a:pPr algn="ctr"/>
+          </a:p>
+        </p:txBody>
+      </p:sp>
+      <p:sp>
+        <p:nvSpPr>
+          <p:cNvPr id="6" name="TextBox 5"/>
+          <p:cNvSpPr txBox="1"/>
+          <p:nvPr/>
+        </p:nvSpPr>
+        <p:spPr>
+          <a:xfrm>
+            <a:off x="731520" y="5349240"/>
+            <a:ext cx="10728655" cy="731520"/>
+          </a:xfrm>
+          <a:prstGeom prst="rect">
+            <a:avLst/>
+          </a:prstGeom>
+          <a:noFill/>
+        </p:spPr>
+        <p:txBody>
+          <a:bodyPr wrap="square">
+            <a:spAutoFit/>
+          </a:bodyPr>
+          <a:lstStyle/>
+          <a:p>
+            <a:pPr algn="ctr">
+              <a:defRPr sz="1500">
                 <a:solidFill>
                   <a:srgbClr val="9DA5B0"/>
                 </a:solidFill>
               </a:defRPr>
             </a:pPr>
             <a:r>
-              <a:t>A hardware data diode copies the gateway link into a monitoring enclave with no path back.</a:t>
-            </a:r>
-          </a:p>
-          <a:p>
-            <a:pPr>
-              <a:spcAft>
-                <a:spcPts val="600"/>
-              </a:spcAft>
-              <a:defRPr sz="1700">
-                <a:solidFill>
-                  <a:srgbClr val="9DA5B0"/>
-                </a:solidFill>
-              </a:defRPr>
-            </a:pPr>
-            <a:r>
-              <a:t>So: no probes, no completed handshakes, no decrypted payloads, no replies of any kind.</a:t>
-            </a:r>
-          </a:p>
-          <a:p>
-            <a:pPr>
-              <a:spcAft>
-                <a:spcPts val="600"/>
-              </a:spcAft>
-              <a:defRPr sz="1700">
-                <a:solidFill>
-                  <a:srgbClr val="58A6FF"/>
-                </a:solidFill>
-              </a:defRPr>
-            </a:pPr>
-            <a:r>
-              <a:t>Every detector in this system runs on one direction of traffic.</a:t>
+              <a:t>Current archive 45 / 67; historical refs 46 / 68 (migration pending) · 6/6 classes · ~50k pkt/s single-core pure Python · no GPU and no response-side fields.</a:t>
             </a:r>
           </a:p>
         </p:txBody>
@@ -6383,7 +8875,7 @@
               </a:defRPr>
             </a:pPr>
             <a:r>
-              <a:t>The one SUBSTITUTED row: UDP reflection is defined by response size, so we substitute per-source UDP fan-out cardinality.</a:t>
+              <a:t>UDP reflection needs response size, which the diode hides. We expose source fan-out and many-source shared-target burst proxies, with the threshold and measurements in each alert; neither claims amplification.</a:t>
             </a:r>
           </a:p>
           <a:p>
@@ -7410,7 +9902,7 @@
               </a:defRPr>
             </a:pPr>
             <a:r>
-              <a:t>So we pull a real JA4 out of QUIC on a one-way feed, where TLS server fingerprints are structurally impossible.</a:t>
+              <a:t>So we recover ClientHello metadata from QUIC on a one-way feed, where TLS server fingerprints are structurally impossible.</a:t>
             </a:r>
           </a:p>
           <a:p>
@@ -7440,7 +9932,7 @@
               </a:defRPr>
             </a:pPr>
             <a:r>
-              <a:t>the JA4 extracted from a decrypted QUIC Initial is byte-identical to the direct TLS parse (tests/test_quic.py), and</a:t>
+              <a:t>RFC 9001 Appendix A.1/A.2 key and packet vectors validate the parse (tests/test_quic.py); QUIC uses JA4 prefix q, TLS uses t.</a:t>
             </a:r>
           </a:p>
           <a:p>
@@ -7455,7 +9947,7 @@
               </a:defRPr>
             </a:pPr>
             <a:r>
-              <a:t>a GCM-tampered packet is rejected rather than mis-fingerprinted.</a:t>
+              <a:t>Tampered packets and unsupported versions are rejected.</a:t>
             </a:r>
           </a:p>
           <a:p>
@@ -7633,7 +10125,7 @@
               </a:defRPr>
             </a:pPr>
             <a:r>
-              <a:t>Streaming with bounded latency — and a chain of custody that is reproducible</a:t>
+              <a:t>Streaming, timing and replay reproducibility</a:t>
             </a:r>
           </a:p>
           <a:p>
@@ -7652,14 +10144,103 @@
       </p:sp>
       <p:sp>
         <p:nvSpPr>
-          <p:cNvPr id="4" name="TextBox 3"/>
+          <p:cNvPr id="4" name="Rounded Rectangle 3"/>
+          <p:cNvSpPr/>
+          <p:nvPr/>
+        </p:nvSpPr>
+        <p:spPr>
+          <a:xfrm>
+            <a:off x="502920" y="1389888"/>
+            <a:ext cx="2029968" cy="1307592"/>
+          </a:xfrm>
+          <a:prstGeom prst="roundRect">
+            <a:avLst/>
+          </a:prstGeom>
+          <a:solidFill>
+            <a:srgbClr val="161B22"/>
+          </a:solidFill>
+          <a:ln>
+            <a:solidFill>
+              <a:srgbClr val="303844"/>
+            </a:solidFill>
+          </a:ln>
+          <a:effectLst/>
+        </p:spPr>
+        <p:style>
+          <a:lnRef idx="1">
+            <a:schemeClr val="accent1"/>
+          </a:lnRef>
+          <a:fillRef idx="3">
+            <a:schemeClr val="accent1"/>
+          </a:fillRef>
+          <a:effectRef idx="2">
+            <a:schemeClr val="accent1"/>
+          </a:effectRef>
+          <a:fontRef idx="minor">
+            <a:schemeClr val="lt1"/>
+          </a:fontRef>
+        </p:style>
+        <p:txBody>
+          <a:bodyPr rtlCol="0" anchor="ctr"/>
+          <a:lstStyle/>
+          <a:p>
+            <a:pPr algn="ctr"/>
+          </a:p>
+        </p:txBody>
+      </p:sp>
+      <p:sp>
+        <p:nvSpPr>
+          <p:cNvPr id="5" name="Rectangle 4"/>
+          <p:cNvSpPr/>
+          <p:nvPr/>
+        </p:nvSpPr>
+        <p:spPr>
+          <a:xfrm>
+            <a:off x="502920" y="1389888"/>
+            <a:ext cx="50292" cy="1307592"/>
+          </a:xfrm>
+          <a:prstGeom prst="rect">
+            <a:avLst/>
+          </a:prstGeom>
+          <a:solidFill>
+            <a:srgbClr val="58A6FF"/>
+          </a:solidFill>
+          <a:ln>
+            <a:noFill/>
+          </a:ln>
+        </p:spPr>
+        <p:style>
+          <a:lnRef idx="1">
+            <a:schemeClr val="accent1"/>
+          </a:lnRef>
+          <a:fillRef idx="3">
+            <a:schemeClr val="accent1"/>
+          </a:fillRef>
+          <a:effectRef idx="2">
+            <a:schemeClr val="accent1"/>
+          </a:effectRef>
+          <a:fontRef idx="minor">
+            <a:schemeClr val="lt1"/>
+          </a:fontRef>
+        </p:style>
+        <p:txBody>
+          <a:bodyPr rtlCol="0" anchor="ctr"/>
+          <a:lstStyle/>
+          <a:p>
+            <a:pPr algn="ctr"/>
+          </a:p>
+        </p:txBody>
+      </p:sp>
+      <p:sp>
+        <p:nvSpPr>
+          <p:cNvPr id="6" name="TextBox 5"/>
           <p:cNvSpPr txBox="1"/>
           <p:nvPr/>
         </p:nvSpPr>
         <p:spPr>
           <a:xfrm>
-            <a:off x="502920" y="1188720"/>
-            <a:ext cx="11185855" cy="5349240"/>
+            <a:off x="685800" y="1481328"/>
+            <a:ext cx="1709928" cy="1161288"/>
           </a:xfrm>
           <a:prstGeom prst="rect">
             <a:avLst/>
@@ -7667,158 +10248,1195 @@
           <a:noFill/>
         </p:spPr>
         <p:txBody>
-          <a:bodyPr wrap="square">
+          <a:bodyPr wrap="square" lIns="0" rIns="0" tIns="0" bIns="0">
             <a:spAutoFit/>
           </a:bodyPr>
           <a:lstStyle/>
           <a:p>
             <a:pPr>
               <a:spcAft>
-                <a:spcPts val="600"/>
+                <a:spcPts val="400"/>
               </a:spcAft>
-              <a:defRPr sz="1350">
+              <a:defRPr sz="900" b="1">
                 <a:solidFill>
                   <a:srgbClr val="58A6FF"/>
                 </a:solidFill>
               </a:defRPr>
             </a:pPr>
             <a:r>
-              <a:t>The clock closes our windows, not the traffic.</a:t>
-            </a:r>
-          </a:p>
-          <a:p>
-            <a:pPr lvl="1">
+              <a:t>INGEST</a:t>
+            </a:r>
+          </a:p>
+          <a:p>
+            <a:pPr>
               <a:spcAft>
-                <a:spcPts val="600"/>
+                <a:spcPts val="300"/>
               </a:spcAft>
-              <a:defRPr sz="1150">
+              <a:defRPr sz="1700" b="1">
                 <a:solidFill>
                   <a:srgbClr val="E6EDF3"/>
                 </a:solidFill>
               </a:defRPr>
             </a:pPr>
             <a:r>
-              <a:t>A tumbling window that only closes when the next packet arrives cannot score a flood followed by silence — the verdict sits unscored: unbounded latency on a sensor whose entire claim is bounded latency.</a:t>
-            </a:r>
-          </a:p>
-          <a:p>
-            <a:pPr lvl="1">
+              <a:t>One-way packets</a:t>
+            </a:r>
+          </a:p>
+          <a:p>
+            <a:pPr>
+              <a:defRPr sz="1100">
+                <a:solidFill>
+                  <a:srgbClr val="9DA5B0"/>
+                </a:solidFill>
+              </a:defRPr>
+            </a:pPr>
+            <a:r>
+              <a:t>Capture or pcap stream</a:t>
+            </a:r>
+          </a:p>
+        </p:txBody>
+      </p:sp>
+      <p:sp>
+        <p:nvSpPr>
+          <p:cNvPr id="7" name="TextBox 6"/>
+          <p:cNvSpPr txBox="1"/>
+          <p:nvPr/>
+        </p:nvSpPr>
+        <p:spPr>
+          <a:xfrm>
+            <a:off x="2551176" y="1828800"/>
+            <a:ext cx="438912" cy="384048"/>
+          </a:xfrm>
+          <a:prstGeom prst="rect">
+            <a:avLst/>
+          </a:prstGeom>
+          <a:noFill/>
+        </p:spPr>
+        <p:txBody>
+          <a:bodyPr wrap="none">
+            <a:spAutoFit/>
+          </a:bodyPr>
+          <a:lstStyle/>
+          <a:p>
+            <a:pPr algn="ctr">
+              <a:defRPr sz="2000" b="1">
+                <a:solidFill>
+                  <a:srgbClr val="58A6FF"/>
+                </a:solidFill>
+              </a:defRPr>
+            </a:pPr>
+            <a:r>
+              <a:t>→</a:t>
+            </a:r>
+          </a:p>
+        </p:txBody>
+      </p:sp>
+      <p:sp>
+        <p:nvSpPr>
+          <p:cNvPr id="8" name="Rounded Rectangle 7"/>
+          <p:cNvSpPr/>
+          <p:nvPr/>
+        </p:nvSpPr>
+        <p:spPr>
+          <a:xfrm>
+            <a:off x="2788920" y="1389888"/>
+            <a:ext cx="2029968" cy="1307592"/>
+          </a:xfrm>
+          <a:prstGeom prst="roundRect">
+            <a:avLst/>
+          </a:prstGeom>
+          <a:solidFill>
+            <a:srgbClr val="161B22"/>
+          </a:solidFill>
+          <a:ln>
+            <a:solidFill>
+              <a:srgbClr val="303844"/>
+            </a:solidFill>
+          </a:ln>
+          <a:effectLst/>
+        </p:spPr>
+        <p:style>
+          <a:lnRef idx="1">
+            <a:schemeClr val="accent1"/>
+          </a:lnRef>
+          <a:fillRef idx="3">
+            <a:schemeClr val="accent1"/>
+          </a:fillRef>
+          <a:effectRef idx="2">
+            <a:schemeClr val="accent1"/>
+          </a:effectRef>
+          <a:fontRef idx="minor">
+            <a:schemeClr val="lt1"/>
+          </a:fontRef>
+        </p:style>
+        <p:txBody>
+          <a:bodyPr rtlCol="0" anchor="ctr"/>
+          <a:lstStyle/>
+          <a:p>
+            <a:pPr algn="ctr"/>
+          </a:p>
+        </p:txBody>
+      </p:sp>
+      <p:sp>
+        <p:nvSpPr>
+          <p:cNvPr id="9" name="Rectangle 8"/>
+          <p:cNvSpPr/>
+          <p:nvPr/>
+        </p:nvSpPr>
+        <p:spPr>
+          <a:xfrm>
+            <a:off x="2788920" y="1389888"/>
+            <a:ext cx="50292" cy="1307592"/>
+          </a:xfrm>
+          <a:prstGeom prst="rect">
+            <a:avLst/>
+          </a:prstGeom>
+          <a:solidFill>
+            <a:srgbClr val="3FB950"/>
+          </a:solidFill>
+          <a:ln>
+            <a:noFill/>
+          </a:ln>
+        </p:spPr>
+        <p:style>
+          <a:lnRef idx="1">
+            <a:schemeClr val="accent1"/>
+          </a:lnRef>
+          <a:fillRef idx="3">
+            <a:schemeClr val="accent1"/>
+          </a:fillRef>
+          <a:effectRef idx="2">
+            <a:schemeClr val="accent1"/>
+          </a:effectRef>
+          <a:fontRef idx="minor">
+            <a:schemeClr val="lt1"/>
+          </a:fontRef>
+        </p:style>
+        <p:txBody>
+          <a:bodyPr rtlCol="0" anchor="ctr"/>
+          <a:lstStyle/>
+          <a:p>
+            <a:pPr algn="ctr"/>
+          </a:p>
+        </p:txBody>
+      </p:sp>
+      <p:sp>
+        <p:nvSpPr>
+          <p:cNvPr id="10" name="TextBox 9"/>
+          <p:cNvSpPr txBox="1"/>
+          <p:nvPr/>
+        </p:nvSpPr>
+        <p:spPr>
+          <a:xfrm>
+            <a:off x="2971800" y="1481328"/>
+            <a:ext cx="1709928" cy="1161288"/>
+          </a:xfrm>
+          <a:prstGeom prst="rect">
+            <a:avLst/>
+          </a:prstGeom>
+          <a:noFill/>
+        </p:spPr>
+        <p:txBody>
+          <a:bodyPr wrap="square" lIns="0" rIns="0" tIns="0" bIns="0">
+            <a:spAutoFit/>
+          </a:bodyPr>
+          <a:lstStyle/>
+          <a:p>
+            <a:pPr>
               <a:spcAft>
-                <a:spcPts val="600"/>
+                <a:spcPts val="400"/>
               </a:spcAft>
-              <a:defRPr sz="1150">
+              <a:defRPr sz="900" b="1">
+                <a:solidFill>
+                  <a:srgbClr val="3FB950"/>
+                </a:solidFill>
+              </a:defRPr>
+            </a:pPr>
+            <a:r>
+              <a:t>PARSE</a:t>
+            </a:r>
+          </a:p>
+          <a:p>
+            <a:pPr>
+              <a:spcAft>
+                <a:spcPts val="300"/>
+              </a:spcAft>
+              <a:defRPr sz="1700" b="1">
+                <a:solidFill>
+                  <a:srgbClr val="E6EDF3"/>
+                </a:solidFill>
+              </a:defRPr>
+            </a:pPr>
+            <a:r>
+              <a:t>Decode frames</a:t>
+            </a:r>
+          </a:p>
+          <a:p>
+            <a:pPr>
+              <a:defRPr sz="1100">
                 <a:solidFill>
                   <a:srgbClr val="9DA5B0"/>
                 </a:solidFill>
               </a:defRPr>
             </a:pPr>
             <a:r>
-              <a:t>Freeze the clock in the tests and the flood verdict only appears at end-of-run; advance it and it appears during the capture (tests/test_live.py).</a:t>
-            </a:r>
-          </a:p>
-          <a:p>
-            <a:pPr lvl="1">
+              <a:t>Count malformed / sampled</a:t>
+            </a:r>
+          </a:p>
+        </p:txBody>
+      </p:sp>
+      <p:sp>
+        <p:nvSpPr>
+          <p:cNvPr id="11" name="TextBox 10"/>
+          <p:cNvSpPr txBox="1"/>
+          <p:nvPr/>
+        </p:nvSpPr>
+        <p:spPr>
+          <a:xfrm>
+            <a:off x="4837176" y="1828800"/>
+            <a:ext cx="438912" cy="384048"/>
+          </a:xfrm>
+          <a:prstGeom prst="rect">
+            <a:avLst/>
+          </a:prstGeom>
+          <a:noFill/>
+        </p:spPr>
+        <p:txBody>
+          <a:bodyPr wrap="none">
+            <a:spAutoFit/>
+          </a:bodyPr>
+          <a:lstStyle/>
+          <a:p>
+            <a:pPr algn="ctr">
+              <a:defRPr sz="2000" b="1">
+                <a:solidFill>
+                  <a:srgbClr val="58A6FF"/>
+                </a:solidFill>
+              </a:defRPr>
+            </a:pPr>
+            <a:r>
+              <a:t>→</a:t>
+            </a:r>
+          </a:p>
+        </p:txBody>
+      </p:sp>
+      <p:sp>
+        <p:nvSpPr>
+          <p:cNvPr id="12" name="Rounded Rectangle 11"/>
+          <p:cNvSpPr/>
+          <p:nvPr/>
+        </p:nvSpPr>
+        <p:spPr>
+          <a:xfrm>
+            <a:off x="5074920" y="1389888"/>
+            <a:ext cx="2029968" cy="1307592"/>
+          </a:xfrm>
+          <a:prstGeom prst="roundRect">
+            <a:avLst/>
+          </a:prstGeom>
+          <a:solidFill>
+            <a:srgbClr val="161B22"/>
+          </a:solidFill>
+          <a:ln>
+            <a:solidFill>
+              <a:srgbClr val="303844"/>
+            </a:solidFill>
+          </a:ln>
+          <a:effectLst/>
+        </p:spPr>
+        <p:style>
+          <a:lnRef idx="1">
+            <a:schemeClr val="accent1"/>
+          </a:lnRef>
+          <a:fillRef idx="3">
+            <a:schemeClr val="accent1"/>
+          </a:fillRef>
+          <a:effectRef idx="2">
+            <a:schemeClr val="accent1"/>
+          </a:effectRef>
+          <a:fontRef idx="minor">
+            <a:schemeClr val="lt1"/>
+          </a:fontRef>
+        </p:style>
+        <p:txBody>
+          <a:bodyPr rtlCol="0" anchor="ctr"/>
+          <a:lstStyle/>
+          <a:p>
+            <a:pPr algn="ctr"/>
+          </a:p>
+        </p:txBody>
+      </p:sp>
+      <p:sp>
+        <p:nvSpPr>
+          <p:cNvPr id="13" name="Rectangle 12"/>
+          <p:cNvSpPr/>
+          <p:nvPr/>
+        </p:nvSpPr>
+        <p:spPr>
+          <a:xfrm>
+            <a:off x="5074920" y="1389888"/>
+            <a:ext cx="50292" cy="1307592"/>
+          </a:xfrm>
+          <a:prstGeom prst="rect">
+            <a:avLst/>
+          </a:prstGeom>
+          <a:solidFill>
+            <a:srgbClr val="D29922"/>
+          </a:solidFill>
+          <a:ln>
+            <a:noFill/>
+          </a:ln>
+        </p:spPr>
+        <p:style>
+          <a:lnRef idx="1">
+            <a:schemeClr val="accent1"/>
+          </a:lnRef>
+          <a:fillRef idx="3">
+            <a:schemeClr val="accent1"/>
+          </a:fillRef>
+          <a:effectRef idx="2">
+            <a:schemeClr val="accent1"/>
+          </a:effectRef>
+          <a:fontRef idx="minor">
+            <a:schemeClr val="lt1"/>
+          </a:fontRef>
+        </p:style>
+        <p:txBody>
+          <a:bodyPr rtlCol="0" anchor="ctr"/>
+          <a:lstStyle/>
+          <a:p>
+            <a:pPr algn="ctr"/>
+          </a:p>
+        </p:txBody>
+      </p:sp>
+      <p:sp>
+        <p:nvSpPr>
+          <p:cNvPr id="14" name="TextBox 13"/>
+          <p:cNvSpPr txBox="1"/>
+          <p:nvPr/>
+        </p:nvSpPr>
+        <p:spPr>
+          <a:xfrm>
+            <a:off x="5257800" y="1481328"/>
+            <a:ext cx="1709928" cy="1161288"/>
+          </a:xfrm>
+          <a:prstGeom prst="rect">
+            <a:avLst/>
+          </a:prstGeom>
+          <a:noFill/>
+        </p:spPr>
+        <p:txBody>
+          <a:bodyPr wrap="square" lIns="0" rIns="0" tIns="0" bIns="0">
+            <a:spAutoFit/>
+          </a:bodyPr>
+          <a:lstStyle/>
+          <a:p>
+            <a:pPr>
               <a:spcAft>
-                <a:spcPts val="600"/>
+                <a:spcPts val="400"/>
               </a:spcAft>
-              <a:defRPr sz="1150">
+              <a:defRPr sz="900" b="1">
+                <a:solidFill>
+                  <a:srgbClr val="D29922"/>
+                </a:solidFill>
+              </a:defRPr>
+            </a:pPr>
+            <a:r>
+              <a:t>ASSEMBLE</a:t>
+            </a:r>
+          </a:p>
+          <a:p>
+            <a:pPr>
+              <a:spcAft>
+                <a:spcPts val="300"/>
+              </a:spcAft>
+              <a:defRPr sz="1700" b="1">
                 <a:solidFill>
                   <a:srgbClr val="E6EDF3"/>
                 </a:solidFill>
               </a:defRPr>
             </a:pPr>
             <a:r>
-              <a:t>Budget: ≤ 2 s flow-idle timeout, ≤ 10 s window — bounded by construction, not measured as a tail.</a:t>
-            </a:r>
-          </a:p>
+              <a:t>Flows + windows</a:t>
+            </a:r>
+          </a:p>
+          <a:p>
+            <a:pPr>
+              <a:defRPr sz="1100">
+                <a:solidFill>
+                  <a:srgbClr val="9DA5B0"/>
+                </a:solidFill>
+              </a:defRPr>
+            </a:pPr>
+            <a:r>
+              <a:t>2 s idle · 10 s window</a:t>
+            </a:r>
+          </a:p>
+        </p:txBody>
+      </p:sp>
+      <p:sp>
+        <p:nvSpPr>
+          <p:cNvPr id="15" name="TextBox 14"/>
+          <p:cNvSpPr txBox="1"/>
+          <p:nvPr/>
+        </p:nvSpPr>
+        <p:spPr>
+          <a:xfrm>
+            <a:off x="7123176" y="1828800"/>
+            <a:ext cx="438912" cy="384048"/>
+          </a:xfrm>
+          <a:prstGeom prst="rect">
+            <a:avLst/>
+          </a:prstGeom>
+          <a:noFill/>
+        </p:spPr>
+        <p:txBody>
+          <a:bodyPr wrap="none">
+            <a:spAutoFit/>
+          </a:bodyPr>
+          <a:lstStyle/>
+          <a:p>
+            <a:pPr algn="ctr">
+              <a:defRPr sz="2000" b="1">
+                <a:solidFill>
+                  <a:srgbClr val="58A6FF"/>
+                </a:solidFill>
+              </a:defRPr>
+            </a:pPr>
+            <a:r>
+              <a:t>→</a:t>
+            </a:r>
+          </a:p>
+        </p:txBody>
+      </p:sp>
+      <p:sp>
+        <p:nvSpPr>
+          <p:cNvPr id="16" name="Rounded Rectangle 15"/>
+          <p:cNvSpPr/>
+          <p:nvPr/>
+        </p:nvSpPr>
+        <p:spPr>
+          <a:xfrm>
+            <a:off x="7360920" y="1389888"/>
+            <a:ext cx="2029968" cy="1307592"/>
+          </a:xfrm>
+          <a:prstGeom prst="roundRect">
+            <a:avLst/>
+          </a:prstGeom>
+          <a:solidFill>
+            <a:srgbClr val="161B22"/>
+          </a:solidFill>
+          <a:ln>
+            <a:solidFill>
+              <a:srgbClr val="303844"/>
+            </a:solidFill>
+          </a:ln>
+          <a:effectLst/>
+        </p:spPr>
+        <p:style>
+          <a:lnRef idx="1">
+            <a:schemeClr val="accent1"/>
+          </a:lnRef>
+          <a:fillRef idx="3">
+            <a:schemeClr val="accent1"/>
+          </a:fillRef>
+          <a:effectRef idx="2">
+            <a:schemeClr val="accent1"/>
+          </a:effectRef>
+          <a:fontRef idx="minor">
+            <a:schemeClr val="lt1"/>
+          </a:fontRef>
+        </p:style>
+        <p:txBody>
+          <a:bodyPr rtlCol="0" anchor="ctr"/>
+          <a:lstStyle/>
+          <a:p>
+            <a:pPr algn="ctr"/>
+          </a:p>
+        </p:txBody>
+      </p:sp>
+      <p:sp>
+        <p:nvSpPr>
+          <p:cNvPr id="17" name="Rectangle 16"/>
+          <p:cNvSpPr/>
+          <p:nvPr/>
+        </p:nvSpPr>
+        <p:spPr>
+          <a:xfrm>
+            <a:off x="7360920" y="1389888"/>
+            <a:ext cx="50292" cy="1307592"/>
+          </a:xfrm>
+          <a:prstGeom prst="rect">
+            <a:avLst/>
+          </a:prstGeom>
+          <a:solidFill>
+            <a:srgbClr val="58A6FF"/>
+          </a:solidFill>
+          <a:ln>
+            <a:noFill/>
+          </a:ln>
+        </p:spPr>
+        <p:style>
+          <a:lnRef idx="1">
+            <a:schemeClr val="accent1"/>
+          </a:lnRef>
+          <a:fillRef idx="3">
+            <a:schemeClr val="accent1"/>
+          </a:fillRef>
+          <a:effectRef idx="2">
+            <a:schemeClr val="accent1"/>
+          </a:effectRef>
+          <a:fontRef idx="minor">
+            <a:schemeClr val="lt1"/>
+          </a:fontRef>
+        </p:style>
+        <p:txBody>
+          <a:bodyPr rtlCol="0" anchor="ctr"/>
+          <a:lstStyle/>
+          <a:p>
+            <a:pPr algn="ctr"/>
+          </a:p>
+        </p:txBody>
+      </p:sp>
+      <p:sp>
+        <p:nvSpPr>
+          <p:cNvPr id="18" name="TextBox 17"/>
+          <p:cNvSpPr txBox="1"/>
+          <p:nvPr/>
+        </p:nvSpPr>
+        <p:spPr>
+          <a:xfrm>
+            <a:off x="7543800" y="1481328"/>
+            <a:ext cx="1709928" cy="1161288"/>
+          </a:xfrm>
+          <a:prstGeom prst="rect">
+            <a:avLst/>
+          </a:prstGeom>
+          <a:noFill/>
+        </p:spPr>
+        <p:txBody>
+          <a:bodyPr wrap="square" lIns="0" rIns="0" tIns="0" bIns="0">
+            <a:spAutoFit/>
+          </a:bodyPr>
+          <a:lstStyle/>
           <a:p>
             <a:pPr>
               <a:spcAft>
-                <a:spcPts val="600"/>
+                <a:spcPts val="400"/>
               </a:spcAft>
-              <a:defRPr sz="1350">
+              <a:defRPr sz="900" b="1">
                 <a:solidFill>
                   <a:srgbClr val="58A6FF"/>
                 </a:solidFill>
               </a:defRPr>
             </a:pPr>
             <a:r>
-              <a:t>Read-only ingest also constrains our own capture plumbing:</a:t>
-            </a:r>
-          </a:p>
-          <a:p>
-            <a:pPr lvl="1">
+              <a:t>DETECT</a:t>
+            </a:r>
+          </a:p>
+          <a:p>
+            <a:pPr>
               <a:spcAft>
-                <a:spcPts val="600"/>
+                <a:spcPts val="300"/>
               </a:spcAft>
-              <a:defRPr sz="1150">
+              <a:defRPr sz="1700" b="1">
                 <a:solidFill>
                   <a:srgbClr val="E6EDF3"/>
                 </a:solidFill>
               </a:defRPr>
             </a:pPr>
             <a:r>
-              <a:t>a non-packet-buffered FIFO writer (dumpcap without -U) quietly destroys the latency claim; PACKET_STATISTICS is read-and-clear, so drops are deltas.</a:t>
-            </a:r>
-          </a:p>
-          <a:p>
-            <a:pPr lvl="1">
+              <a:t>Rules + models</a:t>
+            </a:r>
+          </a:p>
+          <a:p>
+            <a:pPr>
+              <a:defRPr sz="1100">
+                <a:solidFill>
+                  <a:srgbClr val="9DA5B0"/>
+                </a:solidFill>
+              </a:defRPr>
+            </a:pPr>
+            <a:r>
+              <a:t>Observable fields only</a:t>
+            </a:r>
+          </a:p>
+        </p:txBody>
+      </p:sp>
+      <p:sp>
+        <p:nvSpPr>
+          <p:cNvPr id="19" name="TextBox 18"/>
+          <p:cNvSpPr txBox="1"/>
+          <p:nvPr/>
+        </p:nvSpPr>
+        <p:spPr>
+          <a:xfrm>
+            <a:off x="9409176" y="1828800"/>
+            <a:ext cx="438912" cy="384048"/>
+          </a:xfrm>
+          <a:prstGeom prst="rect">
+            <a:avLst/>
+          </a:prstGeom>
+          <a:noFill/>
+        </p:spPr>
+        <p:txBody>
+          <a:bodyPr wrap="none">
+            <a:spAutoFit/>
+          </a:bodyPr>
+          <a:lstStyle/>
+          <a:p>
+            <a:pPr algn="ctr">
+              <a:defRPr sz="2000" b="1">
+                <a:solidFill>
+                  <a:srgbClr val="58A6FF"/>
+                </a:solidFill>
+              </a:defRPr>
+            </a:pPr>
+            <a:r>
+              <a:t>→</a:t>
+            </a:r>
+          </a:p>
+        </p:txBody>
+      </p:sp>
+      <p:sp>
+        <p:nvSpPr>
+          <p:cNvPr id="20" name="Rounded Rectangle 19"/>
+          <p:cNvSpPr/>
+          <p:nvPr/>
+        </p:nvSpPr>
+        <p:spPr>
+          <a:xfrm>
+            <a:off x="9646920" y="1389888"/>
+            <a:ext cx="2029968" cy="1307592"/>
+          </a:xfrm>
+          <a:prstGeom prst="roundRect">
+            <a:avLst/>
+          </a:prstGeom>
+          <a:solidFill>
+            <a:srgbClr val="161B22"/>
+          </a:solidFill>
+          <a:ln>
+            <a:solidFill>
+              <a:srgbClr val="303844"/>
+            </a:solidFill>
+          </a:ln>
+          <a:effectLst/>
+        </p:spPr>
+        <p:style>
+          <a:lnRef idx="1">
+            <a:schemeClr val="accent1"/>
+          </a:lnRef>
+          <a:fillRef idx="3">
+            <a:schemeClr val="accent1"/>
+          </a:fillRef>
+          <a:effectRef idx="2">
+            <a:schemeClr val="accent1"/>
+          </a:effectRef>
+          <a:fontRef idx="minor">
+            <a:schemeClr val="lt1"/>
+          </a:fontRef>
+        </p:style>
+        <p:txBody>
+          <a:bodyPr rtlCol="0" anchor="ctr"/>
+          <a:lstStyle/>
+          <a:p>
+            <a:pPr algn="ctr"/>
+          </a:p>
+        </p:txBody>
+      </p:sp>
+      <p:sp>
+        <p:nvSpPr>
+          <p:cNvPr id="21" name="Rectangle 20"/>
+          <p:cNvSpPr/>
+          <p:nvPr/>
+        </p:nvSpPr>
+        <p:spPr>
+          <a:xfrm>
+            <a:off x="9646920" y="1389888"/>
+            <a:ext cx="50292" cy="1307592"/>
+          </a:xfrm>
+          <a:prstGeom prst="rect">
+            <a:avLst/>
+          </a:prstGeom>
+          <a:solidFill>
+            <a:srgbClr val="3FB950"/>
+          </a:solidFill>
+          <a:ln>
+            <a:noFill/>
+          </a:ln>
+        </p:spPr>
+        <p:style>
+          <a:lnRef idx="1">
+            <a:schemeClr val="accent1"/>
+          </a:lnRef>
+          <a:fillRef idx="3">
+            <a:schemeClr val="accent1"/>
+          </a:fillRef>
+          <a:effectRef idx="2">
+            <a:schemeClr val="accent1"/>
+          </a:effectRef>
+          <a:fontRef idx="minor">
+            <a:schemeClr val="lt1"/>
+          </a:fontRef>
+        </p:style>
+        <p:txBody>
+          <a:bodyPr rtlCol="0" anchor="ctr"/>
+          <a:lstStyle/>
+          <a:p>
+            <a:pPr algn="ctr"/>
+          </a:p>
+        </p:txBody>
+      </p:sp>
+      <p:sp>
+        <p:nvSpPr>
+          <p:cNvPr id="22" name="TextBox 21"/>
+          <p:cNvSpPr txBox="1"/>
+          <p:nvPr/>
+        </p:nvSpPr>
+        <p:spPr>
+          <a:xfrm>
+            <a:off x="9829800" y="1481328"/>
+            <a:ext cx="1709928" cy="1161288"/>
+          </a:xfrm>
+          <a:prstGeom prst="rect">
+            <a:avLst/>
+          </a:prstGeom>
+          <a:noFill/>
+        </p:spPr>
+        <p:txBody>
+          <a:bodyPr wrap="square" lIns="0" rIns="0" tIns="0" bIns="0">
+            <a:spAutoFit/>
+          </a:bodyPr>
+          <a:lstStyle/>
+          <a:p>
+            <a:pPr>
               <a:spcAft>
-                <a:spcPts val="600"/>
+                <a:spcPts val="400"/>
               </a:spcAft>
-              <a:defRPr sz="1150">
+              <a:defRPr sz="900" b="1">
+                <a:solidFill>
+                  <a:srgbClr val="3FB950"/>
+                </a:solidFill>
+              </a:defRPr>
+            </a:pPr>
+            <a:r>
+              <a:t>PRESENT</a:t>
+            </a:r>
+          </a:p>
+          <a:p>
+            <a:pPr>
+              <a:spcAft>
+                <a:spcPts val="300"/>
+              </a:spcAft>
+              <a:defRPr sz="1700" b="1">
                 <a:solidFill>
                   <a:srgbClr val="E6EDF3"/>
                 </a:solidFill>
               </a:defRPr>
             </a:pPr>
             <a:r>
-              <a:t>We found a real bug where ICMP/GRE/ESP frames were dropped without incrementing any counter — thrown-away frames looked processed. Fixed with an explicit counter and a tested invariant that the buckets partition everything seen.</a:t>
-            </a:r>
-          </a:p>
+              <a:t>Alert + dashboard</a:t>
+            </a:r>
+          </a:p>
+          <a:p>
+            <a:pPr>
+              <a:defRPr sz="1100">
+                <a:solidFill>
+                  <a:srgbClr val="9DA5B0"/>
+                </a:solidFill>
+              </a:defRPr>
+            </a:pPr>
+            <a:r>
+              <a:t>Record appears as emitted</a:t>
+            </a:r>
+          </a:p>
+        </p:txBody>
+      </p:sp>
+      <p:sp>
+        <p:nvSpPr>
+          <p:cNvPr id="23" name="Rounded Rectangle 22"/>
+          <p:cNvSpPr/>
+          <p:nvPr/>
+        </p:nvSpPr>
+        <p:spPr>
+          <a:xfrm>
+            <a:off x="731520" y="3154680"/>
+            <a:ext cx="5166360" cy="2148840"/>
+          </a:xfrm>
+          <a:prstGeom prst="roundRect">
+            <a:avLst/>
+          </a:prstGeom>
+          <a:solidFill>
+            <a:srgbClr val="161B22"/>
+          </a:solidFill>
+          <a:ln>
+            <a:solidFill>
+              <a:srgbClr val="303844"/>
+            </a:solidFill>
+          </a:ln>
+          <a:effectLst/>
+        </p:spPr>
+        <p:style>
+          <a:lnRef idx="1">
+            <a:schemeClr val="accent1"/>
+          </a:lnRef>
+          <a:fillRef idx="3">
+            <a:schemeClr val="accent1"/>
+          </a:fillRef>
+          <a:effectRef idx="2">
+            <a:schemeClr val="accent1"/>
+          </a:effectRef>
+          <a:fontRef idx="minor">
+            <a:schemeClr val="lt1"/>
+          </a:fontRef>
+        </p:style>
+        <p:txBody>
+          <a:bodyPr rtlCol="0" anchor="ctr"/>
+          <a:lstStyle/>
+          <a:p>
+            <a:pPr algn="ctr"/>
+          </a:p>
+        </p:txBody>
+      </p:sp>
+      <p:sp>
+        <p:nvSpPr>
+          <p:cNvPr id="24" name="Rectangle 23"/>
+          <p:cNvSpPr/>
+          <p:nvPr/>
+        </p:nvSpPr>
+        <p:spPr>
+          <a:xfrm>
+            <a:off x="731520" y="3154680"/>
+            <a:ext cx="50292" cy="2148840"/>
+          </a:xfrm>
+          <a:prstGeom prst="rect">
+            <a:avLst/>
+          </a:prstGeom>
+          <a:solidFill>
+            <a:srgbClr val="D29922"/>
+          </a:solidFill>
+          <a:ln>
+            <a:noFill/>
+          </a:ln>
+        </p:spPr>
+        <p:style>
+          <a:lnRef idx="1">
+            <a:schemeClr val="accent1"/>
+          </a:lnRef>
+          <a:fillRef idx="3">
+            <a:schemeClr val="accent1"/>
+          </a:fillRef>
+          <a:effectRef idx="2">
+            <a:schemeClr val="accent1"/>
+          </a:effectRef>
+          <a:fontRef idx="minor">
+            <a:schemeClr val="lt1"/>
+          </a:fontRef>
+        </p:style>
+        <p:txBody>
+          <a:bodyPr rtlCol="0" anchor="ctr"/>
+          <a:lstStyle/>
+          <a:p>
+            <a:pPr algn="ctr"/>
+          </a:p>
+        </p:txBody>
+      </p:sp>
+      <p:sp>
+        <p:nvSpPr>
+          <p:cNvPr id="25" name="TextBox 24"/>
+          <p:cNvSpPr txBox="1"/>
+          <p:nvPr/>
+        </p:nvSpPr>
+        <p:spPr>
+          <a:xfrm>
+            <a:off x="914400" y="3246120"/>
+            <a:ext cx="4846320" cy="2002536"/>
+          </a:xfrm>
+          <a:prstGeom prst="rect">
+            <a:avLst/>
+          </a:prstGeom>
+          <a:noFill/>
+        </p:spPr>
+        <p:txBody>
+          <a:bodyPr wrap="square" lIns="0" rIns="0" tIns="0" bIns="0">
+            <a:spAutoFit/>
+          </a:bodyPr>
+          <a:lstStyle/>
           <a:p>
             <a:pPr>
               <a:spcAft>
-                <a:spcPts val="600"/>
+                <a:spcPts val="400"/>
               </a:spcAft>
-              <a:defRPr sz="1350">
-                <a:solidFill>
-                  <a:srgbClr val="58A6FF"/>
-                </a:solidFill>
-              </a:defRPr>
-            </a:pPr>
-            <a:r>
-              <a:t>Forensics = reproducible + accurate:</a:t>
-            </a:r>
-          </a:p>
-          <a:p>
-            <a:pPr lvl="1">
+              <a:defRPr sz="900" b="1">
+                <a:solidFill>
+                  <a:srgbClr val="D29922"/>
+                </a:solidFill>
+              </a:defRPr>
+            </a:pPr>
+            <a:r>
+              <a:t>TIMING + SENSOR</a:t>
+            </a:r>
+          </a:p>
+          <a:p>
+            <a:pPr>
               <a:spcAft>
-                <a:spcPts val="600"/>
+                <a:spcPts val="300"/>
               </a:spcAft>
-              <a:defRPr sz="1150">
+              <a:defRPr sz="1700" b="1">
                 <a:solidFill>
                   <a:srgbClr val="E6EDF3"/>
                 </a:solidFill>
               </a:defRPr>
             </a:pPr>
             <a:r>
-              <a:t>replay reproduces the alert files byte-for-byte against committed regression fixtures, and dpkt vs scapy parity is asserted identical (--parity).</a:t>
-            </a:r>
-          </a:p>
-          <a:p>
-            <a:pPr lvl="1">
+              <a:t>The clock closes the window</a:t>
+            </a:r>
+          </a:p>
+          <a:p>
+            <a:pPr>
+              <a:defRPr sz="1100">
+                <a:solidFill>
+                  <a:srgbClr val="9DA5B0"/>
+                </a:solidFill>
+              </a:defRPr>
+            </a:pPr>
+            <a:r>
+              <a:t>The ≤2 s flow-idle timeout and ≤10 s window set the processing bounds; they are not a measured p95 latency claim. One-second health heartbeats continue while the source is idle. Packet-stream kernel drops stay unknown.</a:t>
+            </a:r>
+          </a:p>
+        </p:txBody>
+      </p:sp>
+      <p:sp>
+        <p:nvSpPr>
+          <p:cNvPr id="26" name="Rounded Rectangle 25"/>
+          <p:cNvSpPr/>
+          <p:nvPr/>
+        </p:nvSpPr>
+        <p:spPr>
+          <a:xfrm>
+            <a:off x="6263640" y="3154680"/>
+            <a:ext cx="5166360" cy="2148840"/>
+          </a:xfrm>
+          <a:prstGeom prst="roundRect">
+            <a:avLst/>
+          </a:prstGeom>
+          <a:solidFill>
+            <a:srgbClr val="161B22"/>
+          </a:solidFill>
+          <a:ln>
+            <a:solidFill>
+              <a:srgbClr val="303844"/>
+            </a:solidFill>
+          </a:ln>
+          <a:effectLst/>
+        </p:spPr>
+        <p:style>
+          <a:lnRef idx="1">
+            <a:schemeClr val="accent1"/>
+          </a:lnRef>
+          <a:fillRef idx="3">
+            <a:schemeClr val="accent1"/>
+          </a:fillRef>
+          <a:effectRef idx="2">
+            <a:schemeClr val="accent1"/>
+          </a:effectRef>
+          <a:fontRef idx="minor">
+            <a:schemeClr val="lt1"/>
+          </a:fontRef>
+        </p:style>
+        <p:txBody>
+          <a:bodyPr rtlCol="0" anchor="ctr"/>
+          <a:lstStyle/>
+          <a:p>
+            <a:pPr algn="ctr"/>
+          </a:p>
+        </p:txBody>
+      </p:sp>
+      <p:sp>
+        <p:nvSpPr>
+          <p:cNvPr id="27" name="Rectangle 26"/>
+          <p:cNvSpPr/>
+          <p:nvPr/>
+        </p:nvSpPr>
+        <p:spPr>
+          <a:xfrm>
+            <a:off x="6263640" y="3154680"/>
+            <a:ext cx="50292" cy="2148840"/>
+          </a:xfrm>
+          <a:prstGeom prst="rect">
+            <a:avLst/>
+          </a:prstGeom>
+          <a:solidFill>
+            <a:srgbClr val="3FB950"/>
+          </a:solidFill>
+          <a:ln>
+            <a:noFill/>
+          </a:ln>
+        </p:spPr>
+        <p:style>
+          <a:lnRef idx="1">
+            <a:schemeClr val="accent1"/>
+          </a:lnRef>
+          <a:fillRef idx="3">
+            <a:schemeClr val="accent1"/>
+          </a:fillRef>
+          <a:effectRef idx="2">
+            <a:schemeClr val="accent1"/>
+          </a:effectRef>
+          <a:fontRef idx="minor">
+            <a:schemeClr val="lt1"/>
+          </a:fontRef>
+        </p:style>
+        <p:txBody>
+          <a:bodyPr rtlCol="0" anchor="ctr"/>
+          <a:lstStyle/>
+          <a:p>
+            <a:pPr algn="ctr"/>
+          </a:p>
+        </p:txBody>
+      </p:sp>
+      <p:sp>
+        <p:nvSpPr>
+          <p:cNvPr id="28" name="TextBox 27"/>
+          <p:cNvSpPr txBox="1"/>
+          <p:nvPr/>
+        </p:nvSpPr>
+        <p:spPr>
+          <a:xfrm>
+            <a:off x="6446520" y="3246120"/>
+            <a:ext cx="4846320" cy="2002536"/>
+          </a:xfrm>
+          <a:prstGeom prst="rect">
+            <a:avLst/>
+          </a:prstGeom>
+          <a:noFill/>
+        </p:spPr>
+        <p:txBody>
+          <a:bodyPr wrap="square" lIns="0" rIns="0" tIns="0" bIns="0">
+            <a:spAutoFit/>
+          </a:bodyPr>
+          <a:lstStyle/>
+          <a:p>
+            <a:pPr>
               <a:spcAft>
-                <a:spcPts val="600"/>
+                <a:spcPts val="400"/>
               </a:spcAft>
-              <a:defRPr sz="1150">
+              <a:defRPr sz="900" b="1">
+                <a:solidFill>
+                  <a:srgbClr val="3FB950"/>
+                </a:solidFill>
+              </a:defRPr>
+            </a:pPr>
+            <a:r>
+              <a:t>REPLAY + BACKEND PARITY</a:t>
+            </a:r>
+          </a:p>
+          <a:p>
+            <a:pPr>
+              <a:spcAft>
+                <a:spcPts val="300"/>
+              </a:spcAft>
+              <a:defRPr sz="1700" b="1">
                 <a:solidFill>
                   <a:srgbClr val="E6EDF3"/>
                 </a:solidFill>
               </a:defRPr>
             </a:pPr>
             <a:r>
-              <a:t>we also caught our own evidence bug: live timestamps rendered the millisecond field one second off — invisible offline, fatal live. The timestamp is evidence.</a:t>
+              <a:t>Current archive: 45 / 67</a:t>
+            </a:r>
+          </a:p>
+          <a:p>
+            <a:pPr>
+              <a:defRPr sz="1100">
+                <a:solidFill>
+                  <a:srgbClr val="9DA5B0"/>
+                </a:solidFill>
+              </a:defRPr>
+            </a:pPr>
+            <a:r>
+              <a:t>14,049-packet capture; preserved refs remain 46 / 68. One invalid synthetic-QUIC tls_known_malware record was removed; fixture migration is pending. Current dpkt and Scapy alert records match. This is replay evidence, not chain of custody.</a:t>
+            </a:r>
+          </a:p>
+        </p:txBody>
+      </p:sp>
+      <p:sp>
+        <p:nvSpPr>
+          <p:cNvPr id="29" name="Rounded Rectangle 28"/>
+          <p:cNvSpPr/>
+          <p:nvPr/>
+        </p:nvSpPr>
+        <p:spPr>
+          <a:xfrm>
+            <a:off x="1554480" y="5650992"/>
+            <a:ext cx="9052560" cy="484632"/>
+          </a:xfrm>
+          <a:prstGeom prst="roundRect">
+            <a:avLst/>
+          </a:prstGeom>
+          <a:solidFill>
+            <a:srgbClr val="141A24"/>
+          </a:solidFill>
+          <a:ln>
+            <a:solidFill>
+              <a:srgbClr val="303844"/>
+            </a:solidFill>
+          </a:ln>
+          <a:effectLst/>
+        </p:spPr>
+        <p:style>
+          <a:lnRef idx="1">
+            <a:schemeClr val="accent1"/>
+          </a:lnRef>
+          <a:fillRef idx="3">
+            <a:schemeClr val="accent1"/>
+          </a:fillRef>
+          <a:effectRef idx="2">
+            <a:schemeClr val="accent1"/>
+          </a:effectRef>
+          <a:fontRef idx="minor">
+            <a:schemeClr val="lt1"/>
+          </a:fontRef>
+        </p:style>
+        <p:txBody>
+          <a:bodyPr rtlCol="0" anchor="ctr"/>
+          <a:lstStyle/>
+          <a:p>
+            <a:pPr algn="ctr"/>
+          </a:p>
+        </p:txBody>
+      </p:sp>
+      <p:sp>
+        <p:nvSpPr>
+          <p:cNvPr id="30" name="TextBox 29"/>
+          <p:cNvSpPr txBox="1"/>
+          <p:nvPr/>
+        </p:nvSpPr>
+        <p:spPr>
+          <a:xfrm>
+            <a:off x="1737360" y="5733288"/>
+            <a:ext cx="8686800" cy="274320"/>
+          </a:xfrm>
+          <a:prstGeom prst="rect">
+            <a:avLst/>
+          </a:prstGeom>
+          <a:noFill/>
+        </p:spPr>
+        <p:txBody>
+          <a:bodyPr wrap="none">
+            <a:spAutoFit/>
+          </a:bodyPr>
+          <a:lstStyle/>
+          <a:p>
+            <a:pPr algn="ctr">
+              <a:defRPr sz="1200">
+                <a:solidFill>
+                  <a:srgbClr val="9DA5B0"/>
+                </a:solidFill>
+              </a:defRPr>
+            </a:pPr>
+            <a:r>
+              <a:t>Paced FIFO smoke: alerts observed while replay writer and analysis pipeline are still active</a:t>
             </a:r>
           </a:p>
         </p:txBody>
@@ -7900,7 +11518,7 @@
               </a:defRPr>
             </a:pPr>
             <a:r>
-              <a:t>Class (a) — three answers to have ready before a judge notices</a:t>
+              <a:t>DEMO 01 · Open the live overview</a:t>
             </a:r>
           </a:p>
           <a:p>
@@ -7912,21 +11530,134 @@
               </a:defRPr>
             </a:pPr>
             <a:r>
-              <a:t>Volumetric / protocol DDoS from flow-level rate and source-IP entropy</a:t>
-            </a:r>
-          </a:p>
-        </p:txBody>
-      </p:sp>
-      <p:sp>
-        <p:nvSpPr>
-          <p:cNvPr id="4" name="TextBox 3"/>
+              <a:t>Active replay · the alert queue and sensor status update as traffic arrives</a:t>
+            </a:r>
+          </a:p>
+        </p:txBody>
+      </p:sp>
+      <p:pic>
+        <p:nvPicPr>
+          <p:cNvPr id="4" name="Picture 3" descr="dashboard-live-demo.png"/>
+          <p:cNvPicPr>
+            <a:picLocks noChangeAspect="1"/>
+          </p:cNvPicPr>
+          <p:nvPr/>
+        </p:nvPicPr>
+        <p:blipFill>
+          <a:blip r:embed="rId2"/>
+          <a:stretch>
+            <a:fillRect/>
+          </a:stretch>
+        </p:blipFill>
+        <p:spPr>
+          <a:xfrm>
+            <a:off x="502920" y="1298448"/>
+            <a:ext cx="6720840" cy="4667250"/>
+          </a:xfrm>
+          <a:prstGeom prst="rect">
+            <a:avLst/>
+          </a:prstGeom>
+        </p:spPr>
+      </p:pic>
+      <p:sp>
+        <p:nvSpPr>
+          <p:cNvPr id="5" name="Rounded Rectangle 4"/>
+          <p:cNvSpPr/>
+          <p:nvPr/>
+        </p:nvSpPr>
+        <p:spPr>
+          <a:xfrm>
+            <a:off x="7498079" y="1417320"/>
+            <a:ext cx="4160520" cy="1298448"/>
+          </a:xfrm>
+          <a:prstGeom prst="roundRect">
+            <a:avLst/>
+          </a:prstGeom>
+          <a:solidFill>
+            <a:srgbClr val="161B22"/>
+          </a:solidFill>
+          <a:ln>
+            <a:solidFill>
+              <a:srgbClr val="303844"/>
+            </a:solidFill>
+          </a:ln>
+          <a:effectLst/>
+        </p:spPr>
+        <p:style>
+          <a:lnRef idx="1">
+            <a:schemeClr val="accent1"/>
+          </a:lnRef>
+          <a:fillRef idx="3">
+            <a:schemeClr val="accent1"/>
+          </a:fillRef>
+          <a:effectRef idx="2">
+            <a:schemeClr val="accent1"/>
+          </a:effectRef>
+          <a:fontRef idx="minor">
+            <a:schemeClr val="lt1"/>
+          </a:fontRef>
+        </p:style>
+        <p:txBody>
+          <a:bodyPr rtlCol="0" anchor="ctr"/>
+          <a:lstStyle/>
+          <a:p>
+            <a:pPr algn="ctr"/>
+          </a:p>
+        </p:txBody>
+      </p:sp>
+      <p:sp>
+        <p:nvSpPr>
+          <p:cNvPr id="6" name="Rectangle 5"/>
+          <p:cNvSpPr/>
+          <p:nvPr/>
+        </p:nvSpPr>
+        <p:spPr>
+          <a:xfrm>
+            <a:off x="7498079" y="1417320"/>
+            <a:ext cx="50292" cy="1298448"/>
+          </a:xfrm>
+          <a:prstGeom prst="rect">
+            <a:avLst/>
+          </a:prstGeom>
+          <a:solidFill>
+            <a:srgbClr val="3FB950"/>
+          </a:solidFill>
+          <a:ln>
+            <a:noFill/>
+          </a:ln>
+        </p:spPr>
+        <p:style>
+          <a:lnRef idx="1">
+            <a:schemeClr val="accent1"/>
+          </a:lnRef>
+          <a:fillRef idx="3">
+            <a:schemeClr val="accent1"/>
+          </a:fillRef>
+          <a:effectRef idx="2">
+            <a:schemeClr val="accent1"/>
+          </a:effectRef>
+          <a:fontRef idx="minor">
+            <a:schemeClr val="lt1"/>
+          </a:fontRef>
+        </p:style>
+        <p:txBody>
+          <a:bodyPr rtlCol="0" anchor="ctr"/>
+          <a:lstStyle/>
+          <a:p>
+            <a:pPr algn="ctr"/>
+          </a:p>
+        </p:txBody>
+      </p:sp>
+      <p:sp>
+        <p:nvSpPr>
+          <p:cNvPr id="7" name="TextBox 6"/>
           <p:cNvSpPr txBox="1"/>
           <p:nvPr/>
         </p:nvSpPr>
         <p:spPr>
           <a:xfrm>
-            <a:off x="502920" y="1234440"/>
-            <a:ext cx="11185855" cy="5303520"/>
+            <a:off x="7680959" y="1508760"/>
+            <a:ext cx="3840480" cy="1152144"/>
           </a:xfrm>
           <a:prstGeom prst="rect">
             <a:avLst/>
@@ -7934,113 +11665,393 @@
           <a:noFill/>
         </p:spPr>
         <p:txBody>
-          <a:bodyPr wrap="square">
+          <a:bodyPr wrap="square" lIns="0" rIns="0" tIns="0" bIns="0">
             <a:spAutoFit/>
           </a:bodyPr>
           <a:lstStyle/>
           <a:p>
             <a:pPr>
               <a:spcAft>
-                <a:spcPts val="600"/>
+                <a:spcPts val="400"/>
               </a:spcAft>
-              <a:defRPr sz="1500">
+              <a:defRPr sz="900" b="1">
+                <a:solidFill>
+                  <a:srgbClr val="3FB950"/>
+                </a:solidFill>
+              </a:defRPr>
+            </a:pPr>
+            <a:r>
+              <a:t>STREAM</a:t>
+            </a:r>
+          </a:p>
+          <a:p>
+            <a:pPr>
+              <a:spcAft>
+                <a:spcPts val="300"/>
+              </a:spcAft>
+              <a:defRPr sz="1700" b="1">
+                <a:solidFill>
+                  <a:srgbClr val="E6EDF3"/>
+                </a:solidFill>
+              </a:defRPr>
+            </a:pPr>
+            <a:r>
+              <a:t>Alerts arrive during replay</a:t>
+            </a:r>
+          </a:p>
+          <a:p>
+            <a:pPr>
+              <a:defRPr sz="1100">
+                <a:solidFill>
+                  <a:srgbClr val="9DA5B0"/>
+                </a:solidFill>
+              </a:defRPr>
+            </a:pPr>
+            <a:r>
+              <a:t>Dashboard starts first; the pipeline writes each alert as it fires.</a:t>
+            </a:r>
+          </a:p>
+        </p:txBody>
+      </p:sp>
+      <p:sp>
+        <p:nvSpPr>
+          <p:cNvPr id="8" name="Rounded Rectangle 7"/>
+          <p:cNvSpPr/>
+          <p:nvPr/>
+        </p:nvSpPr>
+        <p:spPr>
+          <a:xfrm>
+            <a:off x="7498079" y="2971800"/>
+            <a:ext cx="4160520" cy="1298448"/>
+          </a:xfrm>
+          <a:prstGeom prst="roundRect">
+            <a:avLst/>
+          </a:prstGeom>
+          <a:solidFill>
+            <a:srgbClr val="161B22"/>
+          </a:solidFill>
+          <a:ln>
+            <a:solidFill>
+              <a:srgbClr val="303844"/>
+            </a:solidFill>
+          </a:ln>
+          <a:effectLst/>
+        </p:spPr>
+        <p:style>
+          <a:lnRef idx="1">
+            <a:schemeClr val="accent1"/>
+          </a:lnRef>
+          <a:fillRef idx="3">
+            <a:schemeClr val="accent1"/>
+          </a:fillRef>
+          <a:effectRef idx="2">
+            <a:schemeClr val="accent1"/>
+          </a:effectRef>
+          <a:fontRef idx="minor">
+            <a:schemeClr val="lt1"/>
+          </a:fontRef>
+        </p:style>
+        <p:txBody>
+          <a:bodyPr rtlCol="0" anchor="ctr"/>
+          <a:lstStyle/>
+          <a:p>
+            <a:pPr algn="ctr"/>
+          </a:p>
+        </p:txBody>
+      </p:sp>
+      <p:sp>
+        <p:nvSpPr>
+          <p:cNvPr id="9" name="Rectangle 8"/>
+          <p:cNvSpPr/>
+          <p:nvPr/>
+        </p:nvSpPr>
+        <p:spPr>
+          <a:xfrm>
+            <a:off x="7498079" y="2971800"/>
+            <a:ext cx="50292" cy="1298448"/>
+          </a:xfrm>
+          <a:prstGeom prst="rect">
+            <a:avLst/>
+          </a:prstGeom>
+          <a:solidFill>
+            <a:srgbClr val="58A6FF"/>
+          </a:solidFill>
+          <a:ln>
+            <a:noFill/>
+          </a:ln>
+        </p:spPr>
+        <p:style>
+          <a:lnRef idx="1">
+            <a:schemeClr val="accent1"/>
+          </a:lnRef>
+          <a:fillRef idx="3">
+            <a:schemeClr val="accent1"/>
+          </a:fillRef>
+          <a:effectRef idx="2">
+            <a:schemeClr val="accent1"/>
+          </a:effectRef>
+          <a:fontRef idx="minor">
+            <a:schemeClr val="lt1"/>
+          </a:fontRef>
+        </p:style>
+        <p:txBody>
+          <a:bodyPr rtlCol="0" anchor="ctr"/>
+          <a:lstStyle/>
+          <a:p>
+            <a:pPr algn="ctr"/>
+          </a:p>
+        </p:txBody>
+      </p:sp>
+      <p:sp>
+        <p:nvSpPr>
+          <p:cNvPr id="10" name="TextBox 9"/>
+          <p:cNvSpPr txBox="1"/>
+          <p:nvPr/>
+        </p:nvSpPr>
+        <p:spPr>
+          <a:xfrm>
+            <a:off x="7680959" y="3063240"/>
+            <a:ext cx="3840480" cy="1152144"/>
+          </a:xfrm>
+          <a:prstGeom prst="rect">
+            <a:avLst/>
+          </a:prstGeom>
+          <a:noFill/>
+        </p:spPr>
+        <p:txBody>
+          <a:bodyPr wrap="square" lIns="0" rIns="0" tIns="0" bIns="0">
+            <a:spAutoFit/>
+          </a:bodyPr>
+          <a:lstStyle/>
+          <a:p>
+            <a:pPr>
+              <a:spcAft>
+                <a:spcPts val="400"/>
+              </a:spcAft>
+              <a:defRPr sz="900" b="1">
                 <a:solidFill>
                   <a:srgbClr val="58A6FF"/>
                 </a:solidFill>
               </a:defRPr>
             </a:pPr>
             <a:r>
-              <a:t>There is no ddos_syn_flood in the shipped alert file — and that is correct.</a:t>
-            </a:r>
-          </a:p>
-          <a:p>
-            <a:pPr lvl="1">
+              <a:t>EVIDENCE</a:t>
+            </a:r>
+          </a:p>
+          <a:p>
+            <a:pPr>
               <a:spcAft>
-                <a:spcPts val="600"/>
+                <a:spcPts val="300"/>
               </a:spcAft>
-              <a:defRPr sz="1300">
+              <a:defRPr sz="1700" b="1">
                 <a:solidFill>
                   <a:srgbClr val="E6EDF3"/>
                 </a:solidFill>
               </a:defRPr>
             </a:pPr>
             <a:r>
-              <a:t>The spoofed-source branch (distinct source IPs ≥ 500) is checked first and is strictly more specific, so a spoofed SYN flood is reported once as ddos_volumetric_spoofed, with syn_ratio in the evidence (~0.93 on this capture).</a:t>
-            </a:r>
-          </a:p>
-          <a:p>
-            <a:pPr lvl="1">
+              <a:t>Counts describe records</a:t>
+            </a:r>
+          </a:p>
+          <a:p>
+            <a:pPr>
+              <a:defRPr sz="1100">
+                <a:solidFill>
+                  <a:srgbClr val="9DA5B0"/>
+                </a:solidFill>
+              </a:defRPr>
+            </a:pPr>
+            <a:r>
+              <a:t>Rule, model and correlation records stay distinct; correlations reuse signals.</a:t>
+            </a:r>
+          </a:p>
+        </p:txBody>
+      </p:sp>
+      <p:sp>
+        <p:nvSpPr>
+          <p:cNvPr id="11" name="Rounded Rectangle 10"/>
+          <p:cNvSpPr/>
+          <p:nvPr/>
+        </p:nvSpPr>
+        <p:spPr>
+          <a:xfrm>
+            <a:off x="7498079" y="4526280"/>
+            <a:ext cx="4160520" cy="1298448"/>
+          </a:xfrm>
+          <a:prstGeom prst="roundRect">
+            <a:avLst/>
+          </a:prstGeom>
+          <a:solidFill>
+            <a:srgbClr val="161B22"/>
+          </a:solidFill>
+          <a:ln>
+            <a:solidFill>
+              <a:srgbClr val="303844"/>
+            </a:solidFill>
+          </a:ln>
+          <a:effectLst/>
+        </p:spPr>
+        <p:style>
+          <a:lnRef idx="1">
+            <a:schemeClr val="accent1"/>
+          </a:lnRef>
+          <a:fillRef idx="3">
+            <a:schemeClr val="accent1"/>
+          </a:fillRef>
+          <a:effectRef idx="2">
+            <a:schemeClr val="accent1"/>
+          </a:effectRef>
+          <a:fontRef idx="minor">
+            <a:schemeClr val="lt1"/>
+          </a:fontRef>
+        </p:style>
+        <p:txBody>
+          <a:bodyPr rtlCol="0" anchor="ctr"/>
+          <a:lstStyle/>
+          <a:p>
+            <a:pPr algn="ctr"/>
+          </a:p>
+        </p:txBody>
+      </p:sp>
+      <p:sp>
+        <p:nvSpPr>
+          <p:cNvPr id="12" name="Rectangle 11"/>
+          <p:cNvSpPr/>
+          <p:nvPr/>
+        </p:nvSpPr>
+        <p:spPr>
+          <a:xfrm>
+            <a:off x="7498079" y="4526280"/>
+            <a:ext cx="50292" cy="1298448"/>
+          </a:xfrm>
+          <a:prstGeom prst="rect">
+            <a:avLst/>
+          </a:prstGeom>
+          <a:solidFill>
+            <a:srgbClr val="D29922"/>
+          </a:solidFill>
+          <a:ln>
+            <a:noFill/>
+          </a:ln>
+        </p:spPr>
+        <p:style>
+          <a:lnRef idx="1">
+            <a:schemeClr val="accent1"/>
+          </a:lnRef>
+          <a:fillRef idx="3">
+            <a:schemeClr val="accent1"/>
+          </a:fillRef>
+          <a:effectRef idx="2">
+            <a:schemeClr val="accent1"/>
+          </a:effectRef>
+          <a:fontRef idx="minor">
+            <a:schemeClr val="lt1"/>
+          </a:fontRef>
+        </p:style>
+        <p:txBody>
+          <a:bodyPr rtlCol="0" anchor="ctr"/>
+          <a:lstStyle/>
+          <a:p>
+            <a:pPr algn="ctr"/>
+          </a:p>
+        </p:txBody>
+      </p:sp>
+      <p:sp>
+        <p:nvSpPr>
+          <p:cNvPr id="13" name="TextBox 12"/>
+          <p:cNvSpPr txBox="1"/>
+          <p:nvPr/>
+        </p:nvSpPr>
+        <p:spPr>
+          <a:xfrm>
+            <a:off x="7680959" y="4617720"/>
+            <a:ext cx="3840480" cy="1152144"/>
+          </a:xfrm>
+          <a:prstGeom prst="rect">
+            <a:avLst/>
+          </a:prstGeom>
+          <a:noFill/>
+        </p:spPr>
+        <p:txBody>
+          <a:bodyPr wrap="square" lIns="0" rIns="0" tIns="0" bIns="0">
+            <a:spAutoFit/>
+          </a:bodyPr>
+          <a:lstStyle/>
+          <a:p>
+            <a:pPr>
               <a:spcAft>
-                <a:spcPts val="600"/>
+                <a:spcPts val="400"/>
               </a:spcAft>
-              <a:defRPr sz="1300">
+              <a:defRPr sz="900" b="1">
+                <a:solidFill>
+                  <a:srgbClr val="D29922"/>
+                </a:solidFill>
+              </a:defRPr>
+            </a:pPr>
+            <a:r>
+              <a:t>SENSOR HEALTH</a:t>
+            </a:r>
+          </a:p>
+          <a:p>
+            <a:pPr>
+              <a:spcAft>
+                <a:spcPts val="300"/>
+              </a:spcAft>
+              <a:defRPr sz="1700" b="1">
+                <a:solidFill>
+                  <a:srgbClr val="E6EDF3"/>
+                </a:solidFill>
+              </a:defRPr>
+            </a:pPr>
+            <a:r>
+              <a:t>Measured status stays visible</a:t>
+            </a:r>
+          </a:p>
+          <a:p>
+            <a:pPr>
+              <a:defRPr sz="1100">
                 <a:solidFill>
                   <a:srgbClr val="9DA5B0"/>
                 </a:solidFill>
               </a:defRPr>
             </a:pPr>
             <a:r>
-              <a:t>Say that before someone greps for syn_flood and finds nothing.</a:t>
-            </a:r>
-          </a:p>
-          <a:p>
-            <a:pPr>
-              <a:spcAft>
-                <a:spcPts val="600"/>
-              </a:spcAft>
-              <a:defRPr sz="1500">
-                <a:solidFill>
-                  <a:srgbClr val="58A6FF"/>
-                </a:solidFill>
-              </a:defRPr>
-            </a:pPr>
-            <a:r>
-              <a:t>“Is entropy actually used in the decision?”</a:t>
-            </a:r>
-          </a:p>
-          <a:p>
-            <a:pPr lvl="1">
-              <a:spcAft>
-                <a:spcPts val="600"/>
-              </a:spcAft>
-              <a:defRPr sz="1300">
-                <a:solidFill>
-                  <a:srgbClr val="E6EDF3"/>
-                </a:solidFill>
-              </a:defRPr>
-            </a:pPr>
-            <a:r>
-              <a:t>The decision variable is distinct-source cardinality; Shannon entropy is computed and carried on the alert. They are the same information (entropy is bounded by log2(distinct)) and cardinality gives a threshold that does not drift with window occupancy.</a:t>
-            </a:r>
-          </a:p>
-          <a:p>
-            <a:pPr>
-              <a:spcAft>
-                <a:spcPts val="600"/>
-              </a:spcAft>
-              <a:defRPr sz="1500">
-                <a:solidFill>
-                  <a:srgbClr val="D29922"/>
-                </a:solidFill>
-              </a:defRPr>
-            </a:pPr>
-            <a:r>
-              <a:t>UDP reflection / amplification is not separately modelled.</a:t>
-            </a:r>
-          </a:p>
-          <a:p>
-            <a:pPr lvl="1">
-              <a:spcAft>
-                <a:spcPts val="600"/>
-              </a:spcAft>
-              <a:defRPr sz="1300">
-                <a:solidFill>
-                  <a:srgbClr val="E6EDF3"/>
-                </a:solidFill>
-              </a:defRPr>
-            </a:pPr>
-            <a:r>
-              <a:t>It is a volumetric flood and rate + entropy catches the symptom, but we do not characterise the reflection signature. Owned openly in the gaps slide.</a:t>
+              <a:t>Heartbeat, last packet and counts; pcap kernel drops remain unknown.</a:t>
+            </a:r>
+          </a:p>
+        </p:txBody>
+      </p:sp>
+      <p:sp>
+        <p:nvSpPr>
+          <p:cNvPr id="14" name="TextBox 13"/>
+          <p:cNvSpPr txBox="1"/>
+          <p:nvPr/>
+        </p:nvSpPr>
+        <p:spPr>
+          <a:xfrm>
+            <a:off x="502920" y="6382512"/>
+            <a:ext cx="6766560" cy="237744"/>
+          </a:xfrm>
+          <a:prstGeom prst="rect">
+            <a:avLst/>
+          </a:prstGeom>
+          <a:noFill/>
+        </p:spPr>
+        <p:txBody>
+          <a:bodyPr wrap="none">
+            <a:spAutoFit/>
+          </a:bodyPr>
+          <a:lstStyle/>
+          <a:p>
+            <a:pPr>
+              <a:defRPr sz="900">
+                <a:solidFill>
+                  <a:srgbClr val="9DA5B0"/>
+                </a:solidFill>
+              </a:defRPr>
+            </a:pPr>
+            <a:r>
+              <a:t>Synthetic traffic and simulated local indicator · no external threat feed claimed</a:t>
             </a:r>
           </a:p>
         </p:txBody>
@@ -8122,7 +12133,7 @@
               </a:defRPr>
             </a:pPr>
             <a:r>
-              <a:t>Throughput — stated and demonstrated, as the statement requires</a:t>
+              <a:t>DEMO 02 · Inspect a signal, then pivot to its source</a:t>
             </a:r>
           </a:p>
           <a:p>
@@ -8134,405 +12145,51 @@
               </a:defRPr>
             </a:pPr>
             <a:r>
-              <a:t>Pure Python, one CPU core, no C extension, no GPU</a:t>
-            </a:r>
-          </a:p>
-        </p:txBody>
-      </p:sp>
-      <p:graphicFrame>
-        <p:nvGraphicFramePr>
-          <p:cNvPr id="4" name="Table 3"/>
-          <p:cNvGraphicFramePr>
-            <a:graphicFrameLocks noGrp="1"/>
-          </p:cNvGraphicFramePr>
-          <p:nvPr/>
-        </p:nvGraphicFramePr>
-        <p:xfrm>
-          <a:off x="502920" y="1371600"/>
-          <a:ext cx="11155678" cy="932688"/>
-        </p:xfrm>
-        <a:graphic>
-          <a:graphicData uri="http://schemas.openxmlformats.org/drawingml/2006/table">
-            <a:tbl>
-              <a:tblPr firstRow="1" bandRow="1">
-                <a:tableStyleId>{5C22544A-7EE6-4342-B048-85BDC9FD1C3A}</a:tableStyleId>
-              </a:tblPr>
-              <a:tblGrid>
-                <a:gridCol w="3305386"/>
-                <a:gridCol w="2685626"/>
-                <a:gridCol w="2479040"/>
-                <a:gridCol w="2685626"/>
-              </a:tblGrid>
-              <a:tr h="310896">
-                <a:tc>
-                  <a:txBody>
-                    <a:bodyPr/>
-                    <a:lstStyle/>
-                    <a:p>
-                      <a:pPr>
-                        <a:defRPr sz="1400" b="1">
-                          <a:solidFill>
-                            <a:srgbClr val="58A6FF"/>
-                          </a:solidFill>
-                        </a:defRPr>
-                      </a:pPr>
-                      <a:r>
-                        <a:t>Mode</a:t>
-                      </a:r>
-                    </a:p>
-                  </a:txBody>
-                  <a:tcPr marL="73152" marR="54864" marT="18288" marB="18288" anchor="ctr">
-                    <a:solidFill>
-                      <a:srgbClr val="1C222B"/>
-                    </a:solidFill>
-                  </a:tcPr>
-                </a:tc>
-                <a:tc>
-                  <a:txBody>
-                    <a:bodyPr/>
-                    <a:lstStyle/>
-                    <a:p>
-                      <a:pPr>
-                        <a:defRPr sz="1400" b="1">
-                          <a:solidFill>
-                            <a:srgbClr val="58A6FF"/>
-                          </a:solidFill>
-                        </a:defRPr>
-                      </a:pPr>
-                      <a:r>
-                        <a:t>Packets/s</a:t>
-                      </a:r>
-                    </a:p>
-                  </a:txBody>
-                  <a:tcPr marL="73152" marR="54864" marT="18288" marB="18288" anchor="ctr">
-                    <a:solidFill>
-                      <a:srgbClr val="1C222B"/>
-                    </a:solidFill>
-                  </a:tcPr>
-                </a:tc>
-                <a:tc>
-                  <a:txBody>
-                    <a:bodyPr/>
-                    <a:lstStyle/>
-                    <a:p>
-                      <a:pPr>
-                        <a:defRPr sz="1400" b="1">
-                          <a:solidFill>
-                            <a:srgbClr val="58A6FF"/>
-                          </a:solidFill>
-                        </a:defRPr>
-                      </a:pPr>
-                      <a:r>
-                        <a:t>Sustained rate</a:t>
-                      </a:r>
-                    </a:p>
-                  </a:txBody>
-                  <a:tcPr marL="73152" marR="54864" marT="18288" marB="18288" anchor="ctr">
-                    <a:solidFill>
-                      <a:srgbClr val="1C222B"/>
-                    </a:solidFill>
-                  </a:tcPr>
-                </a:tc>
-                <a:tc>
-                  <a:txBody>
-                    <a:bodyPr/>
-                    <a:lstStyle/>
-                    <a:p>
-                      <a:pPr>
-                        <a:defRPr sz="1400" b="1">
-                          <a:solidFill>
-                            <a:srgbClr val="58A6FF"/>
-                          </a:solidFill>
-                        </a:defRPr>
-                      </a:pPr>
-                      <a:r>
-                        <a:t>Flows/s</a:t>
-                      </a:r>
-                    </a:p>
-                  </a:txBody>
-                  <a:tcPr marL="73152" marR="54864" marT="18288" marB="18288" anchor="ctr">
-                    <a:solidFill>
-                      <a:srgbClr val="1C222B"/>
-                    </a:solidFill>
-                  </a:tcPr>
-                </a:tc>
-              </a:tr>
-              <a:tr h="310896">
-                <a:tc>
-                  <a:txBody>
-                    <a:bodyPr/>
-                    <a:lstStyle/>
-                    <a:p>
-                      <a:pPr>
-                        <a:defRPr sz="1400" b="0">
-                          <a:solidFill>
-                            <a:srgbClr val="E6EDF3"/>
-                          </a:solidFill>
-                        </a:defRPr>
-                      </a:pPr>
-                      <a:r>
-                        <a:t>Rules only (dpkt)</a:t>
-                      </a:r>
-                    </a:p>
-                  </a:txBody>
-                  <a:tcPr marL="73152" marR="54864" marT="18288" marB="18288" anchor="ctr">
-                    <a:solidFill>
-                      <a:srgbClr val="161B22"/>
-                    </a:solidFill>
-                  </a:tcPr>
-                </a:tc>
-                <a:tc>
-                  <a:txBody>
-                    <a:bodyPr/>
-                    <a:lstStyle/>
-                    <a:p>
-                      <a:pPr>
-                        <a:defRPr sz="1400" b="0">
-                          <a:solidFill>
-                            <a:srgbClr val="E6EDF3"/>
-                          </a:solidFill>
-                        </a:defRPr>
-                      </a:pPr>
-                      <a:r>
-                        <a:t>≈ 48,600 – 50,400</a:t>
-                      </a:r>
-                    </a:p>
-                  </a:txBody>
-                  <a:tcPr marL="73152" marR="54864" marT="18288" marB="18288" anchor="ctr">
-                    <a:solidFill>
-                      <a:srgbClr val="161B22"/>
-                    </a:solidFill>
-                  </a:tcPr>
-                </a:tc>
-                <a:tc>
-                  <a:txBody>
-                    <a:bodyPr/>
-                    <a:lstStyle/>
-                    <a:p>
-                      <a:pPr>
-                        <a:defRPr sz="1400" b="0">
-                          <a:solidFill>
-                            <a:srgbClr val="E6EDF3"/>
-                          </a:solidFill>
-                        </a:defRPr>
-                      </a:pPr>
-                      <a:r>
-                        <a:t>≈ 240 Mbps</a:t>
-                      </a:r>
-                    </a:p>
-                  </a:txBody>
-                  <a:tcPr marL="73152" marR="54864" marT="18288" marB="18288" anchor="ctr">
-                    <a:solidFill>
-                      <a:srgbClr val="161B22"/>
-                    </a:solidFill>
-                  </a:tcPr>
-                </a:tc>
-                <a:tc>
-                  <a:txBody>
-                    <a:bodyPr/>
-                    <a:lstStyle/>
-                    <a:p>
-                      <a:pPr>
-                        <a:defRPr sz="1400" b="0">
-                          <a:solidFill>
-                            <a:srgbClr val="E6EDF3"/>
-                          </a:solidFill>
-                        </a:defRPr>
-                      </a:pPr>
-                      <a:r>
-                        <a:t>≈ 19,200 – 20,300</a:t>
-                      </a:r>
-                    </a:p>
-                  </a:txBody>
-                  <a:tcPr marL="73152" marR="54864" marT="18288" marB="18288" anchor="ctr">
-                    <a:solidFill>
-                      <a:srgbClr val="161B22"/>
-                    </a:solidFill>
-                  </a:tcPr>
-                </a:tc>
-              </a:tr>
-              <a:tr h="310896">
-                <a:tc>
-                  <a:txBody>
-                    <a:bodyPr/>
-                    <a:lstStyle/>
-                    <a:p>
-                      <a:pPr>
-                        <a:defRPr sz="1400" b="0">
-                          <a:solidFill>
-                            <a:srgbClr val="E6EDF3"/>
-                          </a:solidFill>
-                        </a:defRPr>
-                      </a:pPr>
-                      <a:r>
-                        <a:t>With ML tier (LightGBM)</a:t>
-                      </a:r>
-                    </a:p>
-                  </a:txBody>
-                  <a:tcPr marL="73152" marR="54864" marT="18288" marB="18288" anchor="ctr">
-                    <a:solidFill>
-                      <a:srgbClr val="161B22"/>
-                    </a:solidFill>
-                  </a:tcPr>
-                </a:tc>
-                <a:tc>
-                  <a:txBody>
-                    <a:bodyPr/>
-                    <a:lstStyle/>
-                    <a:p>
-                      <a:pPr>
-                        <a:defRPr sz="1400" b="0">
-                          <a:solidFill>
-                            <a:srgbClr val="E6EDF3"/>
-                          </a:solidFill>
-                        </a:defRPr>
-                      </a:pPr>
-                      <a:r>
-                        <a:t>≈ 24,000 – 31,000</a:t>
-                      </a:r>
-                    </a:p>
-                  </a:txBody>
-                  <a:tcPr marL="73152" marR="54864" marT="18288" marB="18288" anchor="ctr">
-                    <a:solidFill>
-                      <a:srgbClr val="161B22"/>
-                    </a:solidFill>
-                  </a:tcPr>
-                </a:tc>
-                <a:tc>
-                  <a:txBody>
-                    <a:bodyPr/>
-                    <a:lstStyle/>
-                    <a:p>
-                      <a:pPr>
-                        <a:defRPr sz="1400" b="0">
-                          <a:solidFill>
-                            <a:srgbClr val="E6EDF3"/>
-                          </a:solidFill>
-                        </a:defRPr>
-                      </a:pPr>
-                      <a:r>
-                        <a:t>≈ 120 – 155 Mbps</a:t>
-                      </a:r>
-                    </a:p>
-                  </a:txBody>
-                  <a:tcPr marL="73152" marR="54864" marT="18288" marB="18288" anchor="ctr">
-                    <a:solidFill>
-                      <a:srgbClr val="161B22"/>
-                    </a:solidFill>
-                  </a:tcPr>
-                </a:tc>
-                <a:tc>
-                  <a:txBody>
-                    <a:bodyPr/>
-                    <a:lstStyle/>
-                    <a:p>
-                      <a:pPr>
-                        <a:defRPr sz="1400" b="0">
-                          <a:solidFill>
-                            <a:srgbClr val="E6EDF3"/>
-                          </a:solidFill>
-                        </a:defRPr>
-                      </a:pPr>
-                      <a:r>
-                        <a:t>≈ 9,700 – 11,800</a:t>
-                      </a:r>
-                    </a:p>
-                  </a:txBody>
-                  <a:tcPr marL="73152" marR="54864" marT="18288" marB="18288" anchor="ctr">
-                    <a:solidFill>
-                      <a:srgbClr val="161B22"/>
-                    </a:solidFill>
-                  </a:tcPr>
-                </a:tc>
-              </a:tr>
-            </a:tbl>
-          </a:graphicData>
-        </a:graphic>
-      </p:graphicFrame>
-      <p:sp>
-        <p:nvSpPr>
-          <p:cNvPr id="5" name="TextBox 4"/>
-          <p:cNvSpPr txBox="1"/>
-          <p:nvPr/>
-        </p:nvSpPr>
-        <p:spPr>
-          <a:xfrm>
-            <a:off x="502920" y="2926080"/>
-            <a:ext cx="11185855" cy="3611880"/>
+              <a:t>The screenshots capture two real interactions in the running dashboard</a:t>
+            </a:r>
+          </a:p>
+        </p:txBody>
+      </p:sp>
+      <p:pic>
+        <p:nvPicPr>
+          <p:cNvPr id="4" name="Picture 3" descr="alert-review-demo.png"/>
+          <p:cNvPicPr>
+            <a:picLocks noChangeAspect="1"/>
+          </p:cNvPicPr>
+          <p:nvPr/>
+        </p:nvPicPr>
+        <p:blipFill>
+          <a:blip r:embed="rId2"/>
+          <a:stretch>
+            <a:fillRect/>
+          </a:stretch>
+        </p:blipFill>
+        <p:spPr>
+          <a:xfrm>
+            <a:off x="502920" y="1298448"/>
+            <a:ext cx="7406640" cy="5143500"/>
           </a:xfrm>
           <a:prstGeom prst="rect">
             <a:avLst/>
           </a:prstGeom>
-          <a:noFill/>
-        </p:spPr>
-        <p:txBody>
-          <a:bodyPr wrap="square">
-            <a:spAutoFit/>
-          </a:bodyPr>
-          <a:lstStyle/>
-          <a:p>
-            <a:pPr>
-              <a:spcAft>
-                <a:spcPts val="600"/>
-              </a:spcAft>
-              <a:defRPr sz="1500">
-                <a:solidFill>
-                  <a:srgbClr val="E6EDF3"/>
-                </a:solidFill>
-              </a:defRPr>
-            </a:pPr>
-            <a:r>
-              <a:t>This capture: 14,049 packets, 8,622,217 bytes, 598.8 s, mean packet 613.7 B, 5,225 distinct flows (4,617 SYN-only, 720 DNS, 7,107 TLS).</a:t>
-            </a:r>
-          </a:p>
-          <a:p>
-            <a:pPr>
-              <a:spcAft>
-                <a:spcPts val="600"/>
-              </a:spcAft>
-              <a:defRPr sz="1500">
-                <a:solidFill>
-                  <a:srgbClr val="9DA5B0"/>
-                </a:solidFill>
-              </a:defRPr>
-            </a:pPr>
-            <a:r>
-              <a:t>The ML tier is quoted as a range on purpose: it varies with model warm-up and cache state, so a single false-precision number would not be reproducible.</a:t>
-            </a:r>
-          </a:p>
-          <a:p>
-            <a:pPr>
-              <a:spcAft>
-                <a:spcPts val="600"/>
-              </a:spcAft>
-              <a:defRPr sz="1500">
-                <a:solidFill>
-                  <a:srgbClr val="E6EDF3"/>
-                </a:solidFill>
-              </a:defRPr>
-            </a:pPr>
-            <a:r>
-              <a:t>For a SYN flood the binding number is packets/s, not Mbps — small packets are cheaper per byte. pkt/s is the honest headline; Mbps is the translation the statement asks for, using this capture’s mean packet size.</a:t>
-            </a:r>
-          </a:p>
-        </p:txBody>
-      </p:sp>
-      <p:sp>
-        <p:nvSpPr>
-          <p:cNvPr id="6" name="Rounded Rectangle 5"/>
+        </p:spPr>
+      </p:pic>
+      <p:sp>
+        <p:nvSpPr>
+          <p:cNvPr id="5" name="Rounded Rectangle 4"/>
           <p:cNvSpPr/>
           <p:nvPr/>
         </p:nvSpPr>
         <p:spPr>
           <a:xfrm>
-            <a:off x="502920" y="5486400"/>
-            <a:ext cx="11185855" cy="868680"/>
+            <a:off x="8138160" y="1353312"/>
+            <a:ext cx="3520440" cy="1353312"/>
           </a:xfrm>
           <a:prstGeom prst="roundRect">
             <a:avLst/>
           </a:prstGeom>
           <a:solidFill>
-            <a:srgbClr val="1A160E"/>
+            <a:srgbClr val="161B22"/>
           </a:solidFill>
           <a:ln>
             <a:solidFill>
@@ -8565,14 +12222,57 @@
       </p:sp>
       <p:sp>
         <p:nvSpPr>
+          <p:cNvPr id="6" name="Rectangle 5"/>
+          <p:cNvSpPr/>
+          <p:nvPr/>
+        </p:nvSpPr>
+        <p:spPr>
+          <a:xfrm>
+            <a:off x="8138160" y="1353312"/>
+            <a:ext cx="50292" cy="1353312"/>
+          </a:xfrm>
+          <a:prstGeom prst="rect">
+            <a:avLst/>
+          </a:prstGeom>
+          <a:solidFill>
+            <a:srgbClr val="58A6FF"/>
+          </a:solidFill>
+          <a:ln>
+            <a:noFill/>
+          </a:ln>
+        </p:spPr>
+        <p:style>
+          <a:lnRef idx="1">
+            <a:schemeClr val="accent1"/>
+          </a:lnRef>
+          <a:fillRef idx="3">
+            <a:schemeClr val="accent1"/>
+          </a:fillRef>
+          <a:effectRef idx="2">
+            <a:schemeClr val="accent1"/>
+          </a:effectRef>
+          <a:fontRef idx="minor">
+            <a:schemeClr val="lt1"/>
+          </a:fontRef>
+        </p:style>
+        <p:txBody>
+          <a:bodyPr rtlCol="0" anchor="ctr"/>
+          <a:lstStyle/>
+          <a:p>
+            <a:pPr algn="ctr"/>
+          </a:p>
+        </p:txBody>
+      </p:sp>
+      <p:sp>
+        <p:nvSpPr>
           <p:cNvPr id="7" name="TextBox 6"/>
           <p:cNvSpPr txBox="1"/>
           <p:nvPr/>
         </p:nvSpPr>
         <p:spPr>
           <a:xfrm>
-            <a:off x="685800" y="5577840"/>
-            <a:ext cx="10820095" cy="685800"/>
+            <a:off x="8321040" y="1444752"/>
+            <a:ext cx="3200400" cy="1207008"/>
           </a:xfrm>
           <a:prstGeom prst="rect">
             <a:avLst/>
@@ -8580,34 +12280,372 @@
           <a:noFill/>
         </p:spPr>
         <p:txBody>
-          <a:bodyPr wrap="square">
+          <a:bodyPr wrap="square" lIns="0" rIns="0" tIns="0" bIns="0">
             <a:spAutoFit/>
           </a:bodyPr>
           <a:lstStyle/>
           <a:p>
             <a:pPr>
-              <a:defRPr sz="1500" i="1">
+              <a:spcAft>
+                <a:spcPts val="400"/>
+              </a:spcAft>
+              <a:defRPr sz="900" b="1">
+                <a:solidFill>
+                  <a:srgbClr val="58A6FF"/>
+                </a:solidFill>
+              </a:defRPr>
+            </a:pPr>
+            <a:r>
+              <a:t>STEP 1 · OPEN ALERT</a:t>
+            </a:r>
+          </a:p>
+          <a:p>
+            <a:pPr>
+              <a:spcAft>
+                <a:spcPts val="300"/>
+              </a:spcAft>
+              <a:defRPr sz="1700" b="1">
+                <a:solidFill>
+                  <a:srgbClr val="E6EDF3"/>
+                </a:solidFill>
+              </a:defRPr>
+            </a:pPr>
+            <a:r>
+              <a:t>Periodic flow pattern</a:t>
+            </a:r>
+          </a:p>
+          <a:p>
+            <a:pPr>
+              <a:defRPr sz="1100">
+                <a:solidFill>
+                  <a:srgbClr val="9DA5B0"/>
+                </a:solidFill>
+              </a:defRPr>
+            </a:pPr>
+            <a:r>
+              <a:t>Six observed flows · mean interval 4.98 s · CV 0.0179 against a 0.15 gate.</a:t>
+            </a:r>
+          </a:p>
+        </p:txBody>
+      </p:sp>
+      <p:sp>
+        <p:nvSpPr>
+          <p:cNvPr id="8" name="Rounded Rectangle 7"/>
+          <p:cNvSpPr/>
+          <p:nvPr/>
+        </p:nvSpPr>
+        <p:spPr>
+          <a:xfrm>
+            <a:off x="8138160" y="2944368"/>
+            <a:ext cx="3520440" cy="1353312"/>
+          </a:xfrm>
+          <a:prstGeom prst="roundRect">
+            <a:avLst/>
+          </a:prstGeom>
+          <a:solidFill>
+            <a:srgbClr val="161B22"/>
+          </a:solidFill>
+          <a:ln>
+            <a:solidFill>
+              <a:srgbClr val="303844"/>
+            </a:solidFill>
+          </a:ln>
+          <a:effectLst/>
+        </p:spPr>
+        <p:style>
+          <a:lnRef idx="1">
+            <a:schemeClr val="accent1"/>
+          </a:lnRef>
+          <a:fillRef idx="3">
+            <a:schemeClr val="accent1"/>
+          </a:fillRef>
+          <a:effectRef idx="2">
+            <a:schemeClr val="accent1"/>
+          </a:effectRef>
+          <a:fontRef idx="minor">
+            <a:schemeClr val="lt1"/>
+          </a:fontRef>
+        </p:style>
+        <p:txBody>
+          <a:bodyPr rtlCol="0" anchor="ctr"/>
+          <a:lstStyle/>
+          <a:p>
+            <a:pPr algn="ctr"/>
+          </a:p>
+        </p:txBody>
+      </p:sp>
+      <p:sp>
+        <p:nvSpPr>
+          <p:cNvPr id="9" name="Rectangle 8"/>
+          <p:cNvSpPr/>
+          <p:nvPr/>
+        </p:nvSpPr>
+        <p:spPr>
+          <a:xfrm>
+            <a:off x="8138160" y="2944368"/>
+            <a:ext cx="50292" cy="1353312"/>
+          </a:xfrm>
+          <a:prstGeom prst="rect">
+            <a:avLst/>
+          </a:prstGeom>
+          <a:solidFill>
+            <a:srgbClr val="D29922"/>
+          </a:solidFill>
+          <a:ln>
+            <a:noFill/>
+          </a:ln>
+        </p:spPr>
+        <p:style>
+          <a:lnRef idx="1">
+            <a:schemeClr val="accent1"/>
+          </a:lnRef>
+          <a:fillRef idx="3">
+            <a:schemeClr val="accent1"/>
+          </a:fillRef>
+          <a:effectRef idx="2">
+            <a:schemeClr val="accent1"/>
+          </a:effectRef>
+          <a:fontRef idx="minor">
+            <a:schemeClr val="lt1"/>
+          </a:fontRef>
+        </p:style>
+        <p:txBody>
+          <a:bodyPr rtlCol="0" anchor="ctr"/>
+          <a:lstStyle/>
+          <a:p>
+            <a:pPr algn="ctr"/>
+          </a:p>
+        </p:txBody>
+      </p:sp>
+      <p:sp>
+        <p:nvSpPr>
+          <p:cNvPr id="10" name="TextBox 9"/>
+          <p:cNvSpPr txBox="1"/>
+          <p:nvPr/>
+        </p:nvSpPr>
+        <p:spPr>
+          <a:xfrm>
+            <a:off x="8321040" y="3035808"/>
+            <a:ext cx="3200400" cy="1207008"/>
+          </a:xfrm>
+          <a:prstGeom prst="rect">
+            <a:avLst/>
+          </a:prstGeom>
+          <a:noFill/>
+        </p:spPr>
+        <p:txBody>
+          <a:bodyPr wrap="square" lIns="0" rIns="0" tIns="0" bIns="0">
+            <a:spAutoFit/>
+          </a:bodyPr>
+          <a:lstStyle/>
+          <a:p>
+            <a:pPr>
+              <a:spcAft>
+                <a:spcPts val="400"/>
+              </a:spcAft>
+              <a:defRPr sz="900" b="1">
+                <a:solidFill>
+                  <a:srgbClr val="D29922"/>
+                </a:solidFill>
+              </a:defRPr>
+            </a:pPr>
+            <a:r>
+              <a:t>STEP 2 · READ LIMITS</a:t>
+            </a:r>
+          </a:p>
+          <a:p>
+            <a:pPr>
+              <a:spcAft>
+                <a:spcPts val="300"/>
+              </a:spcAft>
+              <a:defRPr sz="1700" b="1">
+                <a:solidFill>
+                  <a:srgbClr val="E6EDF3"/>
+                </a:solidFill>
+              </a:defRPr>
+            </a:pPr>
+            <a:r>
+              <a:t>Pattern is evidence, not proof</a:t>
+            </a:r>
+          </a:p>
+          <a:p>
+            <a:pPr>
+              <a:defRPr sz="1100">
+                <a:solidFill>
+                  <a:srgbClr val="9DA5B0"/>
+                </a:solidFill>
+              </a:defRPr>
+            </a:pPr>
+            <a:r>
+              <a:t>Scheduled jobs and cloud telemetry can look periodic. Scores are not calibrated probabilities.</a:t>
+            </a:r>
+          </a:p>
+        </p:txBody>
+      </p:sp>
+      <p:sp>
+        <p:nvSpPr>
+          <p:cNvPr id="11" name="Rounded Rectangle 10"/>
+          <p:cNvSpPr/>
+          <p:nvPr/>
+        </p:nvSpPr>
+        <p:spPr>
+          <a:xfrm>
+            <a:off x="8138160" y="4535424"/>
+            <a:ext cx="3520440" cy="1353312"/>
+          </a:xfrm>
+          <a:prstGeom prst="roundRect">
+            <a:avLst/>
+          </a:prstGeom>
+          <a:solidFill>
+            <a:srgbClr val="161B22"/>
+          </a:solidFill>
+          <a:ln>
+            <a:solidFill>
+              <a:srgbClr val="303844"/>
+            </a:solidFill>
+          </a:ln>
+          <a:effectLst/>
+        </p:spPr>
+        <p:style>
+          <a:lnRef idx="1">
+            <a:schemeClr val="accent1"/>
+          </a:lnRef>
+          <a:fillRef idx="3">
+            <a:schemeClr val="accent1"/>
+          </a:fillRef>
+          <a:effectRef idx="2">
+            <a:schemeClr val="accent1"/>
+          </a:effectRef>
+          <a:fontRef idx="minor">
+            <a:schemeClr val="lt1"/>
+          </a:fontRef>
+        </p:style>
+        <p:txBody>
+          <a:bodyPr rtlCol="0" anchor="ctr"/>
+          <a:lstStyle/>
+          <a:p>
+            <a:pPr algn="ctr"/>
+          </a:p>
+        </p:txBody>
+      </p:sp>
+      <p:sp>
+        <p:nvSpPr>
+          <p:cNvPr id="12" name="Rectangle 11"/>
+          <p:cNvSpPr/>
+          <p:nvPr/>
+        </p:nvSpPr>
+        <p:spPr>
+          <a:xfrm>
+            <a:off x="8138160" y="4535424"/>
+            <a:ext cx="50292" cy="1353312"/>
+          </a:xfrm>
+          <a:prstGeom prst="rect">
+            <a:avLst/>
+          </a:prstGeom>
+          <a:solidFill>
+            <a:srgbClr val="3FB950"/>
+          </a:solidFill>
+          <a:ln>
+            <a:noFill/>
+          </a:ln>
+        </p:spPr>
+        <p:style>
+          <a:lnRef idx="1">
+            <a:schemeClr val="accent1"/>
+          </a:lnRef>
+          <a:fillRef idx="3">
+            <a:schemeClr val="accent1"/>
+          </a:fillRef>
+          <a:effectRef idx="2">
+            <a:schemeClr val="accent1"/>
+          </a:effectRef>
+          <a:fontRef idx="minor">
+            <a:schemeClr val="lt1"/>
+          </a:fontRef>
+        </p:style>
+        <p:txBody>
+          <a:bodyPr rtlCol="0" anchor="ctr"/>
+          <a:lstStyle/>
+          <a:p>
+            <a:pPr algn="ctr"/>
+          </a:p>
+        </p:txBody>
+      </p:sp>
+      <p:sp>
+        <p:nvSpPr>
+          <p:cNvPr id="13" name="TextBox 12"/>
+          <p:cNvSpPr txBox="1"/>
+          <p:nvPr/>
+        </p:nvSpPr>
+        <p:spPr>
+          <a:xfrm>
+            <a:off x="8321040" y="4626864"/>
+            <a:ext cx="3200400" cy="1207008"/>
+          </a:xfrm>
+          <a:prstGeom prst="rect">
+            <a:avLst/>
+          </a:prstGeom>
+          <a:noFill/>
+        </p:spPr>
+        <p:txBody>
+          <a:bodyPr wrap="square" lIns="0" rIns="0" tIns="0" bIns="0">
+            <a:spAutoFit/>
+          </a:bodyPr>
+          <a:lstStyle/>
+          <a:p>
+            <a:pPr>
+              <a:spcAft>
+                <a:spcPts val="400"/>
+              </a:spcAft>
+              <a:defRPr sz="900" b="1">
                 <a:solidFill>
                   <a:srgbClr val="3FB950"/>
                 </a:solidFill>
               </a:defRPr>
             </a:pPr>
             <a:r>
-              <a:t>“About 50,000 packets per second — roughly 240 Mbps sustained — on a single CPU core, in pure Python with no C extension and no GPU. With the ML tier scoring every closed flow it drops to roughly 24 to 31 thousand.”</a:t>
-            </a:r>
-          </a:p>
-        </p:txBody>
-      </p:sp>
-      <p:sp>
-        <p:nvSpPr>
-          <p:cNvPr id="8" name="TextBox 7"/>
+              <a:t>STEP 3 · SCOPE SOURCE</a:t>
+            </a:r>
+          </a:p>
+          <a:p>
+            <a:pPr>
+              <a:spcAft>
+                <a:spcPts val="300"/>
+              </a:spcAft>
+              <a:defRPr sz="1700" b="1">
+                <a:solidFill>
+                  <a:srgbClr val="E6EDF3"/>
+                </a:solidFill>
+              </a:defRPr>
+            </a:pPr>
+            <a:r>
+              <a:t>Filter to the observed host</a:t>
+            </a:r>
+          </a:p>
+          <a:p>
+            <a:pPr>
+              <a:defRPr sz="1100">
+                <a:solidFill>
+                  <a:srgbClr val="9DA5B0"/>
+                </a:solidFill>
+              </a:defRPr>
+            </a:pPr>
+            <a:r>
+              <a:t>Compare its flow times with the host schedule; return to the full queue to restore context.</a:t>
+            </a:r>
+          </a:p>
+        </p:txBody>
+      </p:sp>
+      <p:sp>
+        <p:nvSpPr>
+          <p:cNvPr id="14" name="TextBox 13"/>
           <p:cNvSpPr txBox="1"/>
           <p:nvPr/>
         </p:nvSpPr>
         <p:spPr>
           <a:xfrm>
-            <a:off x="502920" y="6400800"/>
-            <a:ext cx="11185855" cy="365760"/>
+            <a:off x="502920" y="6510528"/>
+            <a:ext cx="7315200" cy="219456"/>
           </a:xfrm>
           <a:prstGeom prst="rect">
             <a:avLst/>
@@ -8621,14 +12659,14 @@
           <a:lstStyle/>
           <a:p>
             <a:pPr>
-              <a:defRPr sz="1100">
-                <a:solidFill>
-                  <a:srgbClr val="D29922"/>
-                </a:solidFill>
-              </a:defRPr>
-            </a:pPr>
-            <a:r>
-              <a:t>Do not lead with the real-time factor: the capture is sparse (≈ 23 pkt/s ≈ 0.11 Mbps), so “~2,000× real-time” is one measurement restated. Quote it only as a repeatability claim.</a:t>
+              <a:defRPr sz="900">
+                <a:solidFill>
+                  <a:srgbClr val="9DA5B0"/>
+                </a:solidFill>
+              </a:defRPr>
+            </a:pPr>
+            <a:r>
+              <a:t>Synthetic replay · one-way client metadata · no successful session inferred</a:t>
             </a:r>
           </a:p>
         </p:txBody>
